--- a/apresentacoes/BESS_Brasil_Lucas_Silva_Costa.pptx
+++ b/apresentacoes/BESS_Brasil_Lucas_Silva_Costa.pptx
@@ -20,9 +20,11 @@
     <p:sldId id="268" r:id="rId14"/>
     <p:sldId id="269" r:id="rId15"/>
     <p:sldId id="270" r:id="rId16"/>
+    <p:sldId id="271" r:id="rId17"/>
+    <p:sldId id="272" r:id="rId18"/>
   </p:sldIdLst>
   <p:notesMasterIdLst>
-    <p:notesMasterId r:id="rId17"/>
+    <p:notesMasterId r:id="rId19"/>
   </p:notesMasterIdLst>
   <p:sldSz cx="12192000" cy="6858000"/>
   <p:notesSz cx="6858000" cy="12192000"/>
@@ -604,7 +606,7 @@
           <a:p>
             <a:r>
               <a:rPr lang="en-US" dirty="0"/>
-              <a:t>Cenário agro otimizado: TIR 28%, payback ~5 anos, VPL R$ 11,1 mi (base: 21% / 7a9m / R$ 6,37 mi). Spread de ~R$ 256/MWh entre LCOE e preço da cota sustenta o modelo; o slide seguinte detalha as alavancas.</a:t>
+              <a:t>Composição do investimento de R$ 13,9 milhões. Destaque: BESS em azul (12,59%) e módulos FV em amarelo (27,5%).</a:t>
             </a:r>
             <a:endParaRPr lang="en-US" dirty="0"/>
           </a:p>
@@ -692,7 +694,7 @@
           <a:p>
             <a:r>
               <a:rPr lang="en-US" dirty="0"/>
-              <a:t>As três alavancas que levam o payback de 7a9m para ~5 anos: desconto noturno do irrigante (60-90%), crédito subsidiado do Plano Safra 2026/27 e benchmarks de mercado (5-6 anos em GD+BESS).</a:t>
+              <a:t>MT: isenção de ICMS (17%) sobre energia compensada desde 2016; redução de 20% a.a. a partir de 2029 e fim em 2033. Bônus: ICMS zero em equipamentos de irrigação reduz o CAPEX do bombeamento.</a:t>
             </a:r>
             <a:endParaRPr lang="en-US" dirty="0"/>
           </a:p>
@@ -780,7 +782,7 @@
           <a:p>
             <a:r>
               <a:rPr lang="en-US" dirty="0"/>
-              <a:t>Barras escuras: capital ainda não recuperado (anos 0 a 5). Barras azuis: VPL positivo do ano 6 em diante, encerrando em R$ 11,1 mi no cenário agro otimizado.</a:t>
+              <a:t>Cenário agro otimizado: TIR 28%, payback ~5 anos, VPL R$ 11,1 mi (base: 21% / 7a9m / R$ 6,37 mi). Spread de ~R$ 256/MWh entre LCOE e preço da cota sustenta o modelo; o slide seguinte detalha as alavancas.</a:t>
             </a:r>
             <a:endParaRPr lang="en-US" dirty="0"/>
           </a:p>
@@ -868,7 +870,7 @@
           <a:p>
             <a:r>
               <a:rPr lang="en-US" dirty="0"/>
-              <a:t>O BESS não é para todos: agronegócio e indústria com carga volátil capturam valor; cargas flat como data centers, não.</a:t>
+              <a:t>As três alavancas que levam o payback de 7a9m para ~5 anos: desconto noturno do irrigante (60-90%), crédito subsidiado do Plano Safra 2026/27 e benchmarks de mercado (5-6 anos em GD+BESS).</a:t>
             </a:r>
             <a:endParaRPr lang="en-US" dirty="0"/>
           </a:p>
@@ -956,7 +958,7 @@
           <a:p>
             <a:r>
               <a:rPr lang="en-US" dirty="0"/>
-              <a:t>Fechamento conceitual: o BESS converte intermitência em previsibilidade financeira. Chamada à ação: o momento é agora.</a:t>
+              <a:t>Barras escuras: capital ainda não recuperado (anos 0 a 5). Barras azuis: VPL positivo do ano 6 em diante, encerrando em R$ 11,1 mi no cenário agro otimizado.</a:t>
             </a:r>
             <a:endParaRPr lang="en-US" dirty="0"/>
           </a:p>
@@ -1044,7 +1046,7 @@
           <a:p>
             <a:r>
               <a:rPr lang="en-US" dirty="0"/>
-              <a:t>Slide de encerramento com identificação do autor responsável.</a:t>
+              <a:t>O BESS não é para todos: agronegócio e indústria com carga volátil capturam valor; cargas flat como data centers, não.</a:t>
             </a:r>
             <a:endParaRPr lang="en-US" dirty="0"/>
           </a:p>
@@ -1068,6 +1070,182 @@
             <a:fld id="{F7021451-1387-4CA6-816F-3879F97B5CBC}" type="slidenum">
               <a:rPr lang="en-US"/>
               <a:t>15</a:t>
+            </a:fld>
+            <a:endParaRPr lang="en-US"/>
+          </a:p>
+        </p:txBody>
+      </p:sp>
+    </p:spTree>
+    <p:extLst>
+      <p:ext uri="{BB962C8B-B14F-4D97-AF65-F5344CB8AC3E}">
+        <p14:creationId xmlns:p14="http://schemas.microsoft.com/office/powerpoint/2010/main" val="1024086991"/>
+      </p:ext>
+    </p:extLst>
+  </p:cSld>
+  <p:clrMapOvr>
+    <a:masterClrMapping/>
+  </p:clrMapOvr>
+</p:notes>
+</file>
+
+<file path=ppt/notesSlides/notesSlide16.xml><?xml version="1.0" encoding="utf-8"?>
+<p:notes xmlns:a="http://schemas.openxmlformats.org/drawingml/2006/main" xmlns:r="http://schemas.openxmlformats.org/officeDocument/2006/relationships" xmlns:p="http://schemas.openxmlformats.org/presentationml/2006/main">
+  <p:cSld>
+    <p:spTree>
+      <p:nvGrpSpPr>
+        <p:cNvPr id="1" name=""/>
+        <p:cNvGrpSpPr/>
+        <p:nvPr/>
+      </p:nvGrpSpPr>
+      <p:grpSpPr>
+        <a:xfrm>
+          <a:off x="0" y="0"/>
+          <a:ext cx="0" cy="0"/>
+          <a:chOff x="0" y="0"/>
+          <a:chExt cx="0" cy="0"/>
+        </a:xfrm>
+      </p:grpSpPr>
+      <p:sp>
+        <p:nvSpPr>
+          <p:cNvPr id="2" name="Slide Image Placeholder 1"/>
+          <p:cNvSpPr>
+            <a:spLocks noGrp="1" noRot="1" noChangeAspect="1"/>
+          </p:cNvSpPr>
+          <p:nvPr>
+            <p:ph type="sldImg"/>
+          </p:nvPr>
+        </p:nvSpPr>
+        <p:spPr/>
+      </p:sp>
+      <p:sp>
+        <p:nvSpPr>
+          <p:cNvPr id="3" name="Notes Placeholder 2"/>
+          <p:cNvSpPr>
+            <a:spLocks noGrp="1"/>
+          </p:cNvSpPr>
+          <p:nvPr>
+            <p:ph type="body" idx="1"/>
+          </p:nvPr>
+        </p:nvSpPr>
+        <p:spPr/>
+        <p:txBody>
+          <a:bodyPr/>
+          <a:lstStyle/>
+          <a:p>
+            <a:r>
+              <a:rPr lang="en-US" dirty="0"/>
+              <a:t>Fechamento conceitual: o BESS converte intermitência em previsibilidade financeira empilhando múltiplas fontes de valor. Chamada à ação: o momento é agora.</a:t>
+            </a:r>
+            <a:endParaRPr lang="en-US" dirty="0"/>
+          </a:p>
+        </p:txBody>
+      </p:sp>
+      <p:sp>
+        <p:nvSpPr>
+          <p:cNvPr id="4" name="Slide Number Placeholder 3"/>
+          <p:cNvSpPr>
+            <a:spLocks noGrp="1"/>
+          </p:cNvSpPr>
+          <p:nvPr>
+            <p:ph type="sldNum" sz="quarter" idx="10"/>
+          </p:nvPr>
+        </p:nvSpPr>
+        <p:spPr/>
+        <p:txBody>
+          <a:bodyPr/>
+          <a:lstStyle/>
+          <a:p>
+            <a:fld id="{F7021451-1387-4CA6-816F-3879F97B5CBC}" type="slidenum">
+              <a:rPr lang="en-US"/>
+              <a:t>16</a:t>
+            </a:fld>
+            <a:endParaRPr lang="en-US"/>
+          </a:p>
+        </p:txBody>
+      </p:sp>
+    </p:spTree>
+    <p:extLst>
+      <p:ext uri="{BB962C8B-B14F-4D97-AF65-F5344CB8AC3E}">
+        <p14:creationId xmlns:p14="http://schemas.microsoft.com/office/powerpoint/2010/main" val="1024086991"/>
+      </p:ext>
+    </p:extLst>
+  </p:cSld>
+  <p:clrMapOvr>
+    <a:masterClrMapping/>
+  </p:clrMapOvr>
+</p:notes>
+</file>
+
+<file path=ppt/notesSlides/notesSlide17.xml><?xml version="1.0" encoding="utf-8"?>
+<p:notes xmlns:a="http://schemas.openxmlformats.org/drawingml/2006/main" xmlns:r="http://schemas.openxmlformats.org/officeDocument/2006/relationships" xmlns:p="http://schemas.openxmlformats.org/presentationml/2006/main">
+  <p:cSld>
+    <p:spTree>
+      <p:nvGrpSpPr>
+        <p:cNvPr id="1" name=""/>
+        <p:cNvGrpSpPr/>
+        <p:nvPr/>
+      </p:nvGrpSpPr>
+      <p:grpSpPr>
+        <a:xfrm>
+          <a:off x="0" y="0"/>
+          <a:ext cx="0" cy="0"/>
+          <a:chOff x="0" y="0"/>
+          <a:chExt cx="0" cy="0"/>
+        </a:xfrm>
+      </p:grpSpPr>
+      <p:sp>
+        <p:nvSpPr>
+          <p:cNvPr id="2" name="Slide Image Placeholder 1"/>
+          <p:cNvSpPr>
+            <a:spLocks noGrp="1" noRot="1" noChangeAspect="1"/>
+          </p:cNvSpPr>
+          <p:nvPr>
+            <p:ph type="sldImg"/>
+          </p:nvPr>
+        </p:nvSpPr>
+        <p:spPr/>
+      </p:sp>
+      <p:sp>
+        <p:nvSpPr>
+          <p:cNvPr id="3" name="Notes Placeholder 2"/>
+          <p:cNvSpPr>
+            <a:spLocks noGrp="1"/>
+          </p:cNvSpPr>
+          <p:nvPr>
+            <p:ph type="body" idx="1"/>
+          </p:nvPr>
+        </p:nvSpPr>
+        <p:spPr/>
+        <p:txBody>
+          <a:bodyPr/>
+          <a:lstStyle/>
+          <a:p>
+            <a:r>
+              <a:rPr lang="en-US" dirty="0"/>
+              <a:t>Slide de encerramento com identificação do autor responsável.</a:t>
+            </a:r>
+            <a:endParaRPr lang="en-US" dirty="0"/>
+          </a:p>
+        </p:txBody>
+      </p:sp>
+      <p:sp>
+        <p:nvSpPr>
+          <p:cNvPr id="4" name="Slide Number Placeholder 3"/>
+          <p:cNvSpPr>
+            <a:spLocks noGrp="1"/>
+          </p:cNvSpPr>
+          <p:nvPr>
+            <p:ph type="sldNum" sz="quarter" idx="10"/>
+          </p:nvPr>
+        </p:nvSpPr>
+        <p:spPr/>
+        <p:txBody>
+          <a:bodyPr/>
+          <a:lstStyle/>
+          <a:p>
+            <a:fld id="{F7021451-1387-4CA6-816F-3879F97B5CBC}" type="slidenum">
+              <a:rPr lang="en-US"/>
+              <a:t>17</a:t>
             </a:fld>
             <a:endParaRPr lang="en-US"/>
           </a:p>
@@ -1484,7 +1662,7 @@
           <a:p>
             <a:r>
               <a:rPr lang="en-US" dirty="0"/>
-              <a:t>A Lei 14.300/2022 dá o modelo de negócio (Geração Compartilhada); a NBR 17153 dá a segurança técnica. Juntas, removem o risco regulatório.</a:t>
+              <a:t>Value stacking: o mesmo BESS soma arbitragem, peak shaving, anti-curtailment e créditos de GD. Nenhuma camada sozinha fecha a conta; empilhadas, comprimem o payback para ~5 anos.</a:t>
             </a:r>
             <a:endParaRPr lang="en-US" dirty="0"/>
           </a:p>
@@ -1572,7 +1750,7 @@
           <a:p>
             <a:r>
               <a:rPr lang="en-US" dirty="0"/>
-              <a:t>Percorrer as cinco etapas do modelo: geração, créditos, SPE, monetização com desconto e abatimento em fatura.</a:t>
+              <a:t>Além das receitas, o BESS empilha serviços operacionais: backup (substitui diesel), qualidade de energia, postergação de reforços de rede e valor ESG com acesso a crédito verde.</a:t>
             </a:r>
             <a:endParaRPr lang="en-US" dirty="0"/>
           </a:p>
@@ -1660,7 +1838,7 @@
           <a:p>
             <a:r>
               <a:rPr lang="en-US" dirty="0"/>
-              <a:t>Composição do investimento de R$ 13,9 milhões. Destaque: BESS em azul (12,59%) e módulos FV em amarelo (27,5%).</a:t>
+              <a:t>A Lei 14.300/2022 dá o modelo de negócio (Geração Compartilhada); a NBR 17153 dá a segurança técnica. Juntas, removem o risco regulatório.</a:t>
             </a:r>
             <a:endParaRPr lang="en-US" dirty="0"/>
           </a:p>
@@ -1748,7 +1926,7 @@
           <a:p>
             <a:r>
               <a:rPr lang="en-US" dirty="0"/>
-              <a:t>MT: isenção de ICMS (17%) sobre energia compensada desde 2016; redução de 20% a.a. a partir de 2029 e fim em 2033. Bônus: ICMS zero em equipamentos de irrigação até 31/12/2026 reduz o CAPEX do bombeamento.</a:t>
+              <a:t>Percorrer as cinco etapas do modelo: geração, créditos, SPE, monetização com desconto e abatimento em fatura.</a:t>
             </a:r>
             <a:endParaRPr lang="en-US" dirty="0"/>
           </a:p>
@@ -2520,7 +2698,7 @@
                 <a:ea typeface="Arial" pitchFamily="34" charset="-122"/>
                 <a:cs typeface="Arial" pitchFamily="34" charset="-120"/>
               </a:rPr>
-              <a:t>Dashboard de Viabilidade do Sistema Híbrido</a:t>
+              <a:t>Raio-X do CAPEX: onde o capital é alocado?</a:t>
             </a:r>
             <a:endParaRPr lang="en-US" sz="3000" dirty="0"/>
           </a:p>
@@ -2528,87 +2706,36 @@
       </p:sp>
       <p:sp>
         <p:nvSpPr>
-          <p:cNvPr id="3" name="Text 1"/>
-          <p:cNvSpPr/>
-          <p:nvPr/>
-        </p:nvSpPr>
-        <p:spPr>
-          <a:xfrm>
-            <a:off x="548640" y="1078992"/>
-            <a:ext cx="11064240" cy="365760"/>
-          </a:xfrm>
-          <a:prstGeom prst="rect">
-            <a:avLst/>
-          </a:prstGeom>
-          <a:noFill/>
-          <a:ln/>
-        </p:spPr>
-        <p:txBody>
-          <a:bodyPr wrap="square" lIns="0" tIns="0" rIns="0" bIns="0" rtlCol="0" anchor="ctr"/>
-          <a:lstStyle/>
-          <a:p>
-            <a:pPr indent="0" marL="0">
-              <a:buNone/>
-            </a:pPr>
-            <a:r>
-              <a:rPr lang="en-US" sz="1250" i="1" dirty="0">
-                <a:solidFill>
-                  <a:srgbClr val="7A8A94"/>
-                </a:solidFill>
-                <a:latin typeface="Arial" pitchFamily="34" charset="0"/>
-                <a:ea typeface="Arial" pitchFamily="34" charset="-122"/>
-                <a:cs typeface="Arial" pitchFamily="34" charset="-120"/>
-              </a:rPr>
-              <a:t>Cenário agro otimizado: irrigação bombeada no horário reservado do irrigante + crédito do Plano Safra  ·  tarifa B3 (Energisa-MT)  ·  TMA 15% a.a.</a:t>
-            </a:r>
-            <a:endParaRPr lang="en-US" sz="1250" dirty="0"/>
-          </a:p>
-        </p:txBody>
-      </p:sp>
-      <p:sp>
-        <p:nvSpPr>
-          <p:cNvPr id="4" name="Shape 2"/>
-          <p:cNvSpPr/>
-          <p:nvPr/>
-        </p:nvSpPr>
-        <p:spPr>
-          <a:xfrm>
-            <a:off x="548640" y="1600200"/>
-            <a:ext cx="3593592" cy="2377440"/>
+          <p:cNvPr id="3" name="Shape 1"/>
+          <p:cNvSpPr/>
+          <p:nvPr/>
+        </p:nvSpPr>
+        <p:spPr>
+          <a:xfrm>
+            <a:off x="548640" y="1115568"/>
+            <a:ext cx="11091672" cy="512064"/>
           </a:xfrm>
           <a:prstGeom prst="roundRect">
             <a:avLst>
-              <a:gd name="adj" fmla="val 3462"/>
+              <a:gd name="adj" fmla="val 14286"/>
             </a:avLst>
           </a:prstGeom>
           <a:solidFill>
-            <a:srgbClr val="F5F8FA"/>
+            <a:srgbClr val="EAF1F6"/>
           </a:solidFill>
-          <a:ln w="9525">
-            <a:solidFill>
-              <a:srgbClr val="D9E2E8"/>
-            </a:solidFill>
-            <a:prstDash val="solid"/>
-          </a:ln>
-          <a:effectLst>
-            <a:outerShdw sx="100000" sy="100000" kx="0" ky="0" algn="bl" rotWithShape="0" blurRad="88900" dist="25400" dir="5400000">
-              <a:srgbClr val="9AAAB4">
-                <a:alpha val="35000"/>
-              </a:srgbClr>
-            </a:outerShdw>
-          </a:effectLst>
-        </p:spPr>
-      </p:sp>
-      <p:sp>
-        <p:nvSpPr>
-          <p:cNvPr id="5" name="Text 3"/>
-          <p:cNvSpPr/>
-          <p:nvPr/>
-        </p:nvSpPr>
-        <p:spPr>
-          <a:xfrm>
-            <a:off x="822960" y="1801368"/>
-            <a:ext cx="3044952" cy="777240"/>
+          <a:ln/>
+        </p:spPr>
+      </p:sp>
+      <p:sp>
+        <p:nvSpPr>
+          <p:cNvPr id="4" name="Text 2"/>
+          <p:cNvSpPr/>
+          <p:nvPr/>
+        </p:nvSpPr>
+        <p:spPr>
+          <a:xfrm>
+            <a:off x="777240" y="1115568"/>
+            <a:ext cx="10698480" cy="512064"/>
           </a:xfrm>
           <a:prstGeom prst="rect">
             <a:avLst/>
@@ -2624,30 +2751,82 @@
               <a:buNone/>
             </a:pPr>
             <a:r>
-              <a:rPr lang="en-US" sz="3800" b="1" dirty="0">
-                <a:solidFill>
-                  <a:srgbClr val="2E7DAF"/>
-                </a:solidFill>
-                <a:latin typeface="Arial" pitchFamily="34" charset="0"/>
-                <a:ea typeface="Arial" pitchFamily="34" charset="-122"/>
-                <a:cs typeface="Arial" pitchFamily="34" charset="-120"/>
-              </a:rPr>
-              <a:t>28,00%</a:t>
-            </a:r>
-            <a:endParaRPr lang="en-US" sz="3800" dirty="0"/>
-          </a:p>
-        </p:txBody>
-      </p:sp>
-      <p:sp>
-        <p:nvSpPr>
-          <p:cNvPr id="6" name="Text 4"/>
-          <p:cNvSpPr/>
-          <p:nvPr/>
-        </p:nvSpPr>
-        <p:spPr>
-          <a:xfrm>
-            <a:off x="822960" y="2624328"/>
-            <a:ext cx="3044952" cy="365760"/>
+              <a:rPr lang="en-US" sz="1300" b="1" dirty="0">
+                <a:solidFill>
+                  <a:srgbClr val="16303F"/>
+                </a:solidFill>
+                <a:latin typeface="Arial" pitchFamily="34" charset="0"/>
+                <a:ea typeface="Arial" pitchFamily="34" charset="-122"/>
+                <a:cs typeface="Arial" pitchFamily="34" charset="-120"/>
+              </a:rPr>
+              <a:t>Estudo de caso:  </a:t>
+            </a:r>
+            <a:pPr indent="0" marL="0">
+              <a:buNone/>
+            </a:pPr>
+            <a:r>
+              <a:rPr lang="en-US" sz="1300" dirty="0">
+                <a:solidFill>
+                  <a:srgbClr val="3E4E59"/>
+                </a:solidFill>
+                <a:latin typeface="Arial" pitchFamily="34" charset="0"/>
+                <a:ea typeface="Arial" pitchFamily="34" charset="-122"/>
+                <a:cs typeface="Arial" pitchFamily="34" charset="-120"/>
+              </a:rPr>
+              <a:t>planta híbrida de 3,0 MW (UFV) + 1.446 kWh (BESS)  ·  investimento total de </a:t>
+            </a:r>
+            <a:pPr indent="0" marL="0">
+              <a:buNone/>
+            </a:pPr>
+            <a:r>
+              <a:rPr lang="en-US" sz="1300" b="1" dirty="0">
+                <a:solidFill>
+                  <a:srgbClr val="16303F"/>
+                </a:solidFill>
+                <a:latin typeface="Arial" pitchFamily="34" charset="0"/>
+                <a:ea typeface="Arial" pitchFamily="34" charset="-122"/>
+                <a:cs typeface="Arial" pitchFamily="34" charset="-120"/>
+              </a:rPr>
+              <a:t>R$ 13,9 milhões</a:t>
+            </a:r>
+            <a:endParaRPr lang="en-US" sz="1300" dirty="0"/>
+          </a:p>
+        </p:txBody>
+      </p:sp>
+      <p:pic>
+        <p:nvPicPr>
+          <p:cNvPr id="5" name="Image 0" descr="chart7.png">    </p:cNvPr>
+          <p:cNvPicPr>
+            <a:picLocks noChangeAspect="1"/>
+          </p:cNvPicPr>
+          <p:nvPr/>
+        </p:nvPicPr>
+        <p:blipFill>
+          <a:blip r:embed="rId1"/>
+          <a:stretch>
+            <a:fillRect/>
+          </a:stretch>
+        </p:blipFill>
+        <p:spPr>
+          <a:xfrm>
+            <a:off x="685800" y="1874520"/>
+            <a:ext cx="10835640" cy="4160520"/>
+          </a:xfrm>
+          <a:prstGeom prst="rect">
+            <a:avLst/>
+          </a:prstGeom>
+        </p:spPr>
+      </p:pic>
+      <p:sp>
+        <p:nvSpPr>
+          <p:cNvPr id="6" name="Text 3"/>
+          <p:cNvSpPr/>
+          <p:nvPr/>
+        </p:nvSpPr>
+        <p:spPr>
+          <a:xfrm>
+            <a:off x="685800" y="6053328"/>
+            <a:ext cx="10835640" cy="365760"/>
           </a:xfrm>
           <a:prstGeom prst="rect">
             <a:avLst/>
@@ -2663,49 +2842,7 @@
               <a:buNone/>
             </a:pPr>
             <a:r>
-              <a:rPr lang="en-US" sz="1350" b="1" dirty="0">
-                <a:solidFill>
-                  <a:srgbClr val="16303F"/>
-                </a:solidFill>
-                <a:latin typeface="Arial" pitchFamily="34" charset="0"/>
-                <a:ea typeface="Arial" pitchFamily="34" charset="-122"/>
-                <a:cs typeface="Arial" pitchFamily="34" charset="-120"/>
-              </a:rPr>
-              <a:t>TIR — Taxa Interna de Retorno</a:t>
-            </a:r>
-            <a:endParaRPr lang="en-US" sz="1350" dirty="0"/>
-          </a:p>
-        </p:txBody>
-      </p:sp>
-      <p:sp>
-        <p:nvSpPr>
-          <p:cNvPr id="7" name="Text 5"/>
-          <p:cNvSpPr/>
-          <p:nvPr/>
-        </p:nvSpPr>
-        <p:spPr>
-          <a:xfrm>
-            <a:off x="822960" y="3017520"/>
-            <a:ext cx="3044952" cy="868680"/>
-          </a:xfrm>
-          <a:prstGeom prst="rect">
-            <a:avLst/>
-          </a:prstGeom>
-          <a:noFill/>
-          <a:ln/>
-        </p:spPr>
-        <p:txBody>
-          <a:bodyPr wrap="square" lIns="0" tIns="0" rIns="0" bIns="0" rtlCol="0" anchor="t"/>
-          <a:lstStyle/>
-          <a:p>
-            <a:pPr indent="0" marL="0">
-              <a:lnSpc>
-                <a:spcPct val="110000"/>
-              </a:lnSpc>
-              <a:buNone/>
-            </a:pPr>
-            <a:r>
-              <a:rPr lang="en-US" sz="1100" dirty="0">
+              <a:rPr lang="en-US" sz="1150" i="1" dirty="0">
                 <a:solidFill>
                   <a:srgbClr val="7A8A94"/>
                 </a:solidFill>
@@ -2713,594 +2850,15 @@
                 <a:ea typeface="Arial" pitchFamily="34" charset="-122"/>
                 <a:cs typeface="Arial" pitchFamily="34" charset="-120"/>
               </a:rPr>
-              <a:t>No cenário base, 21%; as alavancas do agro elevam o retorno muito acima da renda fixa.</a:t>
-            </a:r>
-            <a:endParaRPr lang="en-US" sz="1100" dirty="0"/>
-          </a:p>
-        </p:txBody>
-      </p:sp>
-      <p:sp>
-        <p:nvSpPr>
-          <p:cNvPr id="8" name="Shape 6"/>
-          <p:cNvSpPr/>
-          <p:nvPr/>
-        </p:nvSpPr>
-        <p:spPr>
-          <a:xfrm>
-            <a:off x="4370832" y="1600200"/>
-            <a:ext cx="3593592" cy="2377440"/>
-          </a:xfrm>
-          <a:prstGeom prst="roundRect">
-            <a:avLst>
-              <a:gd name="adj" fmla="val 3462"/>
-            </a:avLst>
-          </a:prstGeom>
-          <a:solidFill>
-            <a:srgbClr val="F5F8FA"/>
-          </a:solidFill>
-          <a:ln w="9525">
-            <a:solidFill>
-              <a:srgbClr val="D9E2E8"/>
-            </a:solidFill>
-            <a:prstDash val="solid"/>
-          </a:ln>
-          <a:effectLst>
-            <a:outerShdw sx="100000" sy="100000" kx="0" ky="0" algn="bl" rotWithShape="0" blurRad="88900" dist="25400" dir="5400000">
-              <a:srgbClr val="9AAAB4">
-                <a:alpha val="35000"/>
-              </a:srgbClr>
-            </a:outerShdw>
-          </a:effectLst>
-        </p:spPr>
-      </p:sp>
-      <p:sp>
-        <p:nvSpPr>
-          <p:cNvPr id="9" name="Text 7"/>
-          <p:cNvSpPr/>
-          <p:nvPr/>
-        </p:nvSpPr>
-        <p:spPr>
-          <a:xfrm>
-            <a:off x="4645152" y="1801368"/>
-            <a:ext cx="3044952" cy="777240"/>
-          </a:xfrm>
-          <a:prstGeom prst="rect">
-            <a:avLst/>
-          </a:prstGeom>
-          <a:noFill/>
-          <a:ln/>
-        </p:spPr>
-        <p:txBody>
-          <a:bodyPr wrap="square" lIns="0" tIns="0" rIns="0" bIns="0" rtlCol="0" anchor="ctr"/>
-          <a:lstStyle/>
-          <a:p>
-            <a:pPr indent="0" marL="0">
-              <a:buNone/>
-            </a:pPr>
-            <a:r>
-              <a:rPr lang="en-US" sz="3800" b="1" dirty="0">
-                <a:solidFill>
-                  <a:srgbClr val="2E7DAF"/>
-                </a:solidFill>
-                <a:latin typeface="Arial" pitchFamily="34" charset="0"/>
-                <a:ea typeface="Arial" pitchFamily="34" charset="-122"/>
-                <a:cs typeface="Arial" pitchFamily="34" charset="-120"/>
-              </a:rPr>
-              <a:t>≈ 5 anos</a:t>
-            </a:r>
-            <a:endParaRPr lang="en-US" sz="3800" dirty="0"/>
-          </a:p>
-        </p:txBody>
-      </p:sp>
-      <p:sp>
-        <p:nvSpPr>
-          <p:cNvPr id="10" name="Text 8"/>
-          <p:cNvSpPr/>
-          <p:nvPr/>
-        </p:nvSpPr>
-        <p:spPr>
-          <a:xfrm>
-            <a:off x="4645152" y="2624328"/>
-            <a:ext cx="3044952" cy="365760"/>
-          </a:xfrm>
-          <a:prstGeom prst="rect">
-            <a:avLst/>
-          </a:prstGeom>
-          <a:noFill/>
-          <a:ln/>
-        </p:spPr>
-        <p:txBody>
-          <a:bodyPr wrap="square" lIns="0" tIns="0" rIns="0" bIns="0" rtlCol="0" anchor="ctr"/>
-          <a:lstStyle/>
-          <a:p>
-            <a:pPr indent="0" marL="0">
-              <a:buNone/>
-            </a:pPr>
-            <a:r>
-              <a:rPr lang="en-US" sz="1350" b="1" dirty="0">
-                <a:solidFill>
-                  <a:srgbClr val="16303F"/>
-                </a:solidFill>
-                <a:latin typeface="Arial" pitchFamily="34" charset="0"/>
-                <a:ea typeface="Arial" pitchFamily="34" charset="-122"/>
-                <a:cs typeface="Arial" pitchFamily="34" charset="-120"/>
-              </a:rPr>
-              <a:t>Payback descontado</a:t>
-            </a:r>
-            <a:endParaRPr lang="en-US" sz="1350" dirty="0"/>
-          </a:p>
-        </p:txBody>
-      </p:sp>
-      <p:sp>
-        <p:nvSpPr>
-          <p:cNvPr id="11" name="Text 9"/>
-          <p:cNvSpPr/>
-          <p:nvPr/>
-        </p:nvSpPr>
-        <p:spPr>
-          <a:xfrm>
-            <a:off x="4645152" y="3017520"/>
-            <a:ext cx="3044952" cy="868680"/>
-          </a:xfrm>
-          <a:prstGeom prst="rect">
-            <a:avLst/>
-          </a:prstGeom>
-          <a:noFill/>
-          <a:ln/>
-        </p:spPr>
-        <p:txBody>
-          <a:bodyPr wrap="square" lIns="0" tIns="0" rIns="0" bIns="0" rtlCol="0" anchor="t"/>
-          <a:lstStyle/>
-          <a:p>
-            <a:pPr indent="0" marL="0">
-              <a:lnSpc>
-                <a:spcPct val="110000"/>
-              </a:lnSpc>
-              <a:buNone/>
-            </a:pPr>
-            <a:r>
-              <a:rPr lang="en-US" sz="1100" dirty="0">
-                <a:solidFill>
-                  <a:srgbClr val="7A8A94"/>
-                </a:solidFill>
-                <a:latin typeface="Arial" pitchFamily="34" charset="0"/>
-                <a:ea typeface="Arial" pitchFamily="34" charset="-122"/>
-                <a:cs typeface="Arial" pitchFamily="34" charset="-120"/>
-              </a:rPr>
-              <a:t>Recuperação do capital de R$ 13,9 milhões (cenário base, sem alavancas agro: 7 anos e 9 meses).</a:t>
-            </a:r>
-            <a:endParaRPr lang="en-US" sz="1100" dirty="0"/>
-          </a:p>
-        </p:txBody>
-      </p:sp>
-      <p:sp>
-        <p:nvSpPr>
-          <p:cNvPr id="12" name="Shape 10"/>
-          <p:cNvSpPr/>
-          <p:nvPr/>
-        </p:nvSpPr>
-        <p:spPr>
-          <a:xfrm>
-            <a:off x="8193024" y="1600200"/>
-            <a:ext cx="3593592" cy="2377440"/>
-          </a:xfrm>
-          <a:prstGeom prst="roundRect">
-            <a:avLst>
-              <a:gd name="adj" fmla="val 3462"/>
-            </a:avLst>
-          </a:prstGeom>
-          <a:solidFill>
-            <a:srgbClr val="F5F8FA"/>
-          </a:solidFill>
-          <a:ln w="9525">
-            <a:solidFill>
-              <a:srgbClr val="D9E2E8"/>
-            </a:solidFill>
-            <a:prstDash val="solid"/>
-          </a:ln>
-          <a:effectLst>
-            <a:outerShdw sx="100000" sy="100000" kx="0" ky="0" algn="bl" rotWithShape="0" blurRad="88900" dist="25400" dir="5400000">
-              <a:srgbClr val="9AAAB4">
-                <a:alpha val="35000"/>
-              </a:srgbClr>
-            </a:outerShdw>
-          </a:effectLst>
-        </p:spPr>
-      </p:sp>
-      <p:sp>
-        <p:nvSpPr>
-          <p:cNvPr id="13" name="Text 11"/>
-          <p:cNvSpPr/>
-          <p:nvPr/>
-        </p:nvSpPr>
-        <p:spPr>
-          <a:xfrm>
-            <a:off x="8467344" y="1801368"/>
-            <a:ext cx="3044952" cy="777240"/>
-          </a:xfrm>
-          <a:prstGeom prst="rect">
-            <a:avLst/>
-          </a:prstGeom>
-          <a:noFill/>
-          <a:ln/>
-        </p:spPr>
-        <p:txBody>
-          <a:bodyPr wrap="square" lIns="0" tIns="0" rIns="0" bIns="0" rtlCol="0" anchor="ctr"/>
-          <a:lstStyle/>
-          <a:p>
-            <a:pPr indent="0" marL="0">
-              <a:buNone/>
-            </a:pPr>
-            <a:r>
-              <a:rPr lang="en-US" sz="3800" b="1" dirty="0">
-                <a:solidFill>
-                  <a:srgbClr val="2E7DAF"/>
-                </a:solidFill>
-                <a:latin typeface="Arial" pitchFamily="34" charset="0"/>
-                <a:ea typeface="Arial" pitchFamily="34" charset="-122"/>
-                <a:cs typeface="Arial" pitchFamily="34" charset="-120"/>
-              </a:rPr>
-              <a:t>R$ 11,1 mi</a:t>
-            </a:r>
-            <a:endParaRPr lang="en-US" sz="3800" dirty="0"/>
-          </a:p>
-        </p:txBody>
-      </p:sp>
-      <p:sp>
-        <p:nvSpPr>
-          <p:cNvPr id="14" name="Text 12"/>
-          <p:cNvSpPr/>
-          <p:nvPr/>
-        </p:nvSpPr>
-        <p:spPr>
-          <a:xfrm>
-            <a:off x="8467344" y="2624328"/>
-            <a:ext cx="3044952" cy="365760"/>
-          </a:xfrm>
-          <a:prstGeom prst="rect">
-            <a:avLst/>
-          </a:prstGeom>
-          <a:noFill/>
-          <a:ln/>
-        </p:spPr>
-        <p:txBody>
-          <a:bodyPr wrap="square" lIns="0" tIns="0" rIns="0" bIns="0" rtlCol="0" anchor="ctr"/>
-          <a:lstStyle/>
-          <a:p>
-            <a:pPr indent="0" marL="0">
-              <a:buNone/>
-            </a:pPr>
-            <a:r>
-              <a:rPr lang="en-US" sz="1350" b="1" dirty="0">
-                <a:solidFill>
-                  <a:srgbClr val="16303F"/>
-                </a:solidFill>
-                <a:latin typeface="Arial" pitchFamily="34" charset="0"/>
-                <a:ea typeface="Arial" pitchFamily="34" charset="-122"/>
-                <a:cs typeface="Arial" pitchFamily="34" charset="-120"/>
-              </a:rPr>
-              <a:t>VPL — Valor Presente Líquido</a:t>
-            </a:r>
-            <a:endParaRPr lang="en-US" sz="1350" dirty="0"/>
-          </a:p>
-        </p:txBody>
-      </p:sp>
-      <p:sp>
-        <p:nvSpPr>
-          <p:cNvPr id="15" name="Text 13"/>
-          <p:cNvSpPr/>
-          <p:nvPr/>
-        </p:nvSpPr>
-        <p:spPr>
-          <a:xfrm>
-            <a:off x="8467344" y="3017520"/>
-            <a:ext cx="3044952" cy="868680"/>
-          </a:xfrm>
-          <a:prstGeom prst="rect">
-            <a:avLst/>
-          </a:prstGeom>
-          <a:noFill/>
-          <a:ln/>
-        </p:spPr>
-        <p:txBody>
-          <a:bodyPr wrap="square" lIns="0" tIns="0" rIns="0" bIns="0" rtlCol="0" anchor="t"/>
-          <a:lstStyle/>
-          <a:p>
-            <a:pPr indent="0" marL="0">
-              <a:lnSpc>
-                <a:spcPct val="110000"/>
-              </a:lnSpc>
-              <a:buNone/>
-            </a:pPr>
-            <a:r>
-              <a:rPr lang="en-US" sz="1100" dirty="0">
-                <a:solidFill>
-                  <a:srgbClr val="7A8A94"/>
-                </a:solidFill>
-                <a:latin typeface="Arial" pitchFamily="34" charset="0"/>
-                <a:ea typeface="Arial" pitchFamily="34" charset="-122"/>
-                <a:cs typeface="Arial" pitchFamily="34" charset="-120"/>
-              </a:rPr>
-              <a:t>Geração de riqueza real projetada ao longo de 20 anos de operação.</a:t>
-            </a:r>
-            <a:endParaRPr lang="en-US" sz="1100" dirty="0"/>
-          </a:p>
-        </p:txBody>
-      </p:sp>
-      <p:sp>
-        <p:nvSpPr>
-          <p:cNvPr id="16" name="Text 14"/>
-          <p:cNvSpPr/>
-          <p:nvPr/>
-        </p:nvSpPr>
-        <p:spPr>
-          <a:xfrm>
-            <a:off x="548640" y="3959352"/>
-            <a:ext cx="11064240" cy="320040"/>
-          </a:xfrm>
-          <a:prstGeom prst="rect">
-            <a:avLst/>
-          </a:prstGeom>
-          <a:noFill/>
-          <a:ln/>
-        </p:spPr>
-        <p:txBody>
-          <a:bodyPr wrap="square" lIns="0" tIns="0" rIns="0" bIns="0" rtlCol="0" anchor="ctr"/>
-          <a:lstStyle/>
-          <a:p>
-            <a:pPr algn="ctr" indent="0" marL="0">
-              <a:buNone/>
-            </a:pPr>
-            <a:r>
-              <a:rPr lang="en-US" sz="1200" b="1" spc="250" kern="0" dirty="0">
-                <a:solidFill>
-                  <a:srgbClr val="B78A00"/>
-                </a:solidFill>
-                <a:latin typeface="Arial" pitchFamily="34" charset="0"/>
-                <a:ea typeface="Arial" pitchFamily="34" charset="-122"/>
-                <a:cs typeface="Arial" pitchFamily="34" charset="-120"/>
-              </a:rPr>
-              <a:t>MARGEM DE ARBITRAGEM</a:t>
-            </a:r>
-            <a:endParaRPr lang="en-US" sz="1200" dirty="0"/>
-          </a:p>
-        </p:txBody>
-      </p:sp>
-      <p:sp>
-        <p:nvSpPr>
-          <p:cNvPr id="17" name="Shape 15"/>
-          <p:cNvSpPr/>
-          <p:nvPr/>
-        </p:nvSpPr>
-        <p:spPr>
-          <a:xfrm>
-            <a:off x="548640" y="4343400"/>
-            <a:ext cx="3291840" cy="1600200"/>
-          </a:xfrm>
-          <a:prstGeom prst="roundRect">
-            <a:avLst>
-              <a:gd name="adj" fmla="val 5143"/>
-            </a:avLst>
-          </a:prstGeom>
-          <a:solidFill>
-            <a:srgbClr val="102A3C"/>
-          </a:solidFill>
-          <a:ln/>
-          <a:effectLst>
-            <a:outerShdw sx="100000" sy="100000" kx="0" ky="0" algn="bl" rotWithShape="0" blurRad="88900" dist="25400" dir="5400000">
-              <a:srgbClr val="9AAAB4">
-                <a:alpha val="35000"/>
-              </a:srgbClr>
-            </a:outerShdw>
-          </a:effectLst>
-        </p:spPr>
-      </p:sp>
-      <p:sp>
-        <p:nvSpPr>
-          <p:cNvPr id="18" name="Text 16"/>
-          <p:cNvSpPr/>
-          <p:nvPr/>
-        </p:nvSpPr>
-        <p:spPr>
-          <a:xfrm>
-            <a:off x="822960" y="4343400"/>
-            <a:ext cx="2743200" cy="1600200"/>
-          </a:xfrm>
-          <a:prstGeom prst="rect">
-            <a:avLst/>
-          </a:prstGeom>
-          <a:noFill/>
-          <a:ln/>
-        </p:spPr>
-        <p:txBody>
-          <a:bodyPr wrap="square" lIns="0" tIns="0" rIns="0" bIns="0" rtlCol="0" anchor="ctr"/>
-          <a:lstStyle/>
-          <a:p>
-            <a:pPr indent="0" marL="0">
-              <a:buNone/>
-            </a:pPr>
-            <a:r>
-              <a:rPr lang="en-US" sz="1300" dirty="0">
-                <a:solidFill>
-                  <a:srgbClr val="9FB3BF"/>
-                </a:solidFill>
-                <a:latin typeface="Arial" pitchFamily="34" charset="0"/>
-                <a:ea typeface="Arial" pitchFamily="34" charset="-122"/>
-                <a:cs typeface="Arial" pitchFamily="34" charset="-120"/>
-              </a:rPr>
-              <a:t>Custo (LCOE)</a:t>
-            </a:r>
-            <a:endParaRPr lang="en-US" sz="1300" dirty="0"/>
-          </a:p>
-          <a:p>
-            <a:pPr indent="0" marL="0">
-              <a:buNone/>
-            </a:pPr>
-            <a:r>
-              <a:rPr lang="en-US" sz="2100" b="1" dirty="0">
-                <a:solidFill>
-                  <a:srgbClr val="FFFFFF"/>
-                </a:solidFill>
-                <a:latin typeface="Arial" pitchFamily="34" charset="0"/>
-                <a:ea typeface="Arial" pitchFamily="34" charset="-122"/>
-                <a:cs typeface="Arial" pitchFamily="34" charset="-120"/>
-              </a:rPr>
-              <a:t>R$ 538,89 / MWh</a:t>
-            </a:r>
-            <a:endParaRPr lang="en-US" sz="1300" dirty="0"/>
-          </a:p>
-        </p:txBody>
-      </p:sp>
-      <p:sp>
-        <p:nvSpPr>
-          <p:cNvPr id="19" name="Shape 17"/>
-          <p:cNvSpPr/>
-          <p:nvPr/>
-        </p:nvSpPr>
-        <p:spPr>
-          <a:xfrm>
-            <a:off x="4041648" y="4800600"/>
-            <a:ext cx="4114800" cy="685800"/>
-          </a:xfrm>
-          <a:prstGeom prst="rightArrow">
-            <a:avLst/>
-          </a:prstGeom>
-          <a:solidFill>
-            <a:srgbClr val="F2B705"/>
-          </a:solidFill>
-          <a:ln/>
-        </p:spPr>
-      </p:sp>
-      <p:sp>
-        <p:nvSpPr>
-          <p:cNvPr id="20" name="Text 18"/>
-          <p:cNvSpPr/>
-          <p:nvPr/>
-        </p:nvSpPr>
-        <p:spPr>
-          <a:xfrm>
-            <a:off x="4041648" y="4325112"/>
-            <a:ext cx="4114800" cy="502920"/>
-          </a:xfrm>
-          <a:prstGeom prst="rect">
-            <a:avLst/>
-          </a:prstGeom>
-          <a:noFill/>
-          <a:ln/>
-        </p:spPr>
-        <p:txBody>
-          <a:bodyPr wrap="square" lIns="0" tIns="0" rIns="0" bIns="0" rtlCol="0" anchor="b"/>
-          <a:lstStyle/>
-          <a:p>
-            <a:pPr algn="ctr" indent="0" marL="0">
-              <a:lnSpc>
-                <a:spcPct val="105000"/>
-              </a:lnSpc>
-              <a:buNone/>
-            </a:pPr>
-            <a:r>
-              <a:rPr lang="en-US" sz="1000" dirty="0">
-                <a:solidFill>
-                  <a:srgbClr val="7A8A94"/>
-                </a:solidFill>
-                <a:latin typeface="Arial" pitchFamily="34" charset="0"/>
-                <a:ea typeface="Arial" pitchFamily="34" charset="-122"/>
-                <a:cs typeface="Arial" pitchFamily="34" charset="-120"/>
-              </a:rPr>
-              <a:t>O LCOE da planta híbrida é substancialmente menor que a precificação da cota — o sistema é matematicamente autossustentável.</a:t>
-            </a:r>
-            <a:endParaRPr lang="en-US" sz="1000" dirty="0"/>
-          </a:p>
-        </p:txBody>
-      </p:sp>
-      <p:sp>
-        <p:nvSpPr>
-          <p:cNvPr id="21" name="Shape 19"/>
-          <p:cNvSpPr/>
-          <p:nvPr/>
-        </p:nvSpPr>
-        <p:spPr>
-          <a:xfrm>
-            <a:off x="8348472" y="4343400"/>
-            <a:ext cx="3291840" cy="1600200"/>
-          </a:xfrm>
-          <a:prstGeom prst="roundRect">
-            <a:avLst>
-              <a:gd name="adj" fmla="val 5143"/>
-            </a:avLst>
-          </a:prstGeom>
-          <a:solidFill>
-            <a:srgbClr val="2E7DAF"/>
-          </a:solidFill>
-          <a:ln/>
-          <a:effectLst>
-            <a:outerShdw sx="100000" sy="100000" kx="0" ky="0" algn="bl" rotWithShape="0" blurRad="88900" dist="25400" dir="5400000">
-              <a:srgbClr val="9AAAB4">
-                <a:alpha val="35000"/>
-              </a:srgbClr>
-            </a:outerShdw>
-          </a:effectLst>
-        </p:spPr>
-      </p:sp>
-      <p:sp>
-        <p:nvSpPr>
-          <p:cNvPr id="22" name="Text 20"/>
-          <p:cNvSpPr/>
-          <p:nvPr/>
-        </p:nvSpPr>
-        <p:spPr>
-          <a:xfrm>
-            <a:off x="8622792" y="4343400"/>
-            <a:ext cx="2743200" cy="1600200"/>
-          </a:xfrm>
-          <a:prstGeom prst="rect">
-            <a:avLst/>
-          </a:prstGeom>
-          <a:noFill/>
-          <a:ln/>
-        </p:spPr>
-        <p:txBody>
-          <a:bodyPr wrap="square" lIns="0" tIns="0" rIns="0" bIns="0" rtlCol="0" anchor="ctr"/>
-          <a:lstStyle/>
-          <a:p>
-            <a:pPr indent="0" marL="0">
-              <a:buNone/>
-            </a:pPr>
-            <a:r>
-              <a:rPr lang="en-US" sz="1300" dirty="0">
-                <a:solidFill>
-                  <a:srgbClr val="DCEBF5"/>
-                </a:solidFill>
-                <a:latin typeface="Arial" pitchFamily="34" charset="0"/>
-                <a:ea typeface="Arial" pitchFamily="34" charset="-122"/>
-                <a:cs typeface="Arial" pitchFamily="34" charset="-120"/>
-              </a:rPr>
-              <a:t>Receita (preço de venda da cota)</a:t>
-            </a:r>
-            <a:endParaRPr lang="en-US" sz="1300" dirty="0"/>
-          </a:p>
-          <a:p>
-            <a:pPr indent="0" marL="0">
-              <a:buNone/>
-            </a:pPr>
-            <a:r>
-              <a:rPr lang="en-US" sz="2100" b="1" dirty="0">
-                <a:solidFill>
-                  <a:srgbClr val="FFFFFF"/>
-                </a:solidFill>
-                <a:latin typeface="Arial" pitchFamily="34" charset="0"/>
-                <a:ea typeface="Arial" pitchFamily="34" charset="-122"/>
-                <a:cs typeface="Arial" pitchFamily="34" charset="-120"/>
-              </a:rPr>
-              <a:t>R$ 794,92 / MWh</a:t>
-            </a:r>
-            <a:endParaRPr lang="en-US" sz="1300" dirty="0"/>
-          </a:p>
-        </p:txBody>
-      </p:sp>
-      <p:sp>
-        <p:nvSpPr>
-          <p:cNvPr id="24" name="Text 21"/>
+              <a:t>Módulos fotovoltaicos e EPC dominam o orçamento; o sistema de baterias representa 12,59% do capital — e é ele que destrava a arbitragem.</a:t>
+            </a:r>
+            <a:endParaRPr lang="en-US" sz="1150" dirty="0"/>
+          </a:p>
+        </p:txBody>
+      </p:sp>
+      <p:sp>
+        <p:nvSpPr>
+          <p:cNvPr id="8" name="Text 4"/>
           <p:cNvSpPr/>
           <p:nvPr/>
         </p:nvSpPr>
@@ -3339,7 +2897,7 @@
       </p:sp>
       <p:sp>
         <p:nvSpPr>
-          <p:cNvPr id="25" name="Text 22"/>
+          <p:cNvPr id="9" name="Text 5"/>
           <p:cNvSpPr/>
           <p:nvPr/>
         </p:nvSpPr>
@@ -3441,26 +2999,50 @@
                 <a:ea typeface="Arial" pitchFamily="34" charset="-122"/>
                 <a:cs typeface="Arial" pitchFamily="34" charset="-120"/>
               </a:rPr>
-              <a:t>Irrigação Bombeada: as alavancas do payback de ≈ 5 anos</a:t>
+              <a:t>A Janela de Oportunidade Tributária  |  estudo: Mato Grosso</a:t>
             </a:r>
             <a:endParaRPr lang="en-US" sz="3000" dirty="0"/>
           </a:p>
         </p:txBody>
       </p:sp>
-      <p:sp>
-        <p:nvSpPr>
-          <p:cNvPr id="3" name="Shape 1"/>
-          <p:cNvSpPr/>
-          <p:nvPr/>
-        </p:nvSpPr>
-        <p:spPr>
-          <a:xfrm>
-            <a:off x="548640" y="1463040"/>
-            <a:ext cx="3593592" cy="3794760"/>
+      <p:pic>
+        <p:nvPicPr>
+          <p:cNvPr id="3" name="Image 0" descr="chart8.png">    </p:cNvPr>
+          <p:cNvPicPr>
+            <a:picLocks noChangeAspect="1"/>
+          </p:cNvPicPr>
+          <p:nvPr/>
+        </p:nvPicPr>
+        <p:blipFill>
+          <a:blip r:embed="rId1"/>
+          <a:stretch>
+            <a:fillRect/>
+          </a:stretch>
+        </p:blipFill>
+        <p:spPr>
+          <a:xfrm>
+            <a:off x="594360" y="1600200"/>
+            <a:ext cx="6949440" cy="4480560"/>
+          </a:xfrm>
+          <a:prstGeom prst="rect">
+            <a:avLst/>
+          </a:prstGeom>
+        </p:spPr>
+      </p:pic>
+      <p:sp>
+        <p:nvSpPr>
+          <p:cNvPr id="4" name="Shape 1"/>
+          <p:cNvSpPr/>
+          <p:nvPr/>
+        </p:nvSpPr>
+        <p:spPr>
+          <a:xfrm>
+            <a:off x="8001000" y="1554480"/>
+            <a:ext cx="3639312" cy="4480560"/>
           </a:xfrm>
           <a:prstGeom prst="roundRect">
             <a:avLst>
-              <a:gd name="adj" fmla="val 2290"/>
+              <a:gd name="adj" fmla="val 2261"/>
             </a:avLst>
           </a:prstGeom>
           <a:solidFill>
@@ -3483,13 +3065,13 @@
       </p:sp>
       <p:sp>
         <p:nvSpPr>
-          <p:cNvPr id="4" name="Shape 2"/>
-          <p:cNvSpPr/>
-          <p:nvPr/>
-        </p:nvSpPr>
-        <p:spPr>
-          <a:xfrm>
-            <a:off x="841248" y="1737360"/>
+          <p:cNvPr id="5" name="Shape 2"/>
+          <p:cNvSpPr/>
+          <p:nvPr/>
+        </p:nvSpPr>
+        <p:spPr>
+          <a:xfrm>
+            <a:off x="8293608" y="1828800"/>
             <a:ext cx="548640" cy="548640"/>
           </a:xfrm>
           <a:prstGeom prst="ellipse">
@@ -3503,169 +3085,7 @@
       </p:sp>
       <p:pic>
         <p:nvPicPr>
-          <p:cNvPr id="5" name="Image 0" descr="preencoded.png">    </p:cNvPr>
-          <p:cNvPicPr>
-            <a:picLocks noChangeAspect="1"/>
-          </p:cNvPicPr>
-          <p:nvPr/>
-        </p:nvPicPr>
-        <p:blipFill>
-          <a:blip r:embed="rId1"/>
-          <a:stretch>
-            <a:fillRect/>
-          </a:stretch>
-        </p:blipFill>
-        <p:spPr>
-          <a:xfrm>
-            <a:off x="961949" y="1858061"/>
-            <a:ext cx="307238" cy="307238"/>
-          </a:xfrm>
-          <a:prstGeom prst="rect">
-            <a:avLst/>
-          </a:prstGeom>
-        </p:spPr>
-      </p:pic>
-      <p:sp>
-        <p:nvSpPr>
-          <p:cNvPr id="6" name="Text 3"/>
-          <p:cNvSpPr/>
-          <p:nvPr/>
-        </p:nvSpPr>
-        <p:spPr>
-          <a:xfrm>
-            <a:off x="841248" y="2423160"/>
-            <a:ext cx="3008376" cy="658368"/>
-          </a:xfrm>
-          <a:prstGeom prst="rect">
-            <a:avLst/>
-          </a:prstGeom>
-          <a:noFill/>
-          <a:ln/>
-        </p:spPr>
-        <p:txBody>
-          <a:bodyPr wrap="square" lIns="0" tIns="0" rIns="0" bIns="0" rtlCol="0" anchor="t"/>
-          <a:lstStyle/>
-          <a:p>
-            <a:pPr indent="0" marL="0">
-              <a:lnSpc>
-                <a:spcPct val="102000"/>
-              </a:lnSpc>
-              <a:buNone/>
-            </a:pPr>
-            <a:r>
-              <a:rPr lang="en-US" sz="1650" b="1" dirty="0">
-                <a:solidFill>
-                  <a:srgbClr val="16303F"/>
-                </a:solidFill>
-                <a:latin typeface="Arial" pitchFamily="34" charset="0"/>
-                <a:ea typeface="Arial" pitchFamily="34" charset="-122"/>
-                <a:cs typeface="Arial" pitchFamily="34" charset="-120"/>
-              </a:rPr>
-              <a:t>Horário reservado do irrigante</a:t>
-            </a:r>
-            <a:endParaRPr lang="en-US" sz="1650" dirty="0"/>
-          </a:p>
-        </p:txBody>
-      </p:sp>
-      <p:sp>
-        <p:nvSpPr>
-          <p:cNvPr id="7" name="Text 4"/>
-          <p:cNvSpPr/>
-          <p:nvPr/>
-        </p:nvSpPr>
-        <p:spPr>
-          <a:xfrm>
-            <a:off x="841248" y="3127248"/>
-            <a:ext cx="3008376" cy="1874520"/>
-          </a:xfrm>
-          <a:prstGeom prst="rect">
-            <a:avLst/>
-          </a:prstGeom>
-          <a:noFill/>
-          <a:ln/>
-        </p:spPr>
-        <p:txBody>
-          <a:bodyPr wrap="square" lIns="0" tIns="0" rIns="0" bIns="0" rtlCol="0" anchor="t"/>
-          <a:lstStyle/>
-          <a:p>
-            <a:pPr indent="0" marL="0">
-              <a:lnSpc>
-                <a:spcPct val="110000"/>
-              </a:lnSpc>
-              <a:buNone/>
-            </a:pPr>
-            <a:r>
-              <a:rPr lang="en-US" sz="1150" dirty="0">
-                <a:solidFill>
-                  <a:srgbClr val="3E4E59"/>
-                </a:solidFill>
-                <a:latin typeface="Arial" pitchFamily="34" charset="0"/>
-                <a:ea typeface="Arial" pitchFamily="34" charset="-122"/>
-                <a:cs typeface="Arial" pitchFamily="34" charset="-120"/>
-              </a:rPr>
-              <a:t>A Lei nº 10.438/2002 e a REN ANEEL nº 1.000/2021 garantem de 60% a 90% de desconto na tarifa entre 21h30 e 6h. O BESS concentra o bombeamento nessa janela e carrega barato para sustentar a operação na ponta.</a:t>
-            </a:r>
-            <a:endParaRPr lang="en-US" sz="1150" dirty="0"/>
-          </a:p>
-        </p:txBody>
-      </p:sp>
-      <p:sp>
-        <p:nvSpPr>
-          <p:cNvPr id="8" name="Shape 5"/>
-          <p:cNvSpPr/>
-          <p:nvPr/>
-        </p:nvSpPr>
-        <p:spPr>
-          <a:xfrm>
-            <a:off x="4370832" y="1463040"/>
-            <a:ext cx="3593592" cy="3794760"/>
-          </a:xfrm>
-          <a:prstGeom prst="roundRect">
-            <a:avLst>
-              <a:gd name="adj" fmla="val 2290"/>
-            </a:avLst>
-          </a:prstGeom>
-          <a:solidFill>
-            <a:srgbClr val="F5F8FA"/>
-          </a:solidFill>
-          <a:ln w="9525">
-            <a:solidFill>
-              <a:srgbClr val="D9E2E8"/>
-            </a:solidFill>
-            <a:prstDash val="solid"/>
-          </a:ln>
-          <a:effectLst>
-            <a:outerShdw sx="100000" sy="100000" kx="0" ky="0" algn="bl" rotWithShape="0" blurRad="88900" dist="25400" dir="5400000">
-              <a:srgbClr val="9AAAB4">
-                <a:alpha val="35000"/>
-              </a:srgbClr>
-            </a:outerShdw>
-          </a:effectLst>
-        </p:spPr>
-      </p:sp>
-      <p:sp>
-        <p:nvSpPr>
-          <p:cNvPr id="9" name="Shape 6"/>
-          <p:cNvSpPr/>
-          <p:nvPr/>
-        </p:nvSpPr>
-        <p:spPr>
-          <a:xfrm>
-            <a:off x="4663440" y="1737360"/>
-            <a:ext cx="548640" cy="548640"/>
-          </a:xfrm>
-          <a:prstGeom prst="ellipse">
-            <a:avLst/>
-          </a:prstGeom>
-          <a:solidFill>
-            <a:srgbClr val="F2B705"/>
-          </a:solidFill>
-          <a:ln/>
-        </p:spPr>
-      </p:sp>
-      <p:pic>
-        <p:nvPicPr>
-          <p:cNvPr id="10" name="Image 1" descr="preencoded.png">    </p:cNvPr>
+          <p:cNvPr id="6" name="Image 1" descr="preencoded.png">    </p:cNvPr>
           <p:cNvPicPr>
             <a:picLocks noChangeAspect="1"/>
           </p:cNvPicPr>
@@ -3679,7 +3099,7 @@
         </p:blipFill>
         <p:spPr>
           <a:xfrm>
-            <a:off x="4784141" y="1858061"/>
+            <a:off x="8414309" y="1949501"/>
             <a:ext cx="307238" cy="307238"/>
           </a:xfrm>
           <a:prstGeom prst="rect">
@@ -3689,33 +3109,30 @@
       </p:pic>
       <p:sp>
         <p:nvSpPr>
-          <p:cNvPr id="11" name="Text 7"/>
-          <p:cNvSpPr/>
-          <p:nvPr/>
-        </p:nvSpPr>
-        <p:spPr>
-          <a:xfrm>
-            <a:off x="4663440" y="2423160"/>
-            <a:ext cx="3008376" cy="658368"/>
-          </a:xfrm>
-          <a:prstGeom prst="rect">
-            <a:avLst/>
-          </a:prstGeom>
-          <a:noFill/>
-          <a:ln/>
-        </p:spPr>
-        <p:txBody>
-          <a:bodyPr wrap="square" lIns="0" tIns="0" rIns="0" bIns="0" rtlCol="0" anchor="t"/>
+          <p:cNvPr id="7" name="Text 3"/>
+          <p:cNvSpPr/>
+          <p:nvPr/>
+        </p:nvSpPr>
+        <p:spPr>
+          <a:xfrm>
+            <a:off x="8293608" y="2468880"/>
+            <a:ext cx="3054096" cy="457200"/>
+          </a:xfrm>
+          <a:prstGeom prst="rect">
+            <a:avLst/>
+          </a:prstGeom>
+          <a:noFill/>
+          <a:ln/>
+        </p:spPr>
+        <p:txBody>
+          <a:bodyPr wrap="square" lIns="0" tIns="0" rIns="0" bIns="0" rtlCol="0" anchor="ctr"/>
           <a:lstStyle/>
           <a:p>
             <a:pPr indent="0" marL="0">
-              <a:lnSpc>
-                <a:spcPct val="102000"/>
-              </a:lnSpc>
-              <a:buNone/>
-            </a:pPr>
-            <a:r>
-              <a:rPr lang="en-US" sz="1650" b="1" dirty="0">
+              <a:buNone/>
+            </a:pPr>
+            <a:r>
+              <a:rPr lang="en-US" sz="1600" b="1" dirty="0">
                 <a:solidFill>
                   <a:srgbClr val="16303F"/>
                 </a:solidFill>
@@ -3723,22 +3140,22 @@
                 <a:ea typeface="Arial" pitchFamily="34" charset="-122"/>
                 <a:cs typeface="Arial" pitchFamily="34" charset="-120"/>
               </a:rPr>
-              <a:t>Crédito rural do Plano Safra 2026/27</a:t>
-            </a:r>
-            <a:endParaRPr lang="en-US" sz="1650" dirty="0"/>
-          </a:p>
-        </p:txBody>
-      </p:sp>
-      <p:sp>
-        <p:nvSpPr>
-          <p:cNvPr id="12" name="Text 8"/>
-          <p:cNvSpPr/>
-          <p:nvPr/>
-        </p:nvSpPr>
-        <p:spPr>
-          <a:xfrm>
-            <a:off x="4663440" y="3127248"/>
-            <a:ext cx="3008376" cy="1874520"/>
+              <a:t>O tempo é a variável crítica</a:t>
+            </a:r>
+            <a:endParaRPr lang="en-US" sz="1600" dirty="0"/>
+          </a:p>
+        </p:txBody>
+      </p:sp>
+      <p:sp>
+        <p:nvSpPr>
+          <p:cNvPr id="8" name="Text 4"/>
+          <p:cNvSpPr/>
+          <p:nvPr/>
+        </p:nvSpPr>
+        <p:spPr>
+          <a:xfrm>
+            <a:off x="8293608" y="2971800"/>
+            <a:ext cx="3054096" cy="2788920"/>
           </a:xfrm>
           <a:prstGeom prst="rect">
             <a:avLst/>
@@ -3765,152 +3182,10 @@
                 <a:ea typeface="Arial" pitchFamily="34" charset="-122"/>
                 <a:cs typeface="Arial" pitchFamily="34" charset="-120"/>
               </a:rPr>
-              <a:t>Pela primeira vez, baterias são financiáveis no crédito rural (InvestAgro, Inovagro e Prodecoop), com juros de 8% a 12,5% a.a. — abaixo da TMA de 15%, acelerando o retorno sobre o capital próprio.</a:t>
+              <a:t>MT aderiu ao Convênio ICMS nº 16/2015 já em 2015: desde 2016, a energia compensada é isenta do ICMS (alíquota de 17%).</a:t>
             </a:r>
             <a:endParaRPr lang="en-US" sz="1150" dirty="0"/>
           </a:p>
-        </p:txBody>
-      </p:sp>
-      <p:sp>
-        <p:nvSpPr>
-          <p:cNvPr id="13" name="Shape 9"/>
-          <p:cNvSpPr/>
-          <p:nvPr/>
-        </p:nvSpPr>
-        <p:spPr>
-          <a:xfrm>
-            <a:off x="8193024" y="1463040"/>
-            <a:ext cx="3593592" cy="3794760"/>
-          </a:xfrm>
-          <a:prstGeom prst="roundRect">
-            <a:avLst>
-              <a:gd name="adj" fmla="val 2290"/>
-            </a:avLst>
-          </a:prstGeom>
-          <a:solidFill>
-            <a:srgbClr val="F5F8FA"/>
-          </a:solidFill>
-          <a:ln w="9525">
-            <a:solidFill>
-              <a:srgbClr val="D9E2E8"/>
-            </a:solidFill>
-            <a:prstDash val="solid"/>
-          </a:ln>
-          <a:effectLst>
-            <a:outerShdw sx="100000" sy="100000" kx="0" ky="0" algn="bl" rotWithShape="0" blurRad="88900" dist="25400" dir="5400000">
-              <a:srgbClr val="9AAAB4">
-                <a:alpha val="35000"/>
-              </a:srgbClr>
-            </a:outerShdw>
-          </a:effectLst>
-        </p:spPr>
-      </p:sp>
-      <p:sp>
-        <p:nvSpPr>
-          <p:cNvPr id="14" name="Shape 10"/>
-          <p:cNvSpPr/>
-          <p:nvPr/>
-        </p:nvSpPr>
-        <p:spPr>
-          <a:xfrm>
-            <a:off x="8485632" y="1737360"/>
-            <a:ext cx="548640" cy="548640"/>
-          </a:xfrm>
-          <a:prstGeom prst="ellipse">
-            <a:avLst/>
-          </a:prstGeom>
-          <a:solidFill>
-            <a:srgbClr val="F2B705"/>
-          </a:solidFill>
-          <a:ln/>
-        </p:spPr>
-      </p:sp>
-      <p:pic>
-        <p:nvPicPr>
-          <p:cNvPr id="15" name="Image 2" descr="preencoded.png">    </p:cNvPr>
-          <p:cNvPicPr>
-            <a:picLocks noChangeAspect="1"/>
-          </p:cNvPicPr>
-          <p:nvPr/>
-        </p:nvPicPr>
-        <p:blipFill>
-          <a:blip r:embed="rId3"/>
-          <a:stretch>
-            <a:fillRect/>
-          </a:stretch>
-        </p:blipFill>
-        <p:spPr>
-          <a:xfrm>
-            <a:off x="8606333" y="1858061"/>
-            <a:ext cx="307238" cy="307238"/>
-          </a:xfrm>
-          <a:prstGeom prst="rect">
-            <a:avLst/>
-          </a:prstGeom>
-        </p:spPr>
-      </p:pic>
-      <p:sp>
-        <p:nvSpPr>
-          <p:cNvPr id="16" name="Text 11"/>
-          <p:cNvSpPr/>
-          <p:nvPr/>
-        </p:nvSpPr>
-        <p:spPr>
-          <a:xfrm>
-            <a:off x="8485632" y="2423160"/>
-            <a:ext cx="3008376" cy="658368"/>
-          </a:xfrm>
-          <a:prstGeom prst="rect">
-            <a:avLst/>
-          </a:prstGeom>
-          <a:noFill/>
-          <a:ln/>
-        </p:spPr>
-        <p:txBody>
-          <a:bodyPr wrap="square" lIns="0" tIns="0" rIns="0" bIns="0" rtlCol="0" anchor="t"/>
-          <a:lstStyle/>
-          <a:p>
-            <a:pPr indent="0" marL="0">
-              <a:lnSpc>
-                <a:spcPct val="102000"/>
-              </a:lnSpc>
-              <a:buNone/>
-            </a:pPr>
-            <a:r>
-              <a:rPr lang="en-US" sz="1650" b="1" dirty="0">
-                <a:solidFill>
-                  <a:srgbClr val="16303F"/>
-                </a:solidFill>
-                <a:latin typeface="Arial" pitchFamily="34" charset="0"/>
-                <a:ea typeface="Arial" pitchFamily="34" charset="-122"/>
-                <a:cs typeface="Arial" pitchFamily="34" charset="-120"/>
-              </a:rPr>
-              <a:t>Payback validado pelo mercado</a:t>
-            </a:r>
-            <a:endParaRPr lang="en-US" sz="1650" dirty="0"/>
-          </a:p>
-        </p:txBody>
-      </p:sp>
-      <p:sp>
-        <p:nvSpPr>
-          <p:cNvPr id="17" name="Text 12"/>
-          <p:cNvSpPr/>
-          <p:nvPr/>
-        </p:nvSpPr>
-        <p:spPr>
-          <a:xfrm>
-            <a:off x="8485632" y="3127248"/>
-            <a:ext cx="3008376" cy="1874520"/>
-          </a:xfrm>
-          <a:prstGeom prst="rect">
-            <a:avLst/>
-          </a:prstGeom>
-          <a:noFill/>
-          <a:ln/>
-        </p:spPr>
-        <p:txBody>
-          <a:bodyPr wrap="square" lIns="0" tIns="0" rIns="0" bIns="0" rtlCol="0" anchor="t"/>
-          <a:lstStyle/>
           <a:p>
             <a:pPr indent="0" marL="0">
               <a:lnSpc>
@@ -3918,6 +3193,15 @@
               </a:lnSpc>
               <a:buNone/>
             </a:pPr>
+            <a:endParaRPr lang="en-US" sz="1150" dirty="0"/>
+          </a:p>
+          <a:p>
+            <a:pPr indent="0" marL="0">
+              <a:lnSpc>
+                <a:spcPct val="110000"/>
+              </a:lnSpc>
+              <a:buNone/>
+            </a:pPr>
             <a:r>
               <a:rPr lang="en-US" sz="1150" dirty="0">
                 <a:solidFill>
@@ -3927,44 +3211,51 @@
                 <a:ea typeface="Arial" pitchFamily="34" charset="-122"/>
                 <a:cs typeface="Arial" pitchFamily="34" charset="-120"/>
               </a:rPr>
-              <a:t>Integradores e estudos de mercado já reportam payback de 5 a 6 anos em geração distribuída com baterias — e de 3 a 7 anos em solar para irrigação, com casos de pivôs no Cerrado e no MATOPIBA.</a:t>
+              <a:t>O benefício é pleno até 2028, cai 20% ao ano a partir de 2029 e termina em 2033 — posicionar a UFV + BESS agora maximiza o caixa dos melhores anos.</a:t>
             </a:r>
             <a:endParaRPr lang="en-US" sz="1150" dirty="0"/>
           </a:p>
-        </p:txBody>
-      </p:sp>
-      <p:sp>
-        <p:nvSpPr>
-          <p:cNvPr id="18" name="Shape 13"/>
-          <p:cNvSpPr/>
-          <p:nvPr/>
-        </p:nvSpPr>
-        <p:spPr>
-          <a:xfrm>
-            <a:off x="548640" y="5486400"/>
-            <a:ext cx="11091672" cy="566928"/>
-          </a:xfrm>
-          <a:prstGeom prst="roundRect">
-            <a:avLst>
-              <a:gd name="adj" fmla="val 12903"/>
-            </a:avLst>
-          </a:prstGeom>
-          <a:solidFill>
-            <a:srgbClr val="EAF1F6"/>
-          </a:solidFill>
-          <a:ln/>
-        </p:spPr>
-      </p:sp>
-      <p:sp>
-        <p:nvSpPr>
-          <p:cNvPr id="19" name="Text 14"/>
-          <p:cNvSpPr/>
-          <p:nvPr/>
-        </p:nvSpPr>
-        <p:spPr>
-          <a:xfrm>
-            <a:off x="777240" y="5486400"/>
-            <a:ext cx="10698480" cy="566928"/>
+          <a:p>
+            <a:pPr indent="0" marL="0">
+              <a:lnSpc>
+                <a:spcPct val="110000"/>
+              </a:lnSpc>
+              <a:buNone/>
+            </a:pPr>
+            <a:endParaRPr lang="en-US" sz="1150" dirty="0"/>
+          </a:p>
+          <a:p>
+            <a:pPr indent="0" marL="0">
+              <a:lnSpc>
+                <a:spcPct val="110000"/>
+              </a:lnSpc>
+              <a:buNone/>
+            </a:pPr>
+            <a:r>
+              <a:rPr lang="en-US" sz="1150" dirty="0">
+                <a:solidFill>
+                  <a:srgbClr val="3E4E59"/>
+                </a:solidFill>
+                <a:latin typeface="Arial" pitchFamily="34" charset="0"/>
+                <a:ea typeface="Arial" pitchFamily="34" charset="-122"/>
+                <a:cs typeface="Arial" pitchFamily="34" charset="-120"/>
+              </a:rPr>
+              <a:t>Bônus agro: ICMS zero em equipamentos de irrigação (Decreto nº 1.971/2026).</a:t>
+            </a:r>
+            <a:endParaRPr lang="en-US" sz="1150" dirty="0"/>
+          </a:p>
+        </p:txBody>
+      </p:sp>
+      <p:sp>
+        <p:nvSpPr>
+          <p:cNvPr id="9" name="Text 5"/>
+          <p:cNvSpPr/>
+          <p:nvPr/>
+        </p:nvSpPr>
+        <p:spPr>
+          <a:xfrm>
+            <a:off x="594360" y="6144768"/>
+            <a:ext cx="6949440" cy="256032"/>
           </a:xfrm>
           <a:prstGeom prst="rect">
             <a:avLst/>
@@ -3980,59 +3271,6 @@
               <a:buNone/>
             </a:pPr>
             <a:r>
-              <a:rPr lang="en-US" sz="1250" b="1" dirty="0">
-                <a:solidFill>
-                  <a:srgbClr val="16303F"/>
-                </a:solidFill>
-                <a:latin typeface="Arial" pitchFamily="34" charset="0"/>
-                <a:ea typeface="Arial" pitchFamily="34" charset="-122"/>
-                <a:cs typeface="Arial" pitchFamily="34" charset="-120"/>
-              </a:rPr>
-              <a:t>Escala do prêmio:  </a:t>
-            </a:r>
-            <a:pPr indent="0" marL="0">
-              <a:buNone/>
-            </a:pPr>
-            <a:r>
-              <a:rPr lang="en-US" sz="1250" dirty="0">
-                <a:solidFill>
-                  <a:srgbClr val="3E4E59"/>
-                </a:solidFill>
-                <a:latin typeface="Arial" pitchFamily="34" charset="0"/>
-                <a:ea typeface="Arial" pitchFamily="34" charset="-122"/>
-                <a:cs typeface="Arial" pitchFamily="34" charset="-120"/>
-              </a:rPr>
-              <a:t>uma fazenda com 5 a 10 pivôs gasta de R$ 200 mil a R$ 800 mil por ano em energia — exatamente a conta que o BESS ataca.</a:t>
-            </a:r>
-            <a:endParaRPr lang="en-US" sz="1250" dirty="0"/>
-          </a:p>
-        </p:txBody>
-      </p:sp>
-      <p:sp>
-        <p:nvSpPr>
-          <p:cNvPr id="20" name="Text 15"/>
-          <p:cNvSpPr/>
-          <p:nvPr/>
-        </p:nvSpPr>
-        <p:spPr>
-          <a:xfrm>
-            <a:off x="548640" y="6144768"/>
-            <a:ext cx="11091672" cy="256032"/>
-          </a:xfrm>
-          <a:prstGeom prst="rect">
-            <a:avLst/>
-          </a:prstGeom>
-          <a:noFill/>
-          <a:ln/>
-        </p:spPr>
-        <p:txBody>
-          <a:bodyPr wrap="square" lIns="0" tIns="0" rIns="0" bIns="0" rtlCol="0" anchor="ctr"/>
-          <a:lstStyle/>
-          <a:p>
-            <a:pPr indent="0" marL="0">
-              <a:buNone/>
-            </a:pPr>
-            <a:r>
               <a:rPr lang="en-US" sz="850" i="1" dirty="0">
                 <a:solidFill>
                   <a:srgbClr val="7A8A94"/>
@@ -4041,7 +3279,7 @@
                 <a:ea typeface="Arial" pitchFamily="34" charset="-122"/>
                 <a:cs typeface="Arial" pitchFamily="34" charset="-120"/>
               </a:rPr>
-              <a:t>Fontes: ANEEL (Lei nº 10.438/2002 · REN nº 1.000/2021) · Plano Safra 2026/27 (MAPA) · pv magazine Brasil · Canal Solar · Click Petróleo e Gás (jul/2025).</a:t>
+              <a:t>Fontes: CONFAZ (Convênio ICMS nº 16/2015) · SEFAZ-MT · Decreto MT nº 1.971/2026.</a:t>
             </a:r>
             <a:endParaRPr lang="en-US" sz="850" dirty="0"/>
           </a:p>
@@ -4049,7 +3287,7 @@
       </p:sp>
       <p:sp>
         <p:nvSpPr>
-          <p:cNvPr id="22" name="Text 16"/>
+          <p:cNvPr id="11" name="Text 6"/>
           <p:cNvSpPr/>
           <p:nvPr/>
         </p:nvSpPr>
@@ -4088,7 +3326,7 @@
       </p:sp>
       <p:sp>
         <p:nvSpPr>
-          <p:cNvPr id="23" name="Text 17"/>
+          <p:cNvPr id="12" name="Text 7"/>
           <p:cNvSpPr/>
           <p:nvPr/>
         </p:nvSpPr>
@@ -4190,68 +3428,95 @@
                 <a:ea typeface="Arial" pitchFamily="34" charset="-122"/>
                 <a:cs typeface="Arial" pitchFamily="34" charset="-120"/>
               </a:rPr>
-              <a:t>A Trajetória de Recuperação do Capital  |  break-even</a:t>
+              <a:t>Dashboard de Viabilidade do Sistema Híbrido</a:t>
             </a:r>
             <a:endParaRPr lang="en-US" sz="3000" dirty="0"/>
           </a:p>
         </p:txBody>
       </p:sp>
-      <p:pic>
-        <p:nvPicPr>
-          <p:cNvPr id="3" name="Image 0" descr="chart10.png">    </p:cNvPr>
-          <p:cNvPicPr>
-            <a:picLocks noChangeAspect="1"/>
-          </p:cNvPicPr>
-          <p:nvPr/>
-        </p:nvPicPr>
-        <p:blipFill>
-          <a:blip r:embed="rId1"/>
-          <a:stretch>
-            <a:fillRect/>
-          </a:stretch>
-        </p:blipFill>
-        <p:spPr>
-          <a:xfrm>
-            <a:off x="685800" y="1417320"/>
-            <a:ext cx="10835640" cy="4160520"/>
-          </a:xfrm>
-          <a:prstGeom prst="rect">
-            <a:avLst/>
-          </a:prstGeom>
-        </p:spPr>
-      </p:pic>
-      <p:sp>
-        <p:nvSpPr>
-          <p:cNvPr id="4" name="Shape 1"/>
-          <p:cNvSpPr/>
-          <p:nvPr/>
-        </p:nvSpPr>
-        <p:spPr>
-          <a:xfrm>
-            <a:off x="685800" y="5760720"/>
-            <a:ext cx="10835640" cy="566928"/>
+      <p:sp>
+        <p:nvSpPr>
+          <p:cNvPr id="3" name="Text 1"/>
+          <p:cNvSpPr/>
+          <p:nvPr/>
+        </p:nvSpPr>
+        <p:spPr>
+          <a:xfrm>
+            <a:off x="548640" y="1078992"/>
+            <a:ext cx="11064240" cy="365760"/>
+          </a:xfrm>
+          <a:prstGeom prst="rect">
+            <a:avLst/>
+          </a:prstGeom>
+          <a:noFill/>
+          <a:ln/>
+        </p:spPr>
+        <p:txBody>
+          <a:bodyPr wrap="square" lIns="0" tIns="0" rIns="0" bIns="0" rtlCol="0" anchor="ctr"/>
+          <a:lstStyle/>
+          <a:p>
+            <a:pPr indent="0" marL="0">
+              <a:buNone/>
+            </a:pPr>
+            <a:r>
+              <a:rPr lang="en-US" sz="1250" i="1" dirty="0">
+                <a:solidFill>
+                  <a:srgbClr val="7A8A94"/>
+                </a:solidFill>
+                <a:latin typeface="Arial" pitchFamily="34" charset="0"/>
+                <a:ea typeface="Arial" pitchFamily="34" charset="-122"/>
+                <a:cs typeface="Arial" pitchFamily="34" charset="-120"/>
+              </a:rPr>
+              <a:t>Cenário agro otimizado: irrigação bombeada no horário reservado do irrigante + crédito do Plano Safra  ·  tarifa B3 (Energisa-MT)  ·  TMA 15% a.a.</a:t>
+            </a:r>
+            <a:endParaRPr lang="en-US" sz="1250" dirty="0"/>
+          </a:p>
+        </p:txBody>
+      </p:sp>
+      <p:sp>
+        <p:nvSpPr>
+          <p:cNvPr id="4" name="Shape 2"/>
+          <p:cNvSpPr/>
+          <p:nvPr/>
+        </p:nvSpPr>
+        <p:spPr>
+          <a:xfrm>
+            <a:off x="548640" y="1600200"/>
+            <a:ext cx="3593592" cy="2377440"/>
           </a:xfrm>
           <a:prstGeom prst="roundRect">
             <a:avLst>
-              <a:gd name="adj" fmla="val 12903"/>
+              <a:gd name="adj" fmla="val 3462"/>
             </a:avLst>
           </a:prstGeom>
           <a:solidFill>
-            <a:srgbClr val="EAF1F6"/>
+            <a:srgbClr val="F5F8FA"/>
           </a:solidFill>
-          <a:ln/>
-        </p:spPr>
-      </p:sp>
-      <p:sp>
-        <p:nvSpPr>
-          <p:cNvPr id="5" name="Text 2"/>
-          <p:cNvSpPr/>
-          <p:nvPr/>
-        </p:nvSpPr>
-        <p:spPr>
-          <a:xfrm>
-            <a:off x="914400" y="5760720"/>
-            <a:ext cx="10378440" cy="566928"/>
+          <a:ln w="9525">
+            <a:solidFill>
+              <a:srgbClr val="D9E2E8"/>
+            </a:solidFill>
+            <a:prstDash val="solid"/>
+          </a:ln>
+          <a:effectLst>
+            <a:outerShdw sx="100000" sy="100000" kx="0" ky="0" algn="bl" rotWithShape="0" blurRad="88900" dist="25400" dir="5400000">
+              <a:srgbClr val="9AAAB4">
+                <a:alpha val="35000"/>
+              </a:srgbClr>
+            </a:outerShdw>
+          </a:effectLst>
+        </p:spPr>
+      </p:sp>
+      <p:sp>
+        <p:nvSpPr>
+          <p:cNvPr id="5" name="Text 3"/>
+          <p:cNvSpPr/>
+          <p:nvPr/>
+        </p:nvSpPr>
+        <p:spPr>
+          <a:xfrm>
+            <a:off x="822960" y="1801368"/>
+            <a:ext cx="3044952" cy="777240"/>
           </a:xfrm>
           <a:prstGeom prst="rect">
             <a:avLst/>
@@ -4267,7 +3532,46 @@
               <a:buNone/>
             </a:pPr>
             <a:r>
-              <a:rPr lang="en-US" sz="1200" b="1" dirty="0">
+              <a:rPr lang="en-US" sz="3800" b="1" dirty="0">
+                <a:solidFill>
+                  <a:srgbClr val="2E7DAF"/>
+                </a:solidFill>
+                <a:latin typeface="Arial" pitchFamily="34" charset="0"/>
+                <a:ea typeface="Arial" pitchFamily="34" charset="-122"/>
+                <a:cs typeface="Arial" pitchFamily="34" charset="-120"/>
+              </a:rPr>
+              <a:t>28,00%</a:t>
+            </a:r>
+            <a:endParaRPr lang="en-US" sz="3800" dirty="0"/>
+          </a:p>
+        </p:txBody>
+      </p:sp>
+      <p:sp>
+        <p:nvSpPr>
+          <p:cNvPr id="6" name="Text 4"/>
+          <p:cNvSpPr/>
+          <p:nvPr/>
+        </p:nvSpPr>
+        <p:spPr>
+          <a:xfrm>
+            <a:off x="822960" y="2624328"/>
+            <a:ext cx="3044952" cy="365760"/>
+          </a:xfrm>
+          <a:prstGeom prst="rect">
+            <a:avLst/>
+          </a:prstGeom>
+          <a:noFill/>
+          <a:ln/>
+        </p:spPr>
+        <p:txBody>
+          <a:bodyPr wrap="square" lIns="0" tIns="0" rIns="0" bIns="0" rtlCol="0" anchor="ctr"/>
+          <a:lstStyle/>
+          <a:p>
+            <a:pPr indent="0" marL="0">
+              <a:buNone/>
+            </a:pPr>
+            <a:r>
+              <a:rPr lang="en-US" sz="1350" b="1" dirty="0">
                 <a:solidFill>
                   <a:srgbClr val="16303F"/>
                 </a:solidFill>
@@ -4275,21 +3579,396 @@
                 <a:ea typeface="Arial" pitchFamily="34" charset="-122"/>
                 <a:cs typeface="Arial" pitchFamily="34" charset="-120"/>
               </a:rPr>
-              <a:t>Ponto de virada financeiro:  </a:t>
-            </a:r>
+              <a:t>TIR — Taxa Interna de Retorno</a:t>
+            </a:r>
+            <a:endParaRPr lang="en-US" sz="1350" dirty="0"/>
+          </a:p>
+        </p:txBody>
+      </p:sp>
+      <p:sp>
+        <p:nvSpPr>
+          <p:cNvPr id="7" name="Text 5"/>
+          <p:cNvSpPr/>
+          <p:nvPr/>
+        </p:nvSpPr>
+        <p:spPr>
+          <a:xfrm>
+            <a:off x="822960" y="3017520"/>
+            <a:ext cx="3044952" cy="868680"/>
+          </a:xfrm>
+          <a:prstGeom prst="rect">
+            <a:avLst/>
+          </a:prstGeom>
+          <a:noFill/>
+          <a:ln/>
+        </p:spPr>
+        <p:txBody>
+          <a:bodyPr wrap="square" lIns="0" tIns="0" rIns="0" bIns="0" rtlCol="0" anchor="t"/>
+          <a:lstStyle/>
+          <a:p>
             <a:pPr indent="0" marL="0">
-              <a:buNone/>
-            </a:pPr>
-            <a:r>
-              <a:rPr lang="en-US" sz="1200" dirty="0">
-                <a:solidFill>
-                  <a:srgbClr val="3E4E59"/>
-                </a:solidFill>
-                <a:latin typeface="Arial" pitchFamily="34" charset="0"/>
-                <a:ea typeface="Arial" pitchFamily="34" charset="-122"/>
-                <a:cs typeface="Arial" pitchFamily="34" charset="-120"/>
-              </a:rPr>
-              <a:t>no Ano 0 ocorre o desembolso total (CAPEX); com bombeamento no horário reservado do irrigante e crédito do Plano Safra, o capital retorna em cerca de 5 anos — um quarto da vida útil de 20 anos.</a:t>
+              <a:lnSpc>
+                <a:spcPct val="110000"/>
+              </a:lnSpc>
+              <a:buNone/>
+            </a:pPr>
+            <a:r>
+              <a:rPr lang="en-US" sz="1100" dirty="0">
+                <a:solidFill>
+                  <a:srgbClr val="7A8A94"/>
+                </a:solidFill>
+                <a:latin typeface="Arial" pitchFamily="34" charset="0"/>
+                <a:ea typeface="Arial" pitchFamily="34" charset="-122"/>
+                <a:cs typeface="Arial" pitchFamily="34" charset="-120"/>
+              </a:rPr>
+              <a:t>No cenário base, 21%; as alavancas do agro elevam o retorno muito acima da renda fixa.</a:t>
+            </a:r>
+            <a:endParaRPr lang="en-US" sz="1100" dirty="0"/>
+          </a:p>
+        </p:txBody>
+      </p:sp>
+      <p:sp>
+        <p:nvSpPr>
+          <p:cNvPr id="8" name="Shape 6"/>
+          <p:cNvSpPr/>
+          <p:nvPr/>
+        </p:nvSpPr>
+        <p:spPr>
+          <a:xfrm>
+            <a:off x="4370832" y="1600200"/>
+            <a:ext cx="3593592" cy="2377440"/>
+          </a:xfrm>
+          <a:prstGeom prst="roundRect">
+            <a:avLst>
+              <a:gd name="adj" fmla="val 3462"/>
+            </a:avLst>
+          </a:prstGeom>
+          <a:solidFill>
+            <a:srgbClr val="F5F8FA"/>
+          </a:solidFill>
+          <a:ln w="9525">
+            <a:solidFill>
+              <a:srgbClr val="D9E2E8"/>
+            </a:solidFill>
+            <a:prstDash val="solid"/>
+          </a:ln>
+          <a:effectLst>
+            <a:outerShdw sx="100000" sy="100000" kx="0" ky="0" algn="bl" rotWithShape="0" blurRad="88900" dist="25400" dir="5400000">
+              <a:srgbClr val="9AAAB4">
+                <a:alpha val="35000"/>
+              </a:srgbClr>
+            </a:outerShdw>
+          </a:effectLst>
+        </p:spPr>
+      </p:sp>
+      <p:sp>
+        <p:nvSpPr>
+          <p:cNvPr id="9" name="Text 7"/>
+          <p:cNvSpPr/>
+          <p:nvPr/>
+        </p:nvSpPr>
+        <p:spPr>
+          <a:xfrm>
+            <a:off x="4645152" y="1801368"/>
+            <a:ext cx="3044952" cy="777240"/>
+          </a:xfrm>
+          <a:prstGeom prst="rect">
+            <a:avLst/>
+          </a:prstGeom>
+          <a:noFill/>
+          <a:ln/>
+        </p:spPr>
+        <p:txBody>
+          <a:bodyPr wrap="square" lIns="0" tIns="0" rIns="0" bIns="0" rtlCol="0" anchor="ctr"/>
+          <a:lstStyle/>
+          <a:p>
+            <a:pPr indent="0" marL="0">
+              <a:buNone/>
+            </a:pPr>
+            <a:r>
+              <a:rPr lang="en-US" sz="3800" b="1" dirty="0">
+                <a:solidFill>
+                  <a:srgbClr val="2E7DAF"/>
+                </a:solidFill>
+                <a:latin typeface="Arial" pitchFamily="34" charset="0"/>
+                <a:ea typeface="Arial" pitchFamily="34" charset="-122"/>
+                <a:cs typeface="Arial" pitchFamily="34" charset="-120"/>
+              </a:rPr>
+              <a:t>≈ 5 anos</a:t>
+            </a:r>
+            <a:endParaRPr lang="en-US" sz="3800" dirty="0"/>
+          </a:p>
+        </p:txBody>
+      </p:sp>
+      <p:sp>
+        <p:nvSpPr>
+          <p:cNvPr id="10" name="Text 8"/>
+          <p:cNvSpPr/>
+          <p:nvPr/>
+        </p:nvSpPr>
+        <p:spPr>
+          <a:xfrm>
+            <a:off x="4645152" y="2624328"/>
+            <a:ext cx="3044952" cy="365760"/>
+          </a:xfrm>
+          <a:prstGeom prst="rect">
+            <a:avLst/>
+          </a:prstGeom>
+          <a:noFill/>
+          <a:ln/>
+        </p:spPr>
+        <p:txBody>
+          <a:bodyPr wrap="square" lIns="0" tIns="0" rIns="0" bIns="0" rtlCol="0" anchor="ctr"/>
+          <a:lstStyle/>
+          <a:p>
+            <a:pPr indent="0" marL="0">
+              <a:buNone/>
+            </a:pPr>
+            <a:r>
+              <a:rPr lang="en-US" sz="1350" b="1" dirty="0">
+                <a:solidFill>
+                  <a:srgbClr val="16303F"/>
+                </a:solidFill>
+                <a:latin typeface="Arial" pitchFamily="34" charset="0"/>
+                <a:ea typeface="Arial" pitchFamily="34" charset="-122"/>
+                <a:cs typeface="Arial" pitchFamily="34" charset="-120"/>
+              </a:rPr>
+              <a:t>Payback descontado</a:t>
+            </a:r>
+            <a:endParaRPr lang="en-US" sz="1350" dirty="0"/>
+          </a:p>
+        </p:txBody>
+      </p:sp>
+      <p:sp>
+        <p:nvSpPr>
+          <p:cNvPr id="11" name="Text 9"/>
+          <p:cNvSpPr/>
+          <p:nvPr/>
+        </p:nvSpPr>
+        <p:spPr>
+          <a:xfrm>
+            <a:off x="4645152" y="3017520"/>
+            <a:ext cx="3044952" cy="868680"/>
+          </a:xfrm>
+          <a:prstGeom prst="rect">
+            <a:avLst/>
+          </a:prstGeom>
+          <a:noFill/>
+          <a:ln/>
+        </p:spPr>
+        <p:txBody>
+          <a:bodyPr wrap="square" lIns="0" tIns="0" rIns="0" bIns="0" rtlCol="0" anchor="t"/>
+          <a:lstStyle/>
+          <a:p>
+            <a:pPr indent="0" marL="0">
+              <a:lnSpc>
+                <a:spcPct val="110000"/>
+              </a:lnSpc>
+              <a:buNone/>
+            </a:pPr>
+            <a:r>
+              <a:rPr lang="en-US" sz="1100" dirty="0">
+                <a:solidFill>
+                  <a:srgbClr val="7A8A94"/>
+                </a:solidFill>
+                <a:latin typeface="Arial" pitchFamily="34" charset="0"/>
+                <a:ea typeface="Arial" pitchFamily="34" charset="-122"/>
+                <a:cs typeface="Arial" pitchFamily="34" charset="-120"/>
+              </a:rPr>
+              <a:t>Recuperação do capital de R$ 13,9 milhões (cenário base, sem alavancas agro: 7 anos e 9 meses).</a:t>
+            </a:r>
+            <a:endParaRPr lang="en-US" sz="1100" dirty="0"/>
+          </a:p>
+        </p:txBody>
+      </p:sp>
+      <p:sp>
+        <p:nvSpPr>
+          <p:cNvPr id="12" name="Shape 10"/>
+          <p:cNvSpPr/>
+          <p:nvPr/>
+        </p:nvSpPr>
+        <p:spPr>
+          <a:xfrm>
+            <a:off x="8193024" y="1600200"/>
+            <a:ext cx="3593592" cy="2377440"/>
+          </a:xfrm>
+          <a:prstGeom prst="roundRect">
+            <a:avLst>
+              <a:gd name="adj" fmla="val 3462"/>
+            </a:avLst>
+          </a:prstGeom>
+          <a:solidFill>
+            <a:srgbClr val="F5F8FA"/>
+          </a:solidFill>
+          <a:ln w="9525">
+            <a:solidFill>
+              <a:srgbClr val="D9E2E8"/>
+            </a:solidFill>
+            <a:prstDash val="solid"/>
+          </a:ln>
+          <a:effectLst>
+            <a:outerShdw sx="100000" sy="100000" kx="0" ky="0" algn="bl" rotWithShape="0" blurRad="88900" dist="25400" dir="5400000">
+              <a:srgbClr val="9AAAB4">
+                <a:alpha val="35000"/>
+              </a:srgbClr>
+            </a:outerShdw>
+          </a:effectLst>
+        </p:spPr>
+      </p:sp>
+      <p:sp>
+        <p:nvSpPr>
+          <p:cNvPr id="13" name="Text 11"/>
+          <p:cNvSpPr/>
+          <p:nvPr/>
+        </p:nvSpPr>
+        <p:spPr>
+          <a:xfrm>
+            <a:off x="8467344" y="1801368"/>
+            <a:ext cx="3044952" cy="777240"/>
+          </a:xfrm>
+          <a:prstGeom prst="rect">
+            <a:avLst/>
+          </a:prstGeom>
+          <a:noFill/>
+          <a:ln/>
+        </p:spPr>
+        <p:txBody>
+          <a:bodyPr wrap="square" lIns="0" tIns="0" rIns="0" bIns="0" rtlCol="0" anchor="ctr"/>
+          <a:lstStyle/>
+          <a:p>
+            <a:pPr indent="0" marL="0">
+              <a:buNone/>
+            </a:pPr>
+            <a:r>
+              <a:rPr lang="en-US" sz="3800" b="1" dirty="0">
+                <a:solidFill>
+                  <a:srgbClr val="2E7DAF"/>
+                </a:solidFill>
+                <a:latin typeface="Arial" pitchFamily="34" charset="0"/>
+                <a:ea typeface="Arial" pitchFamily="34" charset="-122"/>
+                <a:cs typeface="Arial" pitchFamily="34" charset="-120"/>
+              </a:rPr>
+              <a:t>R$ 11,1 mi</a:t>
+            </a:r>
+            <a:endParaRPr lang="en-US" sz="3800" dirty="0"/>
+          </a:p>
+        </p:txBody>
+      </p:sp>
+      <p:sp>
+        <p:nvSpPr>
+          <p:cNvPr id="14" name="Text 12"/>
+          <p:cNvSpPr/>
+          <p:nvPr/>
+        </p:nvSpPr>
+        <p:spPr>
+          <a:xfrm>
+            <a:off x="8467344" y="2624328"/>
+            <a:ext cx="3044952" cy="365760"/>
+          </a:xfrm>
+          <a:prstGeom prst="rect">
+            <a:avLst/>
+          </a:prstGeom>
+          <a:noFill/>
+          <a:ln/>
+        </p:spPr>
+        <p:txBody>
+          <a:bodyPr wrap="square" lIns="0" tIns="0" rIns="0" bIns="0" rtlCol="0" anchor="ctr"/>
+          <a:lstStyle/>
+          <a:p>
+            <a:pPr indent="0" marL="0">
+              <a:buNone/>
+            </a:pPr>
+            <a:r>
+              <a:rPr lang="en-US" sz="1350" b="1" dirty="0">
+                <a:solidFill>
+                  <a:srgbClr val="16303F"/>
+                </a:solidFill>
+                <a:latin typeface="Arial" pitchFamily="34" charset="0"/>
+                <a:ea typeface="Arial" pitchFamily="34" charset="-122"/>
+                <a:cs typeface="Arial" pitchFamily="34" charset="-120"/>
+              </a:rPr>
+              <a:t>VPL — Valor Presente Líquido</a:t>
+            </a:r>
+            <a:endParaRPr lang="en-US" sz="1350" dirty="0"/>
+          </a:p>
+        </p:txBody>
+      </p:sp>
+      <p:sp>
+        <p:nvSpPr>
+          <p:cNvPr id="15" name="Text 13"/>
+          <p:cNvSpPr/>
+          <p:nvPr/>
+        </p:nvSpPr>
+        <p:spPr>
+          <a:xfrm>
+            <a:off x="8467344" y="3017520"/>
+            <a:ext cx="3044952" cy="868680"/>
+          </a:xfrm>
+          <a:prstGeom prst="rect">
+            <a:avLst/>
+          </a:prstGeom>
+          <a:noFill/>
+          <a:ln/>
+        </p:spPr>
+        <p:txBody>
+          <a:bodyPr wrap="square" lIns="0" tIns="0" rIns="0" bIns="0" rtlCol="0" anchor="t"/>
+          <a:lstStyle/>
+          <a:p>
+            <a:pPr indent="0" marL="0">
+              <a:lnSpc>
+                <a:spcPct val="110000"/>
+              </a:lnSpc>
+              <a:buNone/>
+            </a:pPr>
+            <a:r>
+              <a:rPr lang="en-US" sz="1100" dirty="0">
+                <a:solidFill>
+                  <a:srgbClr val="7A8A94"/>
+                </a:solidFill>
+                <a:latin typeface="Arial" pitchFamily="34" charset="0"/>
+                <a:ea typeface="Arial" pitchFamily="34" charset="-122"/>
+                <a:cs typeface="Arial" pitchFamily="34" charset="-120"/>
+              </a:rPr>
+              <a:t>Geração de riqueza real projetada ao longo de 20 anos de operação.</a:t>
+            </a:r>
+            <a:endParaRPr lang="en-US" sz="1100" dirty="0"/>
+          </a:p>
+        </p:txBody>
+      </p:sp>
+      <p:sp>
+        <p:nvSpPr>
+          <p:cNvPr id="16" name="Text 14"/>
+          <p:cNvSpPr/>
+          <p:nvPr/>
+        </p:nvSpPr>
+        <p:spPr>
+          <a:xfrm>
+            <a:off x="548640" y="3959352"/>
+            <a:ext cx="11064240" cy="320040"/>
+          </a:xfrm>
+          <a:prstGeom prst="rect">
+            <a:avLst/>
+          </a:prstGeom>
+          <a:noFill/>
+          <a:ln/>
+        </p:spPr>
+        <p:txBody>
+          <a:bodyPr wrap="square" lIns="0" tIns="0" rIns="0" bIns="0" rtlCol="0" anchor="ctr"/>
+          <a:lstStyle/>
+          <a:p>
+            <a:pPr algn="ctr" indent="0" marL="0">
+              <a:buNone/>
+            </a:pPr>
+            <a:r>
+              <a:rPr lang="en-US" sz="1200" b="1" spc="250" kern="0" dirty="0">
+                <a:solidFill>
+                  <a:srgbClr val="B78A00"/>
+                </a:solidFill>
+                <a:latin typeface="Arial" pitchFamily="34" charset="0"/>
+                <a:ea typeface="Arial" pitchFamily="34" charset="-122"/>
+                <a:cs typeface="Arial" pitchFamily="34" charset="-120"/>
+              </a:rPr>
+              <a:t>MARGEM DE ARBITRAGEM</a:t>
             </a:r>
             <a:endParaRPr lang="en-US" sz="1200" dirty="0"/>
           </a:p>
@@ -4297,7 +3976,239 @@
       </p:sp>
       <p:sp>
         <p:nvSpPr>
-          <p:cNvPr id="7" name="Text 3"/>
+          <p:cNvPr id="17" name="Shape 15"/>
+          <p:cNvSpPr/>
+          <p:nvPr/>
+        </p:nvSpPr>
+        <p:spPr>
+          <a:xfrm>
+            <a:off x="548640" y="4343400"/>
+            <a:ext cx="3291840" cy="1600200"/>
+          </a:xfrm>
+          <a:prstGeom prst="roundRect">
+            <a:avLst>
+              <a:gd name="adj" fmla="val 5143"/>
+            </a:avLst>
+          </a:prstGeom>
+          <a:solidFill>
+            <a:srgbClr val="102A3C"/>
+          </a:solidFill>
+          <a:ln/>
+          <a:effectLst>
+            <a:outerShdw sx="100000" sy="100000" kx="0" ky="0" algn="bl" rotWithShape="0" blurRad="88900" dist="25400" dir="5400000">
+              <a:srgbClr val="9AAAB4">
+                <a:alpha val="35000"/>
+              </a:srgbClr>
+            </a:outerShdw>
+          </a:effectLst>
+        </p:spPr>
+      </p:sp>
+      <p:sp>
+        <p:nvSpPr>
+          <p:cNvPr id="18" name="Text 16"/>
+          <p:cNvSpPr/>
+          <p:nvPr/>
+        </p:nvSpPr>
+        <p:spPr>
+          <a:xfrm>
+            <a:off x="822960" y="4343400"/>
+            <a:ext cx="2743200" cy="1600200"/>
+          </a:xfrm>
+          <a:prstGeom prst="rect">
+            <a:avLst/>
+          </a:prstGeom>
+          <a:noFill/>
+          <a:ln/>
+        </p:spPr>
+        <p:txBody>
+          <a:bodyPr wrap="square" lIns="0" tIns="0" rIns="0" bIns="0" rtlCol="0" anchor="ctr"/>
+          <a:lstStyle/>
+          <a:p>
+            <a:pPr indent="0" marL="0">
+              <a:buNone/>
+            </a:pPr>
+            <a:r>
+              <a:rPr lang="en-US" sz="1300" dirty="0">
+                <a:solidFill>
+                  <a:srgbClr val="9FB3BF"/>
+                </a:solidFill>
+                <a:latin typeface="Arial" pitchFamily="34" charset="0"/>
+                <a:ea typeface="Arial" pitchFamily="34" charset="-122"/>
+                <a:cs typeface="Arial" pitchFamily="34" charset="-120"/>
+              </a:rPr>
+              <a:t>Custo (LCOE)</a:t>
+            </a:r>
+            <a:endParaRPr lang="en-US" sz="1300" dirty="0"/>
+          </a:p>
+          <a:p>
+            <a:pPr indent="0" marL="0">
+              <a:buNone/>
+            </a:pPr>
+            <a:r>
+              <a:rPr lang="en-US" sz="2100" b="1" dirty="0">
+                <a:solidFill>
+                  <a:srgbClr val="FFFFFF"/>
+                </a:solidFill>
+                <a:latin typeface="Arial" pitchFamily="34" charset="0"/>
+                <a:ea typeface="Arial" pitchFamily="34" charset="-122"/>
+                <a:cs typeface="Arial" pitchFamily="34" charset="-120"/>
+              </a:rPr>
+              <a:t>R$ 538,89 / MWh</a:t>
+            </a:r>
+            <a:endParaRPr lang="en-US" sz="1300" dirty="0"/>
+          </a:p>
+        </p:txBody>
+      </p:sp>
+      <p:sp>
+        <p:nvSpPr>
+          <p:cNvPr id="19" name="Shape 17"/>
+          <p:cNvSpPr/>
+          <p:nvPr/>
+        </p:nvSpPr>
+        <p:spPr>
+          <a:xfrm>
+            <a:off x="4041648" y="4800600"/>
+            <a:ext cx="4114800" cy="685800"/>
+          </a:xfrm>
+          <a:prstGeom prst="rightArrow">
+            <a:avLst/>
+          </a:prstGeom>
+          <a:solidFill>
+            <a:srgbClr val="F2B705"/>
+          </a:solidFill>
+          <a:ln/>
+        </p:spPr>
+      </p:sp>
+      <p:sp>
+        <p:nvSpPr>
+          <p:cNvPr id="20" name="Text 18"/>
+          <p:cNvSpPr/>
+          <p:nvPr/>
+        </p:nvSpPr>
+        <p:spPr>
+          <a:xfrm>
+            <a:off x="4041648" y="4325112"/>
+            <a:ext cx="4114800" cy="502920"/>
+          </a:xfrm>
+          <a:prstGeom prst="rect">
+            <a:avLst/>
+          </a:prstGeom>
+          <a:noFill/>
+          <a:ln/>
+        </p:spPr>
+        <p:txBody>
+          <a:bodyPr wrap="square" lIns="0" tIns="0" rIns="0" bIns="0" rtlCol="0" anchor="b"/>
+          <a:lstStyle/>
+          <a:p>
+            <a:pPr algn="ctr" indent="0" marL="0">
+              <a:lnSpc>
+                <a:spcPct val="105000"/>
+              </a:lnSpc>
+              <a:buNone/>
+            </a:pPr>
+            <a:r>
+              <a:rPr lang="en-US" sz="1000" dirty="0">
+                <a:solidFill>
+                  <a:srgbClr val="7A8A94"/>
+                </a:solidFill>
+                <a:latin typeface="Arial" pitchFamily="34" charset="0"/>
+                <a:ea typeface="Arial" pitchFamily="34" charset="-122"/>
+                <a:cs typeface="Arial" pitchFamily="34" charset="-120"/>
+              </a:rPr>
+              <a:t>O LCOE da planta híbrida é substancialmente menor que a precificação da cota — o sistema é matematicamente autossustentável.</a:t>
+            </a:r>
+            <a:endParaRPr lang="en-US" sz="1000" dirty="0"/>
+          </a:p>
+        </p:txBody>
+      </p:sp>
+      <p:sp>
+        <p:nvSpPr>
+          <p:cNvPr id="21" name="Shape 19"/>
+          <p:cNvSpPr/>
+          <p:nvPr/>
+        </p:nvSpPr>
+        <p:spPr>
+          <a:xfrm>
+            <a:off x="8348472" y="4343400"/>
+            <a:ext cx="3291840" cy="1600200"/>
+          </a:xfrm>
+          <a:prstGeom prst="roundRect">
+            <a:avLst>
+              <a:gd name="adj" fmla="val 5143"/>
+            </a:avLst>
+          </a:prstGeom>
+          <a:solidFill>
+            <a:srgbClr val="2E7DAF"/>
+          </a:solidFill>
+          <a:ln/>
+          <a:effectLst>
+            <a:outerShdw sx="100000" sy="100000" kx="0" ky="0" algn="bl" rotWithShape="0" blurRad="88900" dist="25400" dir="5400000">
+              <a:srgbClr val="9AAAB4">
+                <a:alpha val="35000"/>
+              </a:srgbClr>
+            </a:outerShdw>
+          </a:effectLst>
+        </p:spPr>
+      </p:sp>
+      <p:sp>
+        <p:nvSpPr>
+          <p:cNvPr id="22" name="Text 20"/>
+          <p:cNvSpPr/>
+          <p:nvPr/>
+        </p:nvSpPr>
+        <p:spPr>
+          <a:xfrm>
+            <a:off x="8622792" y="4343400"/>
+            <a:ext cx="2743200" cy="1600200"/>
+          </a:xfrm>
+          <a:prstGeom prst="rect">
+            <a:avLst/>
+          </a:prstGeom>
+          <a:noFill/>
+          <a:ln/>
+        </p:spPr>
+        <p:txBody>
+          <a:bodyPr wrap="square" lIns="0" tIns="0" rIns="0" bIns="0" rtlCol="0" anchor="ctr"/>
+          <a:lstStyle/>
+          <a:p>
+            <a:pPr indent="0" marL="0">
+              <a:buNone/>
+            </a:pPr>
+            <a:r>
+              <a:rPr lang="en-US" sz="1300" dirty="0">
+                <a:solidFill>
+                  <a:srgbClr val="DCEBF5"/>
+                </a:solidFill>
+                <a:latin typeface="Arial" pitchFamily="34" charset="0"/>
+                <a:ea typeface="Arial" pitchFamily="34" charset="-122"/>
+                <a:cs typeface="Arial" pitchFamily="34" charset="-120"/>
+              </a:rPr>
+              <a:t>Receita (preço de venda da cota)</a:t>
+            </a:r>
+            <a:endParaRPr lang="en-US" sz="1300" dirty="0"/>
+          </a:p>
+          <a:p>
+            <a:pPr indent="0" marL="0">
+              <a:buNone/>
+            </a:pPr>
+            <a:r>
+              <a:rPr lang="en-US" sz="2100" b="1" dirty="0">
+                <a:solidFill>
+                  <a:srgbClr val="FFFFFF"/>
+                </a:solidFill>
+                <a:latin typeface="Arial" pitchFamily="34" charset="0"/>
+                <a:ea typeface="Arial" pitchFamily="34" charset="-122"/>
+                <a:cs typeface="Arial" pitchFamily="34" charset="-120"/>
+              </a:rPr>
+              <a:t>R$ 794,92 / MWh</a:t>
+            </a:r>
+            <a:endParaRPr lang="en-US" sz="1300" dirty="0"/>
+          </a:p>
+        </p:txBody>
+      </p:sp>
+      <p:sp>
+        <p:nvSpPr>
+          <p:cNvPr id="24" name="Text 21"/>
           <p:cNvSpPr/>
           <p:nvPr/>
         </p:nvSpPr>
@@ -4336,7 +4247,7 @@
       </p:sp>
       <p:sp>
         <p:nvSpPr>
-          <p:cNvPr id="8" name="Text 4"/>
+          <p:cNvPr id="25" name="Text 22"/>
           <p:cNvSpPr/>
           <p:nvPr/>
         </p:nvSpPr>
@@ -4438,6 +4349,1003 @@
                 <a:ea typeface="Arial" pitchFamily="34" charset="-122"/>
                 <a:cs typeface="Arial" pitchFamily="34" charset="-120"/>
               </a:rPr>
+              <a:t>Irrigação Bombeada: as alavancas do payback de ≈ 5 anos</a:t>
+            </a:r>
+            <a:endParaRPr lang="en-US" sz="3000" dirty="0"/>
+          </a:p>
+        </p:txBody>
+      </p:sp>
+      <p:sp>
+        <p:nvSpPr>
+          <p:cNvPr id="3" name="Shape 1"/>
+          <p:cNvSpPr/>
+          <p:nvPr/>
+        </p:nvSpPr>
+        <p:spPr>
+          <a:xfrm>
+            <a:off x="548640" y="1463040"/>
+            <a:ext cx="3593592" cy="3794760"/>
+          </a:xfrm>
+          <a:prstGeom prst="roundRect">
+            <a:avLst>
+              <a:gd name="adj" fmla="val 2290"/>
+            </a:avLst>
+          </a:prstGeom>
+          <a:solidFill>
+            <a:srgbClr val="F5F8FA"/>
+          </a:solidFill>
+          <a:ln w="9525">
+            <a:solidFill>
+              <a:srgbClr val="D9E2E8"/>
+            </a:solidFill>
+            <a:prstDash val="solid"/>
+          </a:ln>
+          <a:effectLst>
+            <a:outerShdw sx="100000" sy="100000" kx="0" ky="0" algn="bl" rotWithShape="0" blurRad="88900" dist="25400" dir="5400000">
+              <a:srgbClr val="9AAAB4">
+                <a:alpha val="35000"/>
+              </a:srgbClr>
+            </a:outerShdw>
+          </a:effectLst>
+        </p:spPr>
+      </p:sp>
+      <p:sp>
+        <p:nvSpPr>
+          <p:cNvPr id="4" name="Shape 2"/>
+          <p:cNvSpPr/>
+          <p:nvPr/>
+        </p:nvSpPr>
+        <p:spPr>
+          <a:xfrm>
+            <a:off x="841248" y="1737360"/>
+            <a:ext cx="548640" cy="548640"/>
+          </a:xfrm>
+          <a:prstGeom prst="ellipse">
+            <a:avLst/>
+          </a:prstGeom>
+          <a:solidFill>
+            <a:srgbClr val="F2B705"/>
+          </a:solidFill>
+          <a:ln/>
+        </p:spPr>
+      </p:sp>
+      <p:pic>
+        <p:nvPicPr>
+          <p:cNvPr id="5" name="Image 0" descr="preencoded.png">    </p:cNvPr>
+          <p:cNvPicPr>
+            <a:picLocks noChangeAspect="1"/>
+          </p:cNvPicPr>
+          <p:nvPr/>
+        </p:nvPicPr>
+        <p:blipFill>
+          <a:blip r:embed="rId1"/>
+          <a:stretch>
+            <a:fillRect/>
+          </a:stretch>
+        </p:blipFill>
+        <p:spPr>
+          <a:xfrm>
+            <a:off x="961949" y="1858061"/>
+            <a:ext cx="307238" cy="307238"/>
+          </a:xfrm>
+          <a:prstGeom prst="rect">
+            <a:avLst/>
+          </a:prstGeom>
+        </p:spPr>
+      </p:pic>
+      <p:sp>
+        <p:nvSpPr>
+          <p:cNvPr id="6" name="Text 3"/>
+          <p:cNvSpPr/>
+          <p:nvPr/>
+        </p:nvSpPr>
+        <p:spPr>
+          <a:xfrm>
+            <a:off x="841248" y="2423160"/>
+            <a:ext cx="3008376" cy="658368"/>
+          </a:xfrm>
+          <a:prstGeom prst="rect">
+            <a:avLst/>
+          </a:prstGeom>
+          <a:noFill/>
+          <a:ln/>
+        </p:spPr>
+        <p:txBody>
+          <a:bodyPr wrap="square" lIns="0" tIns="0" rIns="0" bIns="0" rtlCol="0" anchor="t"/>
+          <a:lstStyle/>
+          <a:p>
+            <a:pPr indent="0" marL="0">
+              <a:lnSpc>
+                <a:spcPct val="102000"/>
+              </a:lnSpc>
+              <a:buNone/>
+            </a:pPr>
+            <a:r>
+              <a:rPr lang="en-US" sz="1650" b="1" dirty="0">
+                <a:solidFill>
+                  <a:srgbClr val="16303F"/>
+                </a:solidFill>
+                <a:latin typeface="Arial" pitchFamily="34" charset="0"/>
+                <a:ea typeface="Arial" pitchFamily="34" charset="-122"/>
+                <a:cs typeface="Arial" pitchFamily="34" charset="-120"/>
+              </a:rPr>
+              <a:t>Horário reservado do irrigante</a:t>
+            </a:r>
+            <a:endParaRPr lang="en-US" sz="1650" dirty="0"/>
+          </a:p>
+        </p:txBody>
+      </p:sp>
+      <p:sp>
+        <p:nvSpPr>
+          <p:cNvPr id="7" name="Text 4"/>
+          <p:cNvSpPr/>
+          <p:nvPr/>
+        </p:nvSpPr>
+        <p:spPr>
+          <a:xfrm>
+            <a:off x="841248" y="3127248"/>
+            <a:ext cx="3008376" cy="1874520"/>
+          </a:xfrm>
+          <a:prstGeom prst="rect">
+            <a:avLst/>
+          </a:prstGeom>
+          <a:noFill/>
+          <a:ln/>
+        </p:spPr>
+        <p:txBody>
+          <a:bodyPr wrap="square" lIns="0" tIns="0" rIns="0" bIns="0" rtlCol="0" anchor="t"/>
+          <a:lstStyle/>
+          <a:p>
+            <a:pPr indent="0" marL="0">
+              <a:lnSpc>
+                <a:spcPct val="110000"/>
+              </a:lnSpc>
+              <a:buNone/>
+            </a:pPr>
+            <a:r>
+              <a:rPr lang="en-US" sz="1150" dirty="0">
+                <a:solidFill>
+                  <a:srgbClr val="3E4E59"/>
+                </a:solidFill>
+                <a:latin typeface="Arial" pitchFamily="34" charset="0"/>
+                <a:ea typeface="Arial" pitchFamily="34" charset="-122"/>
+                <a:cs typeface="Arial" pitchFamily="34" charset="-120"/>
+              </a:rPr>
+              <a:t>A Lei nº 10.438/2002 e a REN ANEEL nº 1.000/2021 garantem de 60% a 90% de desconto na tarifa entre 21h30 e 6h. O BESS concentra o bombeamento nessa janela e carrega barato para sustentar a operação na ponta.</a:t>
+            </a:r>
+            <a:endParaRPr lang="en-US" sz="1150" dirty="0"/>
+          </a:p>
+        </p:txBody>
+      </p:sp>
+      <p:sp>
+        <p:nvSpPr>
+          <p:cNvPr id="8" name="Shape 5"/>
+          <p:cNvSpPr/>
+          <p:nvPr/>
+        </p:nvSpPr>
+        <p:spPr>
+          <a:xfrm>
+            <a:off x="4370832" y="1463040"/>
+            <a:ext cx="3593592" cy="3794760"/>
+          </a:xfrm>
+          <a:prstGeom prst="roundRect">
+            <a:avLst>
+              <a:gd name="adj" fmla="val 2290"/>
+            </a:avLst>
+          </a:prstGeom>
+          <a:solidFill>
+            <a:srgbClr val="F5F8FA"/>
+          </a:solidFill>
+          <a:ln w="9525">
+            <a:solidFill>
+              <a:srgbClr val="D9E2E8"/>
+            </a:solidFill>
+            <a:prstDash val="solid"/>
+          </a:ln>
+          <a:effectLst>
+            <a:outerShdw sx="100000" sy="100000" kx="0" ky="0" algn="bl" rotWithShape="0" blurRad="88900" dist="25400" dir="5400000">
+              <a:srgbClr val="9AAAB4">
+                <a:alpha val="35000"/>
+              </a:srgbClr>
+            </a:outerShdw>
+          </a:effectLst>
+        </p:spPr>
+      </p:sp>
+      <p:sp>
+        <p:nvSpPr>
+          <p:cNvPr id="9" name="Shape 6"/>
+          <p:cNvSpPr/>
+          <p:nvPr/>
+        </p:nvSpPr>
+        <p:spPr>
+          <a:xfrm>
+            <a:off x="4663440" y="1737360"/>
+            <a:ext cx="548640" cy="548640"/>
+          </a:xfrm>
+          <a:prstGeom prst="ellipse">
+            <a:avLst/>
+          </a:prstGeom>
+          <a:solidFill>
+            <a:srgbClr val="F2B705"/>
+          </a:solidFill>
+          <a:ln/>
+        </p:spPr>
+      </p:sp>
+      <p:pic>
+        <p:nvPicPr>
+          <p:cNvPr id="10" name="Image 1" descr="preencoded.png">    </p:cNvPr>
+          <p:cNvPicPr>
+            <a:picLocks noChangeAspect="1"/>
+          </p:cNvPicPr>
+          <p:nvPr/>
+        </p:nvPicPr>
+        <p:blipFill>
+          <a:blip r:embed="rId2"/>
+          <a:stretch>
+            <a:fillRect/>
+          </a:stretch>
+        </p:blipFill>
+        <p:spPr>
+          <a:xfrm>
+            <a:off x="4784141" y="1858061"/>
+            <a:ext cx="307238" cy="307238"/>
+          </a:xfrm>
+          <a:prstGeom prst="rect">
+            <a:avLst/>
+          </a:prstGeom>
+        </p:spPr>
+      </p:pic>
+      <p:sp>
+        <p:nvSpPr>
+          <p:cNvPr id="11" name="Text 7"/>
+          <p:cNvSpPr/>
+          <p:nvPr/>
+        </p:nvSpPr>
+        <p:spPr>
+          <a:xfrm>
+            <a:off x="4663440" y="2423160"/>
+            <a:ext cx="3008376" cy="658368"/>
+          </a:xfrm>
+          <a:prstGeom prst="rect">
+            <a:avLst/>
+          </a:prstGeom>
+          <a:noFill/>
+          <a:ln/>
+        </p:spPr>
+        <p:txBody>
+          <a:bodyPr wrap="square" lIns="0" tIns="0" rIns="0" bIns="0" rtlCol="0" anchor="t"/>
+          <a:lstStyle/>
+          <a:p>
+            <a:pPr indent="0" marL="0">
+              <a:lnSpc>
+                <a:spcPct val="102000"/>
+              </a:lnSpc>
+              <a:buNone/>
+            </a:pPr>
+            <a:r>
+              <a:rPr lang="en-US" sz="1650" b="1" dirty="0">
+                <a:solidFill>
+                  <a:srgbClr val="16303F"/>
+                </a:solidFill>
+                <a:latin typeface="Arial" pitchFamily="34" charset="0"/>
+                <a:ea typeface="Arial" pitchFamily="34" charset="-122"/>
+                <a:cs typeface="Arial" pitchFamily="34" charset="-120"/>
+              </a:rPr>
+              <a:t>Crédito rural do Plano Safra 2026/27</a:t>
+            </a:r>
+            <a:endParaRPr lang="en-US" sz="1650" dirty="0"/>
+          </a:p>
+        </p:txBody>
+      </p:sp>
+      <p:sp>
+        <p:nvSpPr>
+          <p:cNvPr id="12" name="Text 8"/>
+          <p:cNvSpPr/>
+          <p:nvPr/>
+        </p:nvSpPr>
+        <p:spPr>
+          <a:xfrm>
+            <a:off x="4663440" y="3127248"/>
+            <a:ext cx="3008376" cy="1874520"/>
+          </a:xfrm>
+          <a:prstGeom prst="rect">
+            <a:avLst/>
+          </a:prstGeom>
+          <a:noFill/>
+          <a:ln/>
+        </p:spPr>
+        <p:txBody>
+          <a:bodyPr wrap="square" lIns="0" tIns="0" rIns="0" bIns="0" rtlCol="0" anchor="t"/>
+          <a:lstStyle/>
+          <a:p>
+            <a:pPr indent="0" marL="0">
+              <a:lnSpc>
+                <a:spcPct val="110000"/>
+              </a:lnSpc>
+              <a:buNone/>
+            </a:pPr>
+            <a:r>
+              <a:rPr lang="en-US" sz="1150" dirty="0">
+                <a:solidFill>
+                  <a:srgbClr val="3E4E59"/>
+                </a:solidFill>
+                <a:latin typeface="Arial" pitchFamily="34" charset="0"/>
+                <a:ea typeface="Arial" pitchFamily="34" charset="-122"/>
+                <a:cs typeface="Arial" pitchFamily="34" charset="-120"/>
+              </a:rPr>
+              <a:t>Pela primeira vez, baterias são financiáveis no crédito rural (InvestAgro, Inovagro e Prodecoop), com juros de 8% a 12,5% a.a. — abaixo da TMA de 15%, acelerando o retorno sobre o capital próprio.</a:t>
+            </a:r>
+            <a:endParaRPr lang="en-US" sz="1150" dirty="0"/>
+          </a:p>
+        </p:txBody>
+      </p:sp>
+      <p:sp>
+        <p:nvSpPr>
+          <p:cNvPr id="13" name="Shape 9"/>
+          <p:cNvSpPr/>
+          <p:nvPr/>
+        </p:nvSpPr>
+        <p:spPr>
+          <a:xfrm>
+            <a:off x="8193024" y="1463040"/>
+            <a:ext cx="3593592" cy="3794760"/>
+          </a:xfrm>
+          <a:prstGeom prst="roundRect">
+            <a:avLst>
+              <a:gd name="adj" fmla="val 2290"/>
+            </a:avLst>
+          </a:prstGeom>
+          <a:solidFill>
+            <a:srgbClr val="F5F8FA"/>
+          </a:solidFill>
+          <a:ln w="9525">
+            <a:solidFill>
+              <a:srgbClr val="D9E2E8"/>
+            </a:solidFill>
+            <a:prstDash val="solid"/>
+          </a:ln>
+          <a:effectLst>
+            <a:outerShdw sx="100000" sy="100000" kx="0" ky="0" algn="bl" rotWithShape="0" blurRad="88900" dist="25400" dir="5400000">
+              <a:srgbClr val="9AAAB4">
+                <a:alpha val="35000"/>
+              </a:srgbClr>
+            </a:outerShdw>
+          </a:effectLst>
+        </p:spPr>
+      </p:sp>
+      <p:sp>
+        <p:nvSpPr>
+          <p:cNvPr id="14" name="Shape 10"/>
+          <p:cNvSpPr/>
+          <p:nvPr/>
+        </p:nvSpPr>
+        <p:spPr>
+          <a:xfrm>
+            <a:off x="8485632" y="1737360"/>
+            <a:ext cx="548640" cy="548640"/>
+          </a:xfrm>
+          <a:prstGeom prst="ellipse">
+            <a:avLst/>
+          </a:prstGeom>
+          <a:solidFill>
+            <a:srgbClr val="F2B705"/>
+          </a:solidFill>
+          <a:ln/>
+        </p:spPr>
+      </p:sp>
+      <p:pic>
+        <p:nvPicPr>
+          <p:cNvPr id="15" name="Image 2" descr="preencoded.png">    </p:cNvPr>
+          <p:cNvPicPr>
+            <a:picLocks noChangeAspect="1"/>
+          </p:cNvPicPr>
+          <p:nvPr/>
+        </p:nvPicPr>
+        <p:blipFill>
+          <a:blip r:embed="rId3"/>
+          <a:stretch>
+            <a:fillRect/>
+          </a:stretch>
+        </p:blipFill>
+        <p:spPr>
+          <a:xfrm>
+            <a:off x="8606333" y="1858061"/>
+            <a:ext cx="307238" cy="307238"/>
+          </a:xfrm>
+          <a:prstGeom prst="rect">
+            <a:avLst/>
+          </a:prstGeom>
+        </p:spPr>
+      </p:pic>
+      <p:sp>
+        <p:nvSpPr>
+          <p:cNvPr id="16" name="Text 11"/>
+          <p:cNvSpPr/>
+          <p:nvPr/>
+        </p:nvSpPr>
+        <p:spPr>
+          <a:xfrm>
+            <a:off x="8485632" y="2423160"/>
+            <a:ext cx="3008376" cy="658368"/>
+          </a:xfrm>
+          <a:prstGeom prst="rect">
+            <a:avLst/>
+          </a:prstGeom>
+          <a:noFill/>
+          <a:ln/>
+        </p:spPr>
+        <p:txBody>
+          <a:bodyPr wrap="square" lIns="0" tIns="0" rIns="0" bIns="0" rtlCol="0" anchor="t"/>
+          <a:lstStyle/>
+          <a:p>
+            <a:pPr indent="0" marL="0">
+              <a:lnSpc>
+                <a:spcPct val="102000"/>
+              </a:lnSpc>
+              <a:buNone/>
+            </a:pPr>
+            <a:r>
+              <a:rPr lang="en-US" sz="1650" b="1" dirty="0">
+                <a:solidFill>
+                  <a:srgbClr val="16303F"/>
+                </a:solidFill>
+                <a:latin typeface="Arial" pitchFamily="34" charset="0"/>
+                <a:ea typeface="Arial" pitchFamily="34" charset="-122"/>
+                <a:cs typeface="Arial" pitchFamily="34" charset="-120"/>
+              </a:rPr>
+              <a:t>Payback validado pelo mercado</a:t>
+            </a:r>
+            <a:endParaRPr lang="en-US" sz="1650" dirty="0"/>
+          </a:p>
+        </p:txBody>
+      </p:sp>
+      <p:sp>
+        <p:nvSpPr>
+          <p:cNvPr id="17" name="Text 12"/>
+          <p:cNvSpPr/>
+          <p:nvPr/>
+        </p:nvSpPr>
+        <p:spPr>
+          <a:xfrm>
+            <a:off x="8485632" y="3127248"/>
+            <a:ext cx="3008376" cy="1874520"/>
+          </a:xfrm>
+          <a:prstGeom prst="rect">
+            <a:avLst/>
+          </a:prstGeom>
+          <a:noFill/>
+          <a:ln/>
+        </p:spPr>
+        <p:txBody>
+          <a:bodyPr wrap="square" lIns="0" tIns="0" rIns="0" bIns="0" rtlCol="0" anchor="t"/>
+          <a:lstStyle/>
+          <a:p>
+            <a:pPr indent="0" marL="0">
+              <a:lnSpc>
+                <a:spcPct val="110000"/>
+              </a:lnSpc>
+              <a:buNone/>
+            </a:pPr>
+            <a:r>
+              <a:rPr lang="en-US" sz="1150" dirty="0">
+                <a:solidFill>
+                  <a:srgbClr val="3E4E59"/>
+                </a:solidFill>
+                <a:latin typeface="Arial" pitchFamily="34" charset="0"/>
+                <a:ea typeface="Arial" pitchFamily="34" charset="-122"/>
+                <a:cs typeface="Arial" pitchFamily="34" charset="-120"/>
+              </a:rPr>
+              <a:t>Integradores e estudos de mercado já reportam payback de 5 a 6 anos em geração distribuída com baterias — e de 3 a 7 anos em solar para irrigação, com casos de pivôs no Cerrado e no MATOPIBA.</a:t>
+            </a:r>
+            <a:endParaRPr lang="en-US" sz="1150" dirty="0"/>
+          </a:p>
+        </p:txBody>
+      </p:sp>
+      <p:sp>
+        <p:nvSpPr>
+          <p:cNvPr id="18" name="Shape 13"/>
+          <p:cNvSpPr/>
+          <p:nvPr/>
+        </p:nvSpPr>
+        <p:spPr>
+          <a:xfrm>
+            <a:off x="548640" y="5486400"/>
+            <a:ext cx="11091672" cy="566928"/>
+          </a:xfrm>
+          <a:prstGeom prst="roundRect">
+            <a:avLst>
+              <a:gd name="adj" fmla="val 12903"/>
+            </a:avLst>
+          </a:prstGeom>
+          <a:solidFill>
+            <a:srgbClr val="EAF1F6"/>
+          </a:solidFill>
+          <a:ln/>
+        </p:spPr>
+      </p:sp>
+      <p:sp>
+        <p:nvSpPr>
+          <p:cNvPr id="19" name="Text 14"/>
+          <p:cNvSpPr/>
+          <p:nvPr/>
+        </p:nvSpPr>
+        <p:spPr>
+          <a:xfrm>
+            <a:off x="777240" y="5486400"/>
+            <a:ext cx="10698480" cy="566928"/>
+          </a:xfrm>
+          <a:prstGeom prst="rect">
+            <a:avLst/>
+          </a:prstGeom>
+          <a:noFill/>
+          <a:ln/>
+        </p:spPr>
+        <p:txBody>
+          <a:bodyPr wrap="square" lIns="0" tIns="0" rIns="0" bIns="0" rtlCol="0" anchor="ctr"/>
+          <a:lstStyle/>
+          <a:p>
+            <a:pPr indent="0" marL="0">
+              <a:buNone/>
+            </a:pPr>
+            <a:r>
+              <a:rPr lang="en-US" sz="1250" b="1" dirty="0">
+                <a:solidFill>
+                  <a:srgbClr val="16303F"/>
+                </a:solidFill>
+                <a:latin typeface="Arial" pitchFamily="34" charset="0"/>
+                <a:ea typeface="Arial" pitchFamily="34" charset="-122"/>
+                <a:cs typeface="Arial" pitchFamily="34" charset="-120"/>
+              </a:rPr>
+              <a:t>Escala do prêmio:  </a:t>
+            </a:r>
+            <a:pPr indent="0" marL="0">
+              <a:buNone/>
+            </a:pPr>
+            <a:r>
+              <a:rPr lang="en-US" sz="1250" dirty="0">
+                <a:solidFill>
+                  <a:srgbClr val="3E4E59"/>
+                </a:solidFill>
+                <a:latin typeface="Arial" pitchFamily="34" charset="0"/>
+                <a:ea typeface="Arial" pitchFamily="34" charset="-122"/>
+                <a:cs typeface="Arial" pitchFamily="34" charset="-120"/>
+              </a:rPr>
+              <a:t>uma fazenda com 5 a 10 pivôs gasta de R$ 200 mil a R$ 800 mil por ano em energia — exatamente a conta que o BESS ataca.</a:t>
+            </a:r>
+            <a:endParaRPr lang="en-US" sz="1250" dirty="0"/>
+          </a:p>
+        </p:txBody>
+      </p:sp>
+      <p:sp>
+        <p:nvSpPr>
+          <p:cNvPr id="20" name="Text 15"/>
+          <p:cNvSpPr/>
+          <p:nvPr/>
+        </p:nvSpPr>
+        <p:spPr>
+          <a:xfrm>
+            <a:off x="548640" y="6144768"/>
+            <a:ext cx="11091672" cy="256032"/>
+          </a:xfrm>
+          <a:prstGeom prst="rect">
+            <a:avLst/>
+          </a:prstGeom>
+          <a:noFill/>
+          <a:ln/>
+        </p:spPr>
+        <p:txBody>
+          <a:bodyPr wrap="square" lIns="0" tIns="0" rIns="0" bIns="0" rtlCol="0" anchor="ctr"/>
+          <a:lstStyle/>
+          <a:p>
+            <a:pPr indent="0" marL="0">
+              <a:buNone/>
+            </a:pPr>
+            <a:r>
+              <a:rPr lang="en-US" sz="850" i="1" dirty="0">
+                <a:solidFill>
+                  <a:srgbClr val="7A8A94"/>
+                </a:solidFill>
+                <a:latin typeface="Arial" pitchFamily="34" charset="0"/>
+                <a:ea typeface="Arial" pitchFamily="34" charset="-122"/>
+                <a:cs typeface="Arial" pitchFamily="34" charset="-120"/>
+              </a:rPr>
+              <a:t>Fontes: ANEEL (Lei nº 10.438/2002 · REN nº 1.000/2021) · Plano Safra 2026/27 (MAPA) · pv magazine Brasil · Canal Solar · Click Petróleo e Gás (jul/2025).</a:t>
+            </a:r>
+            <a:endParaRPr lang="en-US" sz="850" dirty="0"/>
+          </a:p>
+        </p:txBody>
+      </p:sp>
+      <p:sp>
+        <p:nvSpPr>
+          <p:cNvPr id="22" name="Text 16"/>
+          <p:cNvSpPr/>
+          <p:nvPr/>
+        </p:nvSpPr>
+        <p:spPr>
+          <a:xfrm>
+            <a:off x="548640" y="6473952"/>
+            <a:ext cx="5029200" cy="274320"/>
+          </a:xfrm>
+          <a:prstGeom prst="rect">
+            <a:avLst/>
+          </a:prstGeom>
+          <a:noFill/>
+          <a:ln/>
+        </p:spPr>
+        <p:txBody>
+          <a:bodyPr wrap="square" lIns="0" tIns="0" rIns="0" bIns="0" rtlCol="0" anchor="ctr"/>
+          <a:lstStyle/>
+          <a:p>
+            <a:pPr algn="l" indent="0" marL="0">
+              <a:buNone/>
+            </a:pPr>
+            <a:r>
+              <a:rPr lang="en-US" sz="850" dirty="0">
+                <a:solidFill>
+                  <a:srgbClr val="7A8A94"/>
+                </a:solidFill>
+                <a:latin typeface="Arial" pitchFamily="34" charset="0"/>
+                <a:ea typeface="Arial" pitchFamily="34" charset="-122"/>
+                <a:cs typeface="Arial" pitchFamily="34" charset="-120"/>
+              </a:rPr>
+              <a:t>Eng. Lucas Silva Costa  ·  CREA-MT 029137</a:t>
+            </a:r>
+            <a:endParaRPr lang="en-US" sz="850" dirty="0"/>
+          </a:p>
+        </p:txBody>
+      </p:sp>
+      <p:sp>
+        <p:nvSpPr>
+          <p:cNvPr id="23" name="Text 17"/>
+          <p:cNvSpPr/>
+          <p:nvPr/>
+        </p:nvSpPr>
+        <p:spPr>
+          <a:xfrm>
+            <a:off x="11274552" y="6473952"/>
+            <a:ext cx="457200" cy="274320"/>
+          </a:xfrm>
+          <a:prstGeom prst="rect">
+            <a:avLst/>
+          </a:prstGeom>
+          <a:noFill/>
+          <a:ln/>
+        </p:spPr>
+        <p:txBody>
+          <a:bodyPr wrap="square" lIns="0" tIns="0" rIns="0" bIns="0" rtlCol="0" anchor="ctr"/>
+          <a:lstStyle/>
+          <a:p>
+            <a:pPr algn="r" indent="0" marL="0">
+              <a:buNone/>
+            </a:pPr>
+            <a:r>
+              <a:rPr lang="en-US" sz="850" dirty="0">
+                <a:solidFill>
+                  <a:srgbClr val="7A8A94"/>
+                </a:solidFill>
+                <a:latin typeface="Arial" pitchFamily="34" charset="0"/>
+                <a:ea typeface="Arial" pitchFamily="34" charset="-122"/>
+                <a:cs typeface="Arial" pitchFamily="34" charset="-120"/>
+              </a:rPr>
+              <a:t>13</a:t>
+            </a:r>
+            <a:endParaRPr lang="en-US" sz="850" dirty="0"/>
+          </a:p>
+        </p:txBody>
+      </p:sp>
+    </p:spTree>
+  </p:cSld>
+  <p:clrMapOvr>
+    <a:masterClrMapping/>
+  </p:clrMapOvr>
+</p:sld>
+</file>
+
+<file path=ppt/slides/slide14.xml><?xml version="1.0" encoding="utf-8"?>
+<p:sld xmlns:a="http://schemas.openxmlformats.org/drawingml/2006/main" xmlns:r="http://schemas.openxmlformats.org/officeDocument/2006/relationships" xmlns:p="http://schemas.openxmlformats.org/presentationml/2006/main">
+  <p:cSld name="Slide 14">
+    <p:bg>
+      <p:bgPr>
+        <a:solidFill>
+          <a:srgbClr val="FFFFFF"/>
+        </a:solidFill>
+      </p:bgPr>
+    </p:bg>
+    <p:spTree>
+      <p:nvGrpSpPr>
+        <p:cNvPr id="1" name=""/>
+        <p:cNvGrpSpPr/>
+        <p:nvPr/>
+      </p:nvGrpSpPr>
+      <p:grpSpPr>
+        <a:xfrm>
+          <a:off x="0" y="0"/>
+          <a:ext cx="0" cy="0"/>
+          <a:chOff x="0" y="0"/>
+          <a:chExt cx="0" cy="0"/>
+        </a:xfrm>
+      </p:grpSpPr>
+      <p:sp>
+        <p:nvSpPr>
+          <p:cNvPr id="2" name="Text 0"/>
+          <p:cNvSpPr/>
+          <p:nvPr/>
+        </p:nvSpPr>
+        <p:spPr>
+          <a:xfrm>
+            <a:off x="548640" y="384048"/>
+            <a:ext cx="11064240" cy="822960"/>
+          </a:xfrm>
+          <a:prstGeom prst="rect">
+            <a:avLst/>
+          </a:prstGeom>
+          <a:noFill/>
+          <a:ln/>
+        </p:spPr>
+        <p:txBody>
+          <a:bodyPr wrap="square" lIns="0" tIns="0" rIns="0" bIns="0" rtlCol="0" anchor="t"/>
+          <a:lstStyle/>
+          <a:p>
+            <a:pPr algn="l" indent="0" marL="0">
+              <a:buNone/>
+            </a:pPr>
+            <a:r>
+              <a:rPr lang="en-US" sz="3000" b="1" dirty="0">
+                <a:solidFill>
+                  <a:srgbClr val="16303F"/>
+                </a:solidFill>
+                <a:latin typeface="Arial" pitchFamily="34" charset="0"/>
+                <a:ea typeface="Arial" pitchFamily="34" charset="-122"/>
+                <a:cs typeface="Arial" pitchFamily="34" charset="-120"/>
+              </a:rPr>
+              <a:t>A Trajetória de Recuperação do Capital  |  break-even</a:t>
+            </a:r>
+            <a:endParaRPr lang="en-US" sz="3000" dirty="0"/>
+          </a:p>
+        </p:txBody>
+      </p:sp>
+      <p:pic>
+        <p:nvPicPr>
+          <p:cNvPr id="3" name="Image 0" descr="chart10.png">    </p:cNvPr>
+          <p:cNvPicPr>
+            <a:picLocks noChangeAspect="1"/>
+          </p:cNvPicPr>
+          <p:nvPr/>
+        </p:nvPicPr>
+        <p:blipFill>
+          <a:blip r:embed="rId1"/>
+          <a:stretch>
+            <a:fillRect/>
+          </a:stretch>
+        </p:blipFill>
+        <p:spPr>
+          <a:xfrm>
+            <a:off x="685800" y="1417320"/>
+            <a:ext cx="10835640" cy="4160520"/>
+          </a:xfrm>
+          <a:prstGeom prst="rect">
+            <a:avLst/>
+          </a:prstGeom>
+        </p:spPr>
+      </p:pic>
+      <p:sp>
+        <p:nvSpPr>
+          <p:cNvPr id="4" name="Shape 1"/>
+          <p:cNvSpPr/>
+          <p:nvPr/>
+        </p:nvSpPr>
+        <p:spPr>
+          <a:xfrm>
+            <a:off x="685800" y="5760720"/>
+            <a:ext cx="10835640" cy="566928"/>
+          </a:xfrm>
+          <a:prstGeom prst="roundRect">
+            <a:avLst>
+              <a:gd name="adj" fmla="val 12903"/>
+            </a:avLst>
+          </a:prstGeom>
+          <a:solidFill>
+            <a:srgbClr val="EAF1F6"/>
+          </a:solidFill>
+          <a:ln/>
+        </p:spPr>
+      </p:sp>
+      <p:sp>
+        <p:nvSpPr>
+          <p:cNvPr id="5" name="Text 2"/>
+          <p:cNvSpPr/>
+          <p:nvPr/>
+        </p:nvSpPr>
+        <p:spPr>
+          <a:xfrm>
+            <a:off x="914400" y="5760720"/>
+            <a:ext cx="10378440" cy="566928"/>
+          </a:xfrm>
+          <a:prstGeom prst="rect">
+            <a:avLst/>
+          </a:prstGeom>
+          <a:noFill/>
+          <a:ln/>
+        </p:spPr>
+        <p:txBody>
+          <a:bodyPr wrap="square" lIns="0" tIns="0" rIns="0" bIns="0" rtlCol="0" anchor="ctr"/>
+          <a:lstStyle/>
+          <a:p>
+            <a:pPr indent="0" marL="0">
+              <a:buNone/>
+            </a:pPr>
+            <a:r>
+              <a:rPr lang="en-US" sz="1200" b="1" dirty="0">
+                <a:solidFill>
+                  <a:srgbClr val="16303F"/>
+                </a:solidFill>
+                <a:latin typeface="Arial" pitchFamily="34" charset="0"/>
+                <a:ea typeface="Arial" pitchFamily="34" charset="-122"/>
+                <a:cs typeface="Arial" pitchFamily="34" charset="-120"/>
+              </a:rPr>
+              <a:t>Ponto de virada financeiro:  </a:t>
+            </a:r>
+            <a:pPr indent="0" marL="0">
+              <a:buNone/>
+            </a:pPr>
+            <a:r>
+              <a:rPr lang="en-US" sz="1200" dirty="0">
+                <a:solidFill>
+                  <a:srgbClr val="3E4E59"/>
+                </a:solidFill>
+                <a:latin typeface="Arial" pitchFamily="34" charset="0"/>
+                <a:ea typeface="Arial" pitchFamily="34" charset="-122"/>
+                <a:cs typeface="Arial" pitchFamily="34" charset="-120"/>
+              </a:rPr>
+              <a:t>no Ano 0 ocorre o desembolso total (CAPEX); com bombeamento no horário reservado do irrigante e crédito do Plano Safra, o capital retorna em cerca de 5 anos — um quarto da vida útil de 20 anos.</a:t>
+            </a:r>
+            <a:endParaRPr lang="en-US" sz="1200" dirty="0"/>
+          </a:p>
+        </p:txBody>
+      </p:sp>
+      <p:sp>
+        <p:nvSpPr>
+          <p:cNvPr id="7" name="Text 3"/>
+          <p:cNvSpPr/>
+          <p:nvPr/>
+        </p:nvSpPr>
+        <p:spPr>
+          <a:xfrm>
+            <a:off x="548640" y="6473952"/>
+            <a:ext cx="5029200" cy="274320"/>
+          </a:xfrm>
+          <a:prstGeom prst="rect">
+            <a:avLst/>
+          </a:prstGeom>
+          <a:noFill/>
+          <a:ln/>
+        </p:spPr>
+        <p:txBody>
+          <a:bodyPr wrap="square" lIns="0" tIns="0" rIns="0" bIns="0" rtlCol="0" anchor="ctr"/>
+          <a:lstStyle/>
+          <a:p>
+            <a:pPr algn="l" indent="0" marL="0">
+              <a:buNone/>
+            </a:pPr>
+            <a:r>
+              <a:rPr lang="en-US" sz="850" dirty="0">
+                <a:solidFill>
+                  <a:srgbClr val="7A8A94"/>
+                </a:solidFill>
+                <a:latin typeface="Arial" pitchFamily="34" charset="0"/>
+                <a:ea typeface="Arial" pitchFamily="34" charset="-122"/>
+                <a:cs typeface="Arial" pitchFamily="34" charset="-120"/>
+              </a:rPr>
+              <a:t>Eng. Lucas Silva Costa  ·  CREA-MT 029137</a:t>
+            </a:r>
+            <a:endParaRPr lang="en-US" sz="850" dirty="0"/>
+          </a:p>
+        </p:txBody>
+      </p:sp>
+      <p:sp>
+        <p:nvSpPr>
+          <p:cNvPr id="8" name="Text 4"/>
+          <p:cNvSpPr/>
+          <p:nvPr/>
+        </p:nvSpPr>
+        <p:spPr>
+          <a:xfrm>
+            <a:off x="11274552" y="6473952"/>
+            <a:ext cx="457200" cy="274320"/>
+          </a:xfrm>
+          <a:prstGeom prst="rect">
+            <a:avLst/>
+          </a:prstGeom>
+          <a:noFill/>
+          <a:ln/>
+        </p:spPr>
+        <p:txBody>
+          <a:bodyPr wrap="square" lIns="0" tIns="0" rIns="0" bIns="0" rtlCol="0" anchor="ctr"/>
+          <a:lstStyle/>
+          <a:p>
+            <a:pPr algn="r" indent="0" marL="0">
+              <a:buNone/>
+            </a:pPr>
+            <a:r>
+              <a:rPr lang="en-US" sz="850" dirty="0">
+                <a:solidFill>
+                  <a:srgbClr val="7A8A94"/>
+                </a:solidFill>
+                <a:latin typeface="Arial" pitchFamily="34" charset="0"/>
+                <a:ea typeface="Arial" pitchFamily="34" charset="-122"/>
+                <a:cs typeface="Arial" pitchFamily="34" charset="-120"/>
+              </a:rPr>
+              <a:t>14</a:t>
+            </a:r>
+            <a:endParaRPr lang="en-US" sz="850" dirty="0"/>
+          </a:p>
+        </p:txBody>
+      </p:sp>
+    </p:spTree>
+  </p:cSld>
+  <p:clrMapOvr>
+    <a:masterClrMapping/>
+  </p:clrMapOvr>
+</p:sld>
+</file>
+
+<file path=ppt/slides/slide15.xml><?xml version="1.0" encoding="utf-8"?>
+<p:sld xmlns:a="http://schemas.openxmlformats.org/drawingml/2006/main" xmlns:r="http://schemas.openxmlformats.org/officeDocument/2006/relationships" xmlns:p="http://schemas.openxmlformats.org/presentationml/2006/main">
+  <p:cSld name="Slide 15">
+    <p:bg>
+      <p:bgPr>
+        <a:solidFill>
+          <a:srgbClr val="FFFFFF"/>
+        </a:solidFill>
+      </p:bgPr>
+    </p:bg>
+    <p:spTree>
+      <p:nvGrpSpPr>
+        <p:cNvPr id="1" name=""/>
+        <p:cNvGrpSpPr/>
+        <p:nvPr/>
+      </p:nvGrpSpPr>
+      <p:grpSpPr>
+        <a:xfrm>
+          <a:off x="0" y="0"/>
+          <a:ext cx="0" cy="0"/>
+          <a:chOff x="0" y="0"/>
+          <a:chExt cx="0" cy="0"/>
+        </a:xfrm>
+      </p:grpSpPr>
+      <p:sp>
+        <p:nvSpPr>
+          <p:cNvPr id="2" name="Text 0"/>
+          <p:cNvSpPr/>
+          <p:nvPr/>
+        </p:nvSpPr>
+        <p:spPr>
+          <a:xfrm>
+            <a:off x="548640" y="384048"/>
+            <a:ext cx="11064240" cy="822960"/>
+          </a:xfrm>
+          <a:prstGeom prst="rect">
+            <a:avLst/>
+          </a:prstGeom>
+          <a:noFill/>
+          <a:ln/>
+        </p:spPr>
+        <p:txBody>
+          <a:bodyPr wrap="square" lIns="0" tIns="0" rIns="0" bIns="0" rtlCol="0" anchor="t"/>
+          <a:lstStyle/>
+          <a:p>
+            <a:pPr algn="l" indent="0" marL="0">
+              <a:buNone/>
+            </a:pPr>
+            <a:r>
+              <a:rPr lang="en-US" sz="3000" b="1" dirty="0">
+                <a:solidFill>
+                  <a:srgbClr val="16303F"/>
+                </a:solidFill>
+                <a:latin typeface="Arial" pitchFamily="34" charset="0"/>
+                <a:ea typeface="Arial" pitchFamily="34" charset="-122"/>
+                <a:cs typeface="Arial" pitchFamily="34" charset="-120"/>
+              </a:rPr>
               <a:t>Fronteiras de Aplicação: quem realmente se beneficia do BESS?</a:t>
             </a:r>
             <a:endParaRPr lang="en-US" sz="3000" dirty="0"/>
@@ -5044,7 +5952,7 @@
                 <a:ea typeface="Arial" pitchFamily="34" charset="-122"/>
                 <a:cs typeface="Arial" pitchFamily="34" charset="-120"/>
               </a:rPr>
-              <a:t>13</a:t>
+              <a:t>15</a:t>
             </a:r>
             <a:endParaRPr lang="en-US" sz="850" dirty="0"/>
           </a:p>
@@ -5058,9 +5966,9 @@
 </p:sld>
 </file>
 
-<file path=ppt/slides/slide14.xml><?xml version="1.0" encoding="utf-8"?>
+<file path=ppt/slides/slide16.xml><?xml version="1.0" encoding="utf-8"?>
 <p:sld xmlns:a="http://schemas.openxmlformats.org/drawingml/2006/main" xmlns:r="http://schemas.openxmlformats.org/officeDocument/2006/relationships" xmlns:p="http://schemas.openxmlformats.org/presentationml/2006/main">
-  <p:cSld name="Slide 14">
+  <p:cSld name="Slide 16">
     <p:bg>
       <p:bgPr>
         <a:solidFill>
@@ -5481,7 +6389,7 @@
                 <a:ea typeface="Arial" pitchFamily="34" charset="-122"/>
                 <a:cs typeface="Arial" pitchFamily="34" charset="-120"/>
               </a:rPr>
-              <a:t>Por meio de Peak Shaving, Time Shifting e Geração Compartilhada regulamentada, </a:t>
+              <a:t>Ao empilhar Peak Shaving, Time Shifting, anti-curtailment e Geração Compartilhada regulamentada, </a:t>
             </a:r>
             <a:pPr algn="ctr" indent="0" marL="0">
               <a:lnSpc>
@@ -5618,7 +6526,7 @@
                 <a:ea typeface="Arial" pitchFamily="34" charset="-122"/>
                 <a:cs typeface="Arial" pitchFamily="34" charset="-120"/>
               </a:rPr>
-              <a:t>14</a:t>
+              <a:t>16</a:t>
             </a:r>
             <a:endParaRPr lang="en-US" sz="850" dirty="0"/>
           </a:p>
@@ -5632,9 +6540,9 @@
 </p:sld>
 </file>
 
-<file path=ppt/slides/slide15.xml><?xml version="1.0" encoding="utf-8"?>
+<file path=ppt/slides/slide17.xml><?xml version="1.0" encoding="utf-8"?>
 <p:sld xmlns:a="http://schemas.openxmlformats.org/drawingml/2006/main" xmlns:r="http://schemas.openxmlformats.org/officeDocument/2006/relationships" xmlns:p="http://schemas.openxmlformats.org/presentationml/2006/main">
-  <p:cSld name="Slide 15">
+  <p:cSld name="Slide 17">
     <p:bg>
       <p:bgPr>
         <a:solidFill>
@@ -6003,7 +6911,7 @@
                 <a:ea typeface="Arial" pitchFamily="34" charset="-122"/>
                 <a:cs typeface="Arial" pitchFamily="34" charset="-120"/>
               </a:rPr>
-              <a:t>15</a:t>
+              <a:t>17</a:t>
             </a:r>
             <a:endParaRPr lang="en-US" sz="850" dirty="0"/>
           </a:p>
@@ -8587,7 +9495,7 @@
                 <a:ea typeface="Arial" pitchFamily="34" charset="-122"/>
                 <a:cs typeface="Arial" pitchFamily="34" charset="-120"/>
               </a:rPr>
-              <a:t>O Alicerce Regulatório: padronização e legalidade</a:t>
+              <a:t>Empilhamento de Receitas: um ativo, várias fontes de valor</a:t>
             </a:r>
             <a:endParaRPr lang="en-US" sz="3000" dirty="0"/>
           </a:p>
@@ -8595,61 +9503,304 @@
       </p:sp>
       <p:sp>
         <p:nvSpPr>
-          <p:cNvPr id="3" name="Text 1"/>
-          <p:cNvSpPr/>
-          <p:nvPr/>
-        </p:nvSpPr>
-        <p:spPr>
-          <a:xfrm>
-            <a:off x="548640" y="1078992"/>
-            <a:ext cx="11064240" cy="365760"/>
-          </a:xfrm>
-          <a:prstGeom prst="rect">
-            <a:avLst/>
-          </a:prstGeom>
-          <a:noFill/>
-          <a:ln/>
-        </p:spPr>
-        <p:txBody>
-          <a:bodyPr wrap="square" lIns="0" tIns="0" rIns="0" bIns="0" rtlCol="0" anchor="ctr"/>
-          <a:lstStyle/>
-          <a:p>
-            <a:pPr indent="0" marL="0">
-              <a:buNone/>
-            </a:pPr>
-            <a:r>
-              <a:rPr lang="en-US" sz="1350" i="1" dirty="0">
-                <a:solidFill>
-                  <a:srgbClr val="7A8A94"/>
-                </a:solidFill>
-                <a:latin typeface="Arial" pitchFamily="34" charset="0"/>
-                <a:ea typeface="Arial" pitchFamily="34" charset="-122"/>
-                <a:cs typeface="Arial" pitchFamily="34" charset="-120"/>
-              </a:rPr>
-              <a:t>Dois instrumentos sustentam a confiança do mercado — um viabiliza o negócio, o outro viabiliza a engenharia.</a:t>
-            </a:r>
-            <a:endParaRPr lang="en-US" sz="1350" dirty="0"/>
-          </a:p>
-        </p:txBody>
-      </p:sp>
-      <p:sp>
-        <p:nvSpPr>
-          <p:cNvPr id="4" name="Shape 2"/>
-          <p:cNvSpPr/>
-          <p:nvPr/>
-        </p:nvSpPr>
-        <p:spPr>
-          <a:xfrm>
-            <a:off x="548640" y="1645920"/>
-            <a:ext cx="5440680" cy="4389120"/>
+          <p:cNvPr id="3" name="Shape 1"/>
+          <p:cNvSpPr/>
+          <p:nvPr/>
+        </p:nvSpPr>
+        <p:spPr>
+          <a:xfrm>
+            <a:off x="685800" y="5138928"/>
+            <a:ext cx="4160520" cy="786384"/>
           </a:xfrm>
           <a:prstGeom prst="roundRect">
             <a:avLst>
-              <a:gd name="adj" fmla="val 1875"/>
+              <a:gd name="adj" fmla="val 6977"/>
             </a:avLst>
           </a:prstGeom>
           <a:solidFill>
-            <a:srgbClr val="F5F8FA"/>
+            <a:srgbClr val="31485A"/>
+          </a:solidFill>
+          <a:ln/>
+          <a:effectLst>
+            <a:outerShdw sx="100000" sy="100000" kx="0" ky="0" algn="bl" rotWithShape="0" blurRad="88900" dist="25400" dir="5400000">
+              <a:srgbClr val="9AAAB4">
+                <a:alpha val="35000"/>
+              </a:srgbClr>
+            </a:outerShdw>
+          </a:effectLst>
+        </p:spPr>
+      </p:sp>
+      <p:sp>
+        <p:nvSpPr>
+          <p:cNvPr id="4" name="Text 2"/>
+          <p:cNvSpPr/>
+          <p:nvPr/>
+        </p:nvSpPr>
+        <p:spPr>
+          <a:xfrm>
+            <a:off x="886968" y="5138928"/>
+            <a:ext cx="3758184" cy="786384"/>
+          </a:xfrm>
+          <a:prstGeom prst="rect">
+            <a:avLst/>
+          </a:prstGeom>
+          <a:noFill/>
+          <a:ln/>
+        </p:spPr>
+        <p:txBody>
+          <a:bodyPr wrap="square" lIns="0" tIns="0" rIns="0" bIns="0" rtlCol="0" anchor="ctr"/>
+          <a:lstStyle/>
+          <a:p>
+            <a:pPr indent="0" marL="0">
+              <a:lnSpc>
+                <a:spcPct val="100000"/>
+              </a:lnSpc>
+              <a:buNone/>
+            </a:pPr>
+            <a:r>
+              <a:rPr lang="en-US" sz="1250" b="1" dirty="0">
+                <a:solidFill>
+                  <a:srgbClr val="FFFFFF"/>
+                </a:solidFill>
+                <a:latin typeface="Arial" pitchFamily="34" charset="0"/>
+                <a:ea typeface="Arial" pitchFamily="34" charset="-122"/>
+                <a:cs typeface="Arial" pitchFamily="34" charset="-120"/>
+              </a:rPr>
+              <a:t>Arbitragem tarifária (Time Shifting)</a:t>
+            </a:r>
+            <a:endParaRPr lang="en-US" sz="1250" dirty="0"/>
+          </a:p>
+        </p:txBody>
+      </p:sp>
+      <p:sp>
+        <p:nvSpPr>
+          <p:cNvPr id="5" name="Shape 3"/>
+          <p:cNvSpPr/>
+          <p:nvPr/>
+        </p:nvSpPr>
+        <p:spPr>
+          <a:xfrm>
+            <a:off x="685800" y="4233672"/>
+            <a:ext cx="4160520" cy="786384"/>
+          </a:xfrm>
+          <a:prstGeom prst="roundRect">
+            <a:avLst>
+              <a:gd name="adj" fmla="val 6977"/>
+            </a:avLst>
+          </a:prstGeom>
+          <a:solidFill>
+            <a:srgbClr val="2E7DAF"/>
+          </a:solidFill>
+          <a:ln/>
+          <a:effectLst>
+            <a:outerShdw sx="100000" sy="100000" kx="0" ky="0" algn="bl" rotWithShape="0" blurRad="88900" dist="25400" dir="5400000">
+              <a:srgbClr val="9AAAB4">
+                <a:alpha val="35000"/>
+              </a:srgbClr>
+            </a:outerShdw>
+          </a:effectLst>
+        </p:spPr>
+      </p:sp>
+      <p:sp>
+        <p:nvSpPr>
+          <p:cNvPr id="6" name="Text 4"/>
+          <p:cNvSpPr/>
+          <p:nvPr/>
+        </p:nvSpPr>
+        <p:spPr>
+          <a:xfrm>
+            <a:off x="886968" y="4233672"/>
+            <a:ext cx="3758184" cy="786384"/>
+          </a:xfrm>
+          <a:prstGeom prst="rect">
+            <a:avLst/>
+          </a:prstGeom>
+          <a:noFill/>
+          <a:ln/>
+        </p:spPr>
+        <p:txBody>
+          <a:bodyPr wrap="square" lIns="0" tIns="0" rIns="0" bIns="0" rtlCol="0" anchor="ctr"/>
+          <a:lstStyle/>
+          <a:p>
+            <a:pPr indent="0" marL="0">
+              <a:lnSpc>
+                <a:spcPct val="100000"/>
+              </a:lnSpc>
+              <a:buNone/>
+            </a:pPr>
+            <a:r>
+              <a:rPr lang="en-US" sz="1250" b="1" dirty="0">
+                <a:solidFill>
+                  <a:srgbClr val="FFFFFF"/>
+                </a:solidFill>
+                <a:latin typeface="Arial" pitchFamily="34" charset="0"/>
+                <a:ea typeface="Arial" pitchFamily="34" charset="-122"/>
+                <a:cs typeface="Arial" pitchFamily="34" charset="-120"/>
+              </a:rPr>
+              <a:t>Peak Shaving (demanda contratada)</a:t>
+            </a:r>
+            <a:endParaRPr lang="en-US" sz="1250" dirty="0"/>
+          </a:p>
+        </p:txBody>
+      </p:sp>
+      <p:sp>
+        <p:nvSpPr>
+          <p:cNvPr id="7" name="Shape 5"/>
+          <p:cNvSpPr/>
+          <p:nvPr/>
+        </p:nvSpPr>
+        <p:spPr>
+          <a:xfrm>
+            <a:off x="685800" y="3328416"/>
+            <a:ext cx="4160520" cy="786384"/>
+          </a:xfrm>
+          <a:prstGeom prst="roundRect">
+            <a:avLst>
+              <a:gd name="adj" fmla="val 6977"/>
+            </a:avLst>
+          </a:prstGeom>
+          <a:solidFill>
+            <a:srgbClr val="7FB0CE"/>
+          </a:solidFill>
+          <a:ln/>
+          <a:effectLst>
+            <a:outerShdw sx="100000" sy="100000" kx="0" ky="0" algn="bl" rotWithShape="0" blurRad="88900" dist="25400" dir="5400000">
+              <a:srgbClr val="9AAAB4">
+                <a:alpha val="35000"/>
+              </a:srgbClr>
+            </a:outerShdw>
+          </a:effectLst>
+        </p:spPr>
+      </p:sp>
+      <p:sp>
+        <p:nvSpPr>
+          <p:cNvPr id="8" name="Text 6"/>
+          <p:cNvSpPr/>
+          <p:nvPr/>
+        </p:nvSpPr>
+        <p:spPr>
+          <a:xfrm>
+            <a:off x="886968" y="3328416"/>
+            <a:ext cx="3758184" cy="786384"/>
+          </a:xfrm>
+          <a:prstGeom prst="rect">
+            <a:avLst/>
+          </a:prstGeom>
+          <a:noFill/>
+          <a:ln/>
+        </p:spPr>
+        <p:txBody>
+          <a:bodyPr wrap="square" lIns="0" tIns="0" rIns="0" bIns="0" rtlCol="0" anchor="ctr"/>
+          <a:lstStyle/>
+          <a:p>
+            <a:pPr indent="0" marL="0">
+              <a:lnSpc>
+                <a:spcPct val="100000"/>
+              </a:lnSpc>
+              <a:buNone/>
+            </a:pPr>
+            <a:r>
+              <a:rPr lang="en-US" sz="1250" b="1" dirty="0">
+                <a:solidFill>
+                  <a:srgbClr val="102A3C"/>
+                </a:solidFill>
+                <a:latin typeface="Arial" pitchFamily="34" charset="0"/>
+                <a:ea typeface="Arial" pitchFamily="34" charset="-122"/>
+                <a:cs typeface="Arial" pitchFamily="34" charset="-120"/>
+              </a:rPr>
+              <a:t>Anti-curtailment (excedente FV)</a:t>
+            </a:r>
+            <a:endParaRPr lang="en-US" sz="1250" dirty="0"/>
+          </a:p>
+        </p:txBody>
+      </p:sp>
+      <p:sp>
+        <p:nvSpPr>
+          <p:cNvPr id="9" name="Shape 7"/>
+          <p:cNvSpPr/>
+          <p:nvPr/>
+        </p:nvSpPr>
+        <p:spPr>
+          <a:xfrm>
+            <a:off x="685800" y="2423160"/>
+            <a:ext cx="4160520" cy="786384"/>
+          </a:xfrm>
+          <a:prstGeom prst="roundRect">
+            <a:avLst>
+              <a:gd name="adj" fmla="val 6977"/>
+            </a:avLst>
+          </a:prstGeom>
+          <a:solidFill>
+            <a:srgbClr val="F2B705"/>
+          </a:solidFill>
+          <a:ln/>
+          <a:effectLst>
+            <a:outerShdw sx="100000" sy="100000" kx="0" ky="0" algn="bl" rotWithShape="0" blurRad="88900" dist="25400" dir="5400000">
+              <a:srgbClr val="9AAAB4">
+                <a:alpha val="35000"/>
+              </a:srgbClr>
+            </a:outerShdw>
+          </a:effectLst>
+        </p:spPr>
+      </p:sp>
+      <p:sp>
+        <p:nvSpPr>
+          <p:cNvPr id="10" name="Text 8"/>
+          <p:cNvSpPr/>
+          <p:nvPr/>
+        </p:nvSpPr>
+        <p:spPr>
+          <a:xfrm>
+            <a:off x="886968" y="2423160"/>
+            <a:ext cx="3758184" cy="786384"/>
+          </a:xfrm>
+          <a:prstGeom prst="rect">
+            <a:avLst/>
+          </a:prstGeom>
+          <a:noFill/>
+          <a:ln/>
+        </p:spPr>
+        <p:txBody>
+          <a:bodyPr wrap="square" lIns="0" tIns="0" rIns="0" bIns="0" rtlCol="0" anchor="ctr"/>
+          <a:lstStyle/>
+          <a:p>
+            <a:pPr indent="0" marL="0">
+              <a:lnSpc>
+                <a:spcPct val="100000"/>
+              </a:lnSpc>
+              <a:buNone/>
+            </a:pPr>
+            <a:r>
+              <a:rPr lang="en-US" sz="1250" b="1" dirty="0">
+                <a:solidFill>
+                  <a:srgbClr val="102A3C"/>
+                </a:solidFill>
+                <a:latin typeface="Arial" pitchFamily="34" charset="0"/>
+                <a:ea typeface="Arial" pitchFamily="34" charset="-122"/>
+                <a:cs typeface="Arial" pitchFamily="34" charset="-120"/>
+              </a:rPr>
+              <a:t>Créditos de GD / Geração Compartilhada</a:t>
+            </a:r>
+            <a:endParaRPr lang="en-US" sz="1250" dirty="0"/>
+          </a:p>
+        </p:txBody>
+      </p:sp>
+      <p:sp>
+        <p:nvSpPr>
+          <p:cNvPr id="11" name="Shape 9"/>
+          <p:cNvSpPr/>
+          <p:nvPr/>
+        </p:nvSpPr>
+        <p:spPr>
+          <a:xfrm>
+            <a:off x="5010912" y="2423160"/>
+            <a:ext cx="384048" cy="3502152"/>
+          </a:xfrm>
+          <a:prstGeom prst="upArrow">
+            <a:avLst/>
+          </a:prstGeom>
+          <a:solidFill>
+            <a:srgbClr val="EAF1F6"/>
           </a:solidFill>
           <a:ln w="9525">
             <a:solidFill>
@@ -8657,28 +9808,101 @@
             </a:solidFill>
             <a:prstDash val="solid"/>
           </a:ln>
-          <a:effectLst>
-            <a:outerShdw sx="100000" sy="100000" kx="0" ky="0" algn="bl" rotWithShape="0" blurRad="88900" dist="25400" dir="5400000">
-              <a:srgbClr val="9AAAB4">
-                <a:alpha val="35000"/>
-              </a:srgbClr>
-            </a:outerShdw>
-          </a:effectLst>
-        </p:spPr>
-      </p:sp>
-      <p:sp>
-        <p:nvSpPr>
-          <p:cNvPr id="5" name="Shape 3"/>
-          <p:cNvSpPr/>
-          <p:nvPr/>
-        </p:nvSpPr>
-        <p:spPr>
-          <a:xfrm>
-            <a:off x="868680" y="1938528"/>
-            <a:ext cx="566928" cy="566928"/>
-          </a:xfrm>
-          <a:prstGeom prst="ellipse">
-            <a:avLst/>
+        </p:spPr>
+      </p:sp>
+      <p:sp>
+        <p:nvSpPr>
+          <p:cNvPr id="12" name="Text 10"/>
+          <p:cNvSpPr/>
+          <p:nvPr/>
+        </p:nvSpPr>
+        <p:spPr>
+          <a:xfrm>
+            <a:off x="685800" y="1536192"/>
+            <a:ext cx="4160520" cy="292608"/>
+          </a:xfrm>
+          <a:prstGeom prst="rect">
+            <a:avLst/>
+          </a:prstGeom>
+          <a:noFill/>
+          <a:ln/>
+        </p:spPr>
+        <p:txBody>
+          <a:bodyPr wrap="square" lIns="0" tIns="0" rIns="0" bIns="0" rtlCol="0" anchor="ctr"/>
+          <a:lstStyle/>
+          <a:p>
+            <a:pPr indent="0" marL="0">
+              <a:buNone/>
+            </a:pPr>
+            <a:r>
+              <a:rPr lang="en-US" sz="1050" b="1" spc="200" kern="0" dirty="0">
+                <a:solidFill>
+                  <a:srgbClr val="B78A00"/>
+                </a:solidFill>
+                <a:latin typeface="Arial" pitchFamily="34" charset="0"/>
+                <a:ea typeface="Arial" pitchFamily="34" charset="-122"/>
+                <a:cs typeface="Arial" pitchFamily="34" charset="-120"/>
+              </a:rPr>
+              <a:t>RECEITA ANUAL EMPILHADA</a:t>
+            </a:r>
+            <a:endParaRPr lang="en-US" sz="1050" dirty="0"/>
+          </a:p>
+        </p:txBody>
+      </p:sp>
+      <p:sp>
+        <p:nvSpPr>
+          <p:cNvPr id="13" name="Text 11"/>
+          <p:cNvSpPr/>
+          <p:nvPr/>
+        </p:nvSpPr>
+        <p:spPr>
+          <a:xfrm>
+            <a:off x="5623560" y="1536192"/>
+            <a:ext cx="5989320" cy="411480"/>
+          </a:xfrm>
+          <a:prstGeom prst="rect">
+            <a:avLst/>
+          </a:prstGeom>
+          <a:noFill/>
+          <a:ln/>
+        </p:spPr>
+        <p:txBody>
+          <a:bodyPr wrap="square" lIns="0" tIns="0" rIns="0" bIns="0" rtlCol="0" anchor="ctr"/>
+          <a:lstStyle/>
+          <a:p>
+            <a:pPr indent="0" marL="0">
+              <a:buNone/>
+            </a:pPr>
+            <a:r>
+              <a:rPr lang="en-US" sz="1700" b="1" dirty="0">
+                <a:solidFill>
+                  <a:srgbClr val="16303F"/>
+                </a:solidFill>
+                <a:latin typeface="Arial" pitchFamily="34" charset="0"/>
+                <a:ea typeface="Arial" pitchFamily="34" charset="-122"/>
+                <a:cs typeface="Arial" pitchFamily="34" charset="-120"/>
+              </a:rPr>
+              <a:t>Um único ativo, quatro receitas simultâneas</a:t>
+            </a:r>
+            <a:endParaRPr lang="en-US" sz="1700" dirty="0"/>
+          </a:p>
+        </p:txBody>
+      </p:sp>
+      <p:sp>
+        <p:nvSpPr>
+          <p:cNvPr id="14" name="Shape 12"/>
+          <p:cNvSpPr/>
+          <p:nvPr/>
+        </p:nvSpPr>
+        <p:spPr>
+          <a:xfrm>
+            <a:off x="5623560" y="2139696"/>
+            <a:ext cx="237744" cy="237744"/>
+          </a:xfrm>
+          <a:prstGeom prst="roundRect">
+            <a:avLst>
+              <a:gd name="adj" fmla="val 15385"/>
+            </a:avLst>
           </a:prstGeom>
           <a:solidFill>
             <a:srgbClr val="F2B705"/>
@@ -8686,141 +9910,55 @@
           <a:ln/>
         </p:spPr>
       </p:sp>
-      <p:pic>
-        <p:nvPicPr>
-          <p:cNvPr id="6" name="Image 0" descr="preencoded.png">    </p:cNvPr>
-          <p:cNvPicPr>
-            <a:picLocks noChangeAspect="1"/>
-          </p:cNvPicPr>
-          <p:nvPr/>
-        </p:nvPicPr>
-        <p:blipFill>
-          <a:blip r:embed="rId1"/>
-          <a:stretch>
-            <a:fillRect/>
-          </a:stretch>
-        </p:blipFill>
-        <p:spPr>
-          <a:xfrm>
-            <a:off x="993404" y="2063252"/>
-            <a:ext cx="317480" cy="317480"/>
-          </a:xfrm>
-          <a:prstGeom prst="rect">
-            <a:avLst/>
-          </a:prstGeom>
-        </p:spPr>
-      </p:pic>
-      <p:sp>
-        <p:nvSpPr>
-          <p:cNvPr id="7" name="Text 4"/>
-          <p:cNvSpPr/>
-          <p:nvPr/>
-        </p:nvSpPr>
-        <p:spPr>
-          <a:xfrm>
-            <a:off x="1600200" y="1956816"/>
-            <a:ext cx="4069080" cy="274320"/>
-          </a:xfrm>
-          <a:prstGeom prst="rect">
-            <a:avLst/>
-          </a:prstGeom>
-          <a:noFill/>
-          <a:ln/>
-        </p:spPr>
-        <p:txBody>
-          <a:bodyPr wrap="square" lIns="0" tIns="0" rIns="0" bIns="0" rtlCol="0" anchor="ctr"/>
+      <p:sp>
+        <p:nvSpPr>
+          <p:cNvPr id="15" name="Text 13"/>
+          <p:cNvSpPr/>
+          <p:nvPr/>
+        </p:nvSpPr>
+        <p:spPr>
+          <a:xfrm>
+            <a:off x="6025896" y="2084832"/>
+            <a:ext cx="5586984" cy="914400"/>
+          </a:xfrm>
+          <a:prstGeom prst="rect">
+            <a:avLst/>
+          </a:prstGeom>
+          <a:noFill/>
+          <a:ln/>
+        </p:spPr>
+        <p:txBody>
+          <a:bodyPr wrap="square" lIns="0" tIns="0" rIns="0" bIns="0" rtlCol="0" anchor="t"/>
           <a:lstStyle/>
           <a:p>
             <a:pPr indent="0" marL="0">
-              <a:buNone/>
-            </a:pPr>
-            <a:r>
-              <a:rPr lang="en-US" sz="950" b="1" spc="200" kern="0" dirty="0">
-                <a:solidFill>
-                  <a:srgbClr val="B78A00"/>
-                </a:solidFill>
-                <a:latin typeface="Arial" pitchFamily="34" charset="0"/>
-                <a:ea typeface="Arial" pitchFamily="34" charset="-122"/>
-                <a:cs typeface="Arial" pitchFamily="34" charset="-120"/>
-              </a:rPr>
-              <a:t>VIABILIDADE DE NEGÓCIOS</a:t>
-            </a:r>
-            <a:endParaRPr lang="en-US" sz="950" dirty="0"/>
-          </a:p>
-        </p:txBody>
-      </p:sp>
-      <p:sp>
-        <p:nvSpPr>
-          <p:cNvPr id="8" name="Text 5"/>
-          <p:cNvSpPr/>
-          <p:nvPr/>
-        </p:nvSpPr>
-        <p:spPr>
-          <a:xfrm>
-            <a:off x="1600200" y="2194560"/>
-            <a:ext cx="4114800" cy="731520"/>
-          </a:xfrm>
-          <a:prstGeom prst="rect">
-            <a:avLst/>
-          </a:prstGeom>
-          <a:noFill/>
-          <a:ln/>
-        </p:spPr>
-        <p:txBody>
-          <a:bodyPr wrap="square" lIns="0" tIns="0" rIns="0" bIns="0" rtlCol="0" anchor="t"/>
-          <a:lstStyle/>
+              <a:lnSpc>
+                <a:spcPct val="108000"/>
+              </a:lnSpc>
+              <a:buNone/>
+            </a:pPr>
+            <a:r>
+              <a:rPr lang="en-US" sz="1300" b="1" dirty="0">
+                <a:solidFill>
+                  <a:srgbClr val="16303F"/>
+                </a:solidFill>
+                <a:latin typeface="Arial" pitchFamily="34" charset="0"/>
+                <a:ea typeface="Arial" pitchFamily="34" charset="-122"/>
+                <a:cs typeface="Arial" pitchFamily="34" charset="-120"/>
+              </a:rPr>
+              <a:t>Créditos de GD / Geração Compartilhada</a:t>
+            </a:r>
+            <a:endParaRPr lang="en-US" sz="1300" dirty="0"/>
+          </a:p>
           <a:p>
             <a:pPr indent="0" marL="0">
-              <a:buNone/>
-            </a:pPr>
-            <a:r>
-              <a:rPr lang="en-US" sz="1650" b="1" dirty="0">
-                <a:solidFill>
-                  <a:srgbClr val="16303F"/>
-                </a:solidFill>
-                <a:latin typeface="Arial" pitchFamily="34" charset="0"/>
-                <a:ea typeface="Arial" pitchFamily="34" charset="-122"/>
-                <a:cs typeface="Arial" pitchFamily="34" charset="-120"/>
-              </a:rPr>
-              <a:t>O Marco Legal — Lei nº 14.300/2022</a:t>
-            </a:r>
-            <a:endParaRPr lang="en-US" sz="1650" dirty="0"/>
-          </a:p>
-        </p:txBody>
-      </p:sp>
-      <p:sp>
-        <p:nvSpPr>
-          <p:cNvPr id="9" name="Text 6"/>
-          <p:cNvSpPr/>
-          <p:nvPr/>
-        </p:nvSpPr>
-        <p:spPr>
-          <a:xfrm>
-            <a:off x="914400" y="3154680"/>
-            <a:ext cx="4709160" cy="2606040"/>
-          </a:xfrm>
-          <a:prstGeom prst="rect">
-            <a:avLst/>
-          </a:prstGeom>
-          <a:noFill/>
-          <a:ln/>
-        </p:spPr>
-        <p:txBody>
-          <a:bodyPr wrap="square" lIns="0" tIns="0" rIns="0" bIns="0" rtlCol="0" anchor="t"/>
-          <a:lstStyle/>
-          <a:p>
-            <a:pPr marL="152400" indent="-152400">
               <a:lnSpc>
-                <a:spcPct val="110000"/>
+                <a:spcPct val="108000"/>
               </a:lnSpc>
-              <a:spcAft>
-                <a:spcPts val="1000"/>
-              </a:spcAft>
-              <a:buSzPct val="100000"/>
-              <a:buChar char="•"/>
-            </a:pPr>
-            <a:r>
-              <a:rPr lang="en-US" sz="1250" dirty="0">
+              <a:buNone/>
+            </a:pPr>
+            <a:r>
+              <a:rPr lang="en-US" sz="1150" dirty="0">
                 <a:solidFill>
                   <a:srgbClr val="3E4E59"/>
                 </a:solidFill>
@@ -8828,148 +9966,296 @@
                 <a:ea typeface="Arial" pitchFamily="34" charset="-122"/>
                 <a:cs typeface="Arial" pitchFamily="34" charset="-120"/>
               </a:rPr>
-              <a:t>Instituiu a Geração Compartilhada no âmbito da Geração Distribuída.</a:t>
-            </a:r>
-            <a:endParaRPr lang="en-US" sz="1250" dirty="0"/>
-          </a:p>
-          <a:p>
-            <a:pPr marL="152400" indent="-152400">
-              <a:lnSpc>
-                <a:spcPct val="110000"/>
-              </a:lnSpc>
-              <a:spcAft>
-                <a:spcPts val="1000"/>
-              </a:spcAft>
-              <a:buSzPct val="100000"/>
-              <a:buChar char="•"/>
-            </a:pPr>
-            <a:r>
-              <a:rPr lang="en-US" sz="1250" dirty="0">
-                <a:solidFill>
-                  <a:srgbClr val="3E4E59"/>
-                </a:solidFill>
-                <a:latin typeface="Arial" pitchFamily="34" charset="0"/>
-                <a:ea typeface="Arial" pitchFamily="34" charset="-122"/>
-                <a:cs typeface="Arial" pitchFamily="34" charset="-120"/>
-              </a:rPr>
-              <a:t>Permite a união de interessados via consórcio, cooperativa ou associação — arranjo natural para cooperativas e associações de produtores rurais — para compartilhar créditos de uma UFV de até 3 MW.</a:t>
-            </a:r>
-            <a:endParaRPr lang="en-US" sz="1250" dirty="0"/>
-          </a:p>
-          <a:p>
-            <a:pPr marL="152400" indent="-152400">
-              <a:lnSpc>
-                <a:spcPct val="110000"/>
-              </a:lnSpc>
-              <a:spcAft>
-                <a:spcPts val="1000"/>
-              </a:spcAft>
-              <a:buSzPct val="100000"/>
-              <a:buChar char="•"/>
-            </a:pPr>
-            <a:r>
-              <a:rPr lang="en-US" sz="1250" dirty="0">
-                <a:solidFill>
-                  <a:srgbClr val="3E4E59"/>
-                </a:solidFill>
-                <a:latin typeface="Arial" pitchFamily="34" charset="0"/>
-                <a:ea typeface="Arial" pitchFamily="34" charset="-122"/>
-                <a:cs typeface="Arial" pitchFamily="34" charset="-120"/>
-              </a:rPr>
-              <a:t>O BESS atua como otimizador dessa injeção, maximizando o valor de cada crédito gerado.</a:t>
-            </a:r>
-            <a:endParaRPr lang="en-US" sz="1250" dirty="0"/>
-          </a:p>
-        </p:txBody>
-      </p:sp>
-      <p:sp>
-        <p:nvSpPr>
-          <p:cNvPr id="10" name="Shape 7"/>
-          <p:cNvSpPr/>
-          <p:nvPr/>
-        </p:nvSpPr>
-        <p:spPr>
-          <a:xfrm>
-            <a:off x="6245352" y="1645920"/>
-            <a:ext cx="5440680" cy="4389120"/>
+              <a:t>O excedente injetado vira crédito na Energisa-MT e receita de cotas para a SPE.</a:t>
+            </a:r>
+            <a:endParaRPr lang="en-US" sz="1300" dirty="0"/>
+          </a:p>
+        </p:txBody>
+      </p:sp>
+      <p:sp>
+        <p:nvSpPr>
+          <p:cNvPr id="16" name="Shape 14"/>
+          <p:cNvSpPr/>
+          <p:nvPr/>
+        </p:nvSpPr>
+        <p:spPr>
+          <a:xfrm>
+            <a:off x="5623560" y="3108960"/>
+            <a:ext cx="237744" cy="237744"/>
           </a:xfrm>
           <a:prstGeom prst="roundRect">
             <a:avLst>
-              <a:gd name="adj" fmla="val 1875"/>
+              <a:gd name="adj" fmla="val 15385"/>
             </a:avLst>
           </a:prstGeom>
           <a:solidFill>
-            <a:srgbClr val="F5F8FA"/>
+            <a:srgbClr val="7FB0CE"/>
           </a:solidFill>
-          <a:ln w="9525">
-            <a:solidFill>
-              <a:srgbClr val="D9E2E8"/>
-            </a:solidFill>
-            <a:prstDash val="solid"/>
-          </a:ln>
-          <a:effectLst>
-            <a:outerShdw sx="100000" sy="100000" kx="0" ky="0" algn="bl" rotWithShape="0" blurRad="88900" dist="25400" dir="5400000">
-              <a:srgbClr val="9AAAB4">
-                <a:alpha val="35000"/>
-              </a:srgbClr>
-            </a:outerShdw>
-          </a:effectLst>
-        </p:spPr>
-      </p:sp>
-      <p:sp>
-        <p:nvSpPr>
-          <p:cNvPr id="11" name="Shape 8"/>
-          <p:cNvSpPr/>
-          <p:nvPr/>
-        </p:nvSpPr>
-        <p:spPr>
-          <a:xfrm>
-            <a:off x="6565392" y="1938528"/>
-            <a:ext cx="566928" cy="566928"/>
-          </a:xfrm>
-          <a:prstGeom prst="ellipse">
-            <a:avLst/>
+          <a:ln/>
+        </p:spPr>
+      </p:sp>
+      <p:sp>
+        <p:nvSpPr>
+          <p:cNvPr id="17" name="Text 15"/>
+          <p:cNvSpPr/>
+          <p:nvPr/>
+        </p:nvSpPr>
+        <p:spPr>
+          <a:xfrm>
+            <a:off x="6025896" y="3054096"/>
+            <a:ext cx="5586984" cy="914400"/>
+          </a:xfrm>
+          <a:prstGeom prst="rect">
+            <a:avLst/>
+          </a:prstGeom>
+          <a:noFill/>
+          <a:ln/>
+        </p:spPr>
+        <p:txBody>
+          <a:bodyPr wrap="square" lIns="0" tIns="0" rIns="0" bIns="0" rtlCol="0" anchor="t"/>
+          <a:lstStyle/>
+          <a:p>
+            <a:pPr indent="0" marL="0">
+              <a:lnSpc>
+                <a:spcPct val="108000"/>
+              </a:lnSpc>
+              <a:buNone/>
+            </a:pPr>
+            <a:r>
+              <a:rPr lang="en-US" sz="1300" b="1" dirty="0">
+                <a:solidFill>
+                  <a:srgbClr val="16303F"/>
+                </a:solidFill>
+                <a:latin typeface="Arial" pitchFamily="34" charset="0"/>
+                <a:ea typeface="Arial" pitchFamily="34" charset="-122"/>
+                <a:cs typeface="Arial" pitchFamily="34" charset="-120"/>
+              </a:rPr>
+              <a:t>Anti-curtailment</a:t>
+            </a:r>
+            <a:endParaRPr lang="en-US" sz="1300" dirty="0"/>
+          </a:p>
+          <a:p>
+            <a:pPr indent="0" marL="0">
+              <a:lnSpc>
+                <a:spcPct val="108000"/>
+              </a:lnSpc>
+              <a:buNone/>
+            </a:pPr>
+            <a:r>
+              <a:rPr lang="en-US" sz="1150" dirty="0">
+                <a:solidFill>
+                  <a:srgbClr val="3E4E59"/>
+                </a:solidFill>
+                <a:latin typeface="Arial" pitchFamily="34" charset="0"/>
+                <a:ea typeface="Arial" pitchFamily="34" charset="-122"/>
+                <a:cs typeface="Arial" pitchFamily="34" charset="-120"/>
+              </a:rPr>
+              <a:t>O que a rede não escoa deixa de ser perda: o BESS captura o excedente solar do meio-dia.</a:t>
+            </a:r>
+            <a:endParaRPr lang="en-US" sz="1300" dirty="0"/>
+          </a:p>
+        </p:txBody>
+      </p:sp>
+      <p:sp>
+        <p:nvSpPr>
+          <p:cNvPr id="18" name="Shape 16"/>
+          <p:cNvSpPr/>
+          <p:nvPr/>
+        </p:nvSpPr>
+        <p:spPr>
+          <a:xfrm>
+            <a:off x="5623560" y="4078224"/>
+            <a:ext cx="237744" cy="237744"/>
+          </a:xfrm>
+          <a:prstGeom prst="roundRect">
+            <a:avLst>
+              <a:gd name="adj" fmla="val 15385"/>
+            </a:avLst>
           </a:prstGeom>
           <a:solidFill>
-            <a:srgbClr val="F2B705"/>
+            <a:srgbClr val="2E7DAF"/>
           </a:solidFill>
           <a:ln/>
         </p:spPr>
       </p:sp>
-      <p:pic>
-        <p:nvPicPr>
-          <p:cNvPr id="12" name="Image 1" descr="preencoded.png">    </p:cNvPr>
-          <p:cNvPicPr>
-            <a:picLocks noChangeAspect="1"/>
-          </p:cNvPicPr>
-          <p:nvPr/>
-        </p:nvPicPr>
-        <p:blipFill>
-          <a:blip r:embed="rId2"/>
-          <a:stretch>
-            <a:fillRect/>
-          </a:stretch>
-        </p:blipFill>
-        <p:spPr>
-          <a:xfrm>
-            <a:off x="6690116" y="2063252"/>
-            <a:ext cx="317480" cy="317480"/>
-          </a:xfrm>
-          <a:prstGeom prst="rect">
-            <a:avLst/>
-          </a:prstGeom>
-        </p:spPr>
-      </p:pic>
-      <p:sp>
-        <p:nvSpPr>
-          <p:cNvPr id="13" name="Text 9"/>
-          <p:cNvSpPr/>
-          <p:nvPr/>
-        </p:nvSpPr>
-        <p:spPr>
-          <a:xfrm>
-            <a:off x="7296912" y="1956816"/>
-            <a:ext cx="4069080" cy="274320"/>
+      <p:sp>
+        <p:nvSpPr>
+          <p:cNvPr id="19" name="Text 17"/>
+          <p:cNvSpPr/>
+          <p:nvPr/>
+        </p:nvSpPr>
+        <p:spPr>
+          <a:xfrm>
+            <a:off x="6025896" y="4023360"/>
+            <a:ext cx="5586984" cy="914400"/>
+          </a:xfrm>
+          <a:prstGeom prst="rect">
+            <a:avLst/>
+          </a:prstGeom>
+          <a:noFill/>
+          <a:ln/>
+        </p:spPr>
+        <p:txBody>
+          <a:bodyPr wrap="square" lIns="0" tIns="0" rIns="0" bIns="0" rtlCol="0" anchor="t"/>
+          <a:lstStyle/>
+          <a:p>
+            <a:pPr indent="0" marL="0">
+              <a:lnSpc>
+                <a:spcPct val="108000"/>
+              </a:lnSpc>
+              <a:buNone/>
+            </a:pPr>
+            <a:r>
+              <a:rPr lang="en-US" sz="1300" b="1" dirty="0">
+                <a:solidFill>
+                  <a:srgbClr val="16303F"/>
+                </a:solidFill>
+                <a:latin typeface="Arial" pitchFamily="34" charset="0"/>
+                <a:ea typeface="Arial" pitchFamily="34" charset="-122"/>
+                <a:cs typeface="Arial" pitchFamily="34" charset="-120"/>
+              </a:rPr>
+              <a:t>Peak Shaving</a:t>
+            </a:r>
+            <a:endParaRPr lang="en-US" sz="1300" dirty="0"/>
+          </a:p>
+          <a:p>
+            <a:pPr indent="0" marL="0">
+              <a:lnSpc>
+                <a:spcPct val="108000"/>
+              </a:lnSpc>
+              <a:buNone/>
+            </a:pPr>
+            <a:r>
+              <a:rPr lang="en-US" sz="1150" dirty="0">
+                <a:solidFill>
+                  <a:srgbClr val="3E4E59"/>
+                </a:solidFill>
+                <a:latin typeface="Arial" pitchFamily="34" charset="0"/>
+                <a:ea typeface="Arial" pitchFamily="34" charset="-122"/>
+                <a:cs typeface="Arial" pitchFamily="34" charset="-120"/>
+              </a:rPr>
+              <a:t>Corte dos picos de demanda: contrato de demanda menor e fim das multas de ultrapassagem.</a:t>
+            </a:r>
+            <a:endParaRPr lang="en-US" sz="1300" dirty="0"/>
+          </a:p>
+        </p:txBody>
+      </p:sp>
+      <p:sp>
+        <p:nvSpPr>
+          <p:cNvPr id="20" name="Shape 18"/>
+          <p:cNvSpPr/>
+          <p:nvPr/>
+        </p:nvSpPr>
+        <p:spPr>
+          <a:xfrm>
+            <a:off x="5623560" y="5047488"/>
+            <a:ext cx="237744" cy="237744"/>
+          </a:xfrm>
+          <a:prstGeom prst="roundRect">
+            <a:avLst>
+              <a:gd name="adj" fmla="val 15385"/>
+            </a:avLst>
+          </a:prstGeom>
+          <a:solidFill>
+            <a:srgbClr val="31485A"/>
+          </a:solidFill>
+          <a:ln/>
+        </p:spPr>
+      </p:sp>
+      <p:sp>
+        <p:nvSpPr>
+          <p:cNvPr id="21" name="Text 19"/>
+          <p:cNvSpPr/>
+          <p:nvPr/>
+        </p:nvSpPr>
+        <p:spPr>
+          <a:xfrm>
+            <a:off x="6025896" y="4992624"/>
+            <a:ext cx="5586984" cy="914400"/>
+          </a:xfrm>
+          <a:prstGeom prst="rect">
+            <a:avLst/>
+          </a:prstGeom>
+          <a:noFill/>
+          <a:ln/>
+        </p:spPr>
+        <p:txBody>
+          <a:bodyPr wrap="square" lIns="0" tIns="0" rIns="0" bIns="0" rtlCol="0" anchor="t"/>
+          <a:lstStyle/>
+          <a:p>
+            <a:pPr indent="0" marL="0">
+              <a:lnSpc>
+                <a:spcPct val="108000"/>
+              </a:lnSpc>
+              <a:buNone/>
+            </a:pPr>
+            <a:r>
+              <a:rPr lang="en-US" sz="1300" b="1" dirty="0">
+                <a:solidFill>
+                  <a:srgbClr val="16303F"/>
+                </a:solidFill>
+                <a:latin typeface="Arial" pitchFamily="34" charset="0"/>
+                <a:ea typeface="Arial" pitchFamily="34" charset="-122"/>
+                <a:cs typeface="Arial" pitchFamily="34" charset="-120"/>
+              </a:rPr>
+              <a:t>Arbitragem tarifária</a:t>
+            </a:r>
+            <a:endParaRPr lang="en-US" sz="1300" dirty="0"/>
+          </a:p>
+          <a:p>
+            <a:pPr indent="0" marL="0">
+              <a:lnSpc>
+                <a:spcPct val="108000"/>
+              </a:lnSpc>
+              <a:buNone/>
+            </a:pPr>
+            <a:r>
+              <a:rPr lang="en-US" sz="1150" dirty="0">
+                <a:solidFill>
+                  <a:srgbClr val="3E4E59"/>
+                </a:solidFill>
+                <a:latin typeface="Arial" pitchFamily="34" charset="0"/>
+                <a:ea typeface="Arial" pitchFamily="34" charset="-122"/>
+                <a:cs typeface="Arial" pitchFamily="34" charset="-120"/>
+              </a:rPr>
+              <a:t>A base do modelo: carregar no vazio (e no horário do irrigante) e usar na ponta cara.</a:t>
+            </a:r>
+            <a:endParaRPr lang="en-US" sz="1300" dirty="0"/>
+          </a:p>
+        </p:txBody>
+      </p:sp>
+      <p:sp>
+        <p:nvSpPr>
+          <p:cNvPr id="22" name="Shape 20"/>
+          <p:cNvSpPr/>
+          <p:nvPr/>
+        </p:nvSpPr>
+        <p:spPr>
+          <a:xfrm>
+            <a:off x="548640" y="5998464"/>
+            <a:ext cx="11091672" cy="420624"/>
+          </a:xfrm>
+          <a:prstGeom prst="roundRect">
+            <a:avLst>
+              <a:gd name="adj" fmla="val 17391"/>
+            </a:avLst>
+          </a:prstGeom>
+          <a:solidFill>
+            <a:srgbClr val="EAF1F6"/>
+          </a:solidFill>
+          <a:ln/>
+        </p:spPr>
+      </p:sp>
+      <p:sp>
+        <p:nvSpPr>
+          <p:cNvPr id="23" name="Text 21"/>
+          <p:cNvSpPr/>
+          <p:nvPr/>
+        </p:nvSpPr>
+        <p:spPr>
+          <a:xfrm>
+            <a:off x="777240" y="5998464"/>
+            <a:ext cx="10698480" cy="420624"/>
           </a:xfrm>
           <a:prstGeom prst="rect">
             <a:avLst/>
@@ -8985,92 +10271,21 @@
               <a:buNone/>
             </a:pPr>
             <a:r>
-              <a:rPr lang="en-US" sz="950" b="1" spc="200" kern="0" dirty="0">
-                <a:solidFill>
-                  <a:srgbClr val="B78A00"/>
-                </a:solidFill>
-                <a:latin typeface="Arial" pitchFamily="34" charset="0"/>
-                <a:ea typeface="Arial" pitchFamily="34" charset="-122"/>
-                <a:cs typeface="Arial" pitchFamily="34" charset="-120"/>
-              </a:rPr>
-              <a:t>VIABILIDADE DE ENGENHARIA</a:t>
-            </a:r>
-            <a:endParaRPr lang="en-US" sz="950" dirty="0"/>
-          </a:p>
-        </p:txBody>
-      </p:sp>
-      <p:sp>
-        <p:nvSpPr>
-          <p:cNvPr id="14" name="Text 10"/>
-          <p:cNvSpPr/>
-          <p:nvPr/>
-        </p:nvSpPr>
-        <p:spPr>
-          <a:xfrm>
-            <a:off x="7296912" y="2194560"/>
-            <a:ext cx="4114800" cy="731520"/>
-          </a:xfrm>
-          <a:prstGeom prst="rect">
-            <a:avLst/>
-          </a:prstGeom>
-          <a:noFill/>
-          <a:ln/>
-        </p:spPr>
-        <p:txBody>
-          <a:bodyPr wrap="square" lIns="0" tIns="0" rIns="0" bIns="0" rtlCol="0" anchor="t"/>
-          <a:lstStyle/>
-          <a:p>
+              <a:rPr lang="en-US" sz="1150" b="1" dirty="0">
+                <a:solidFill>
+                  <a:srgbClr val="16303F"/>
+                </a:solidFill>
+                <a:latin typeface="Arial" pitchFamily="34" charset="0"/>
+                <a:ea typeface="Arial" pitchFamily="34" charset="-122"/>
+                <a:cs typeface="Arial" pitchFamily="34" charset="-120"/>
+              </a:rPr>
+              <a:t>O segredo do retorno:  </a:t>
+            </a:r>
             <a:pPr indent="0" marL="0">
               <a:buNone/>
             </a:pPr>
             <a:r>
-              <a:rPr lang="en-US" sz="1650" b="1" dirty="0">
-                <a:solidFill>
-                  <a:srgbClr val="16303F"/>
-                </a:solidFill>
-                <a:latin typeface="Arial" pitchFamily="34" charset="0"/>
-                <a:ea typeface="Arial" pitchFamily="34" charset="-122"/>
-                <a:cs typeface="Arial" pitchFamily="34" charset="-120"/>
-              </a:rPr>
-              <a:t>A Norma Técnica — ABNT NBR 17153</a:t>
-            </a:r>
-            <a:endParaRPr lang="en-US" sz="1650" dirty="0"/>
-          </a:p>
-        </p:txBody>
-      </p:sp>
-      <p:sp>
-        <p:nvSpPr>
-          <p:cNvPr id="15" name="Text 11"/>
-          <p:cNvSpPr/>
-          <p:nvPr/>
-        </p:nvSpPr>
-        <p:spPr>
-          <a:xfrm>
-            <a:off x="6611112" y="3154680"/>
-            <a:ext cx="4709160" cy="2606040"/>
-          </a:xfrm>
-          <a:prstGeom prst="rect">
-            <a:avLst/>
-          </a:prstGeom>
-          <a:noFill/>
-          <a:ln/>
-        </p:spPr>
-        <p:txBody>
-          <a:bodyPr wrap="square" lIns="0" tIns="0" rIns="0" bIns="0" rtlCol="0" anchor="t"/>
-          <a:lstStyle/>
-          <a:p>
-            <a:pPr marL="152400" indent="-152400">
-              <a:lnSpc>
-                <a:spcPct val="110000"/>
-              </a:lnSpc>
-              <a:spcAft>
-                <a:spcPts val="1000"/>
-              </a:spcAft>
-              <a:buSzPct val="100000"/>
-              <a:buChar char="•"/>
-            </a:pPr>
-            <a:r>
-              <a:rPr lang="en-US" sz="1250" dirty="0">
+              <a:rPr lang="en-US" sz="1150" dirty="0">
                 <a:solidFill>
                   <a:srgbClr val="3E4E59"/>
                 </a:solidFill>
@@ -9078,63 +10293,15 @@
                 <a:ea typeface="Arial" pitchFamily="34" charset="-122"/>
                 <a:cs typeface="Arial" pitchFamily="34" charset="-120"/>
               </a:rPr>
-              <a:t>Em processo de revisão estratégica (fev/2026), com base na IEC 61427-2.</a:t>
-            </a:r>
-            <a:endParaRPr lang="en-US" sz="1250" dirty="0"/>
-          </a:p>
-          <a:p>
-            <a:pPr marL="152400" indent="-152400">
-              <a:lnSpc>
-                <a:spcPct val="110000"/>
-              </a:lnSpc>
-              <a:spcAft>
-                <a:spcPts val="1000"/>
-              </a:spcAft>
-              <a:buSzPct val="100000"/>
-              <a:buChar char="•"/>
-            </a:pPr>
-            <a:r>
-              <a:rPr lang="en-US" sz="1250" dirty="0">
-                <a:solidFill>
-                  <a:srgbClr val="3E4E59"/>
-                </a:solidFill>
-                <a:latin typeface="Arial" pitchFamily="34" charset="0"/>
-                <a:ea typeface="Arial" pitchFamily="34" charset="-122"/>
-                <a:cs typeface="Arial" pitchFamily="34" charset="-120"/>
-              </a:rPr>
-              <a:t>Define requisitos rígidos de segurança e ensaio para baterias estacionárias conectadas à rede (on-grid).</a:t>
-            </a:r>
-            <a:endParaRPr lang="en-US" sz="1250" dirty="0"/>
-          </a:p>
-          <a:p>
-            <a:pPr marL="152400" indent="-152400">
-              <a:lnSpc>
-                <a:spcPct val="110000"/>
-              </a:lnSpc>
-              <a:spcAft>
-                <a:spcPts val="1000"/>
-              </a:spcAft>
-              <a:buSzPct val="100000"/>
-              <a:buChar char="•"/>
-            </a:pPr>
-            <a:r>
-              <a:rPr lang="en-US" sz="1250" dirty="0">
-                <a:solidFill>
-                  <a:srgbClr val="3E4E59"/>
-                </a:solidFill>
-                <a:latin typeface="Arial" pitchFamily="34" charset="0"/>
-                <a:ea typeface="Arial" pitchFamily="34" charset="-122"/>
-                <a:cs typeface="Arial" pitchFamily="34" charset="-120"/>
-              </a:rPr>
-              <a:t>Alinha o Brasil às melhores práticas globais de transição energética.</a:t>
-            </a:r>
-            <a:endParaRPr lang="en-US" sz="1250" dirty="0"/>
-          </a:p>
-        </p:txBody>
-      </p:sp>
-      <p:sp>
-        <p:nvSpPr>
-          <p:cNvPr id="17" name="Text 12"/>
+              <a:t>é o empilhamento — e não uma receita isolada — que comprime o payback para ≈ 5 anos e sustenta a TIR de até 28%.</a:t>
+            </a:r>
+            <a:endParaRPr lang="en-US" sz="1150" dirty="0"/>
+          </a:p>
+        </p:txBody>
+      </p:sp>
+      <p:sp>
+        <p:nvSpPr>
+          <p:cNvPr id="25" name="Text 22"/>
           <p:cNvSpPr/>
           <p:nvPr/>
         </p:nvSpPr>
@@ -9173,7 +10340,7 @@
       </p:sp>
       <p:sp>
         <p:nvSpPr>
-          <p:cNvPr id="18" name="Text 13"/>
+          <p:cNvPr id="26" name="Text 23"/>
           <p:cNvSpPr/>
           <p:nvPr/>
         </p:nvSpPr>
@@ -9275,7 +10442,7 @@
                 <a:ea typeface="Arial" pitchFamily="34" charset="-122"/>
                 <a:cs typeface="Arial" pitchFamily="34" charset="-120"/>
               </a:rPr>
-              <a:t>O Fluxo de Receita: Geração Compartilhada na prática</a:t>
+              <a:t>Além da Receita: serviços que o BESS empilha na operação</a:t>
             </a:r>
             <a:endParaRPr lang="en-US" sz="3000" dirty="0"/>
           </a:p>
@@ -9289,12 +10456,12 @@
         </p:nvSpPr>
         <p:spPr>
           <a:xfrm>
-            <a:off x="548640" y="1737360"/>
-            <a:ext cx="2121408" cy="3566160"/>
+            <a:off x="548640" y="1554480"/>
+            <a:ext cx="5440680" cy="2121408"/>
           </a:xfrm>
           <a:prstGeom prst="roundRect">
             <a:avLst>
-              <a:gd name="adj" fmla="val 3448"/>
+              <a:gd name="adj" fmla="val 3879"/>
             </a:avLst>
           </a:prstGeom>
           <a:solidFill>
@@ -9323,8 +10490,8 @@
         </p:nvSpPr>
         <p:spPr>
           <a:xfrm>
-            <a:off x="804672" y="2011680"/>
-            <a:ext cx="530352" cy="530352"/>
+            <a:off x="841248" y="1828800"/>
+            <a:ext cx="512064" cy="512064"/>
           </a:xfrm>
           <a:prstGeom prst="ellipse">
             <a:avLst/>
@@ -9351,8 +10518,8 @@
         </p:blipFill>
         <p:spPr>
           <a:xfrm>
-            <a:off x="921349" y="2128357"/>
-            <a:ext cx="296997" cy="296997"/>
+            <a:off x="953902" y="1941454"/>
+            <a:ext cx="286756" cy="286756"/>
           </a:xfrm>
           <a:prstGeom prst="rect">
             <a:avLst/>
@@ -9367,8 +10534,8 @@
         </p:nvSpPr>
         <p:spPr>
           <a:xfrm>
-            <a:off x="1984248" y="1956816"/>
-            <a:ext cx="457200" cy="502920"/>
+            <a:off x="1508760" y="1810512"/>
+            <a:ext cx="4160520" cy="548640"/>
           </a:xfrm>
           <a:prstGeom prst="rect">
             <a:avLst/>
@@ -9380,21 +10547,21 @@
           <a:bodyPr wrap="square" lIns="0" tIns="0" rIns="0" bIns="0" rtlCol="0" anchor="ctr"/>
           <a:lstStyle/>
           <a:p>
-            <a:pPr algn="r" indent="0" marL="0">
-              <a:buNone/>
-            </a:pPr>
-            <a:r>
-              <a:rPr lang="en-US" sz="2600" b="1" dirty="0">
-                <a:solidFill>
-                  <a:srgbClr val="D8E1E7"/>
-                </a:solidFill>
-                <a:latin typeface="Arial" pitchFamily="34" charset="0"/>
-                <a:ea typeface="Arial" pitchFamily="34" charset="-122"/>
-                <a:cs typeface="Arial" pitchFamily="34" charset="-120"/>
-              </a:rPr>
-              <a:t>1</a:t>
-            </a:r>
-            <a:endParaRPr lang="en-US" sz="2600" dirty="0"/>
+            <a:pPr indent="0" marL="0">
+              <a:buNone/>
+            </a:pPr>
+            <a:r>
+              <a:rPr lang="en-US" sz="1550" b="1" dirty="0">
+                <a:solidFill>
+                  <a:srgbClr val="16303F"/>
+                </a:solidFill>
+                <a:latin typeface="Arial" pitchFamily="34" charset="0"/>
+                <a:ea typeface="Arial" pitchFamily="34" charset="-122"/>
+                <a:cs typeface="Arial" pitchFamily="34" charset="-120"/>
+              </a:rPr>
+              <a:t>Backup e resiliência</a:t>
+            </a:r>
+            <a:endParaRPr lang="en-US" sz="1550" dirty="0"/>
           </a:p>
         </p:txBody>
       </p:sp>
@@ -9406,50 +10573,8 @@
         </p:nvSpPr>
         <p:spPr>
           <a:xfrm>
-            <a:off x="804672" y="2743200"/>
-            <a:ext cx="1609344" cy="685800"/>
-          </a:xfrm>
-          <a:prstGeom prst="rect">
-            <a:avLst/>
-          </a:prstGeom>
-          <a:noFill/>
-          <a:ln/>
-        </p:spPr>
-        <p:txBody>
-          <a:bodyPr wrap="square" lIns="0" tIns="0" rIns="0" bIns="0" rtlCol="0" anchor="t"/>
-          <a:lstStyle/>
-          <a:p>
-            <a:pPr indent="0" marL="0">
-              <a:lnSpc>
-                <a:spcPct val="102000"/>
-              </a:lnSpc>
-              <a:buNone/>
-            </a:pPr>
-            <a:r>
-              <a:rPr lang="en-US" sz="1350" b="1" dirty="0">
-                <a:solidFill>
-                  <a:srgbClr val="16303F"/>
-                </a:solidFill>
-                <a:latin typeface="Arial" pitchFamily="34" charset="0"/>
-                <a:ea typeface="Arial" pitchFamily="34" charset="-122"/>
-                <a:cs typeface="Arial" pitchFamily="34" charset="-120"/>
-              </a:rPr>
-              <a:t>Geração e armazenamento</a:t>
-            </a:r>
-            <a:endParaRPr lang="en-US" sz="1350" dirty="0"/>
-          </a:p>
-        </p:txBody>
-      </p:sp>
-      <p:sp>
-        <p:nvSpPr>
-          <p:cNvPr id="8" name="Text 5"/>
-          <p:cNvSpPr/>
-          <p:nvPr/>
-        </p:nvSpPr>
-        <p:spPr>
-          <a:xfrm>
-            <a:off x="804672" y="3474720"/>
-            <a:ext cx="1609344" cy="1600200"/>
+            <a:off x="841248" y="2487168"/>
+            <a:ext cx="4855464" cy="978408"/>
           </a:xfrm>
           <a:prstGeom prst="rect">
             <a:avLst/>
@@ -9468,7 +10593,7 @@
               <a:buNone/>
             </a:pPr>
             <a:r>
-              <a:rPr lang="en-US" sz="1050" dirty="0">
+              <a:rPr lang="en-US" sz="1150" dirty="0">
                 <a:solidFill>
                   <a:srgbClr val="3E4E59"/>
                 </a:solidFill>
@@ -9476,46 +10601,26 @@
                 <a:ea typeface="Arial" pitchFamily="34" charset="-122"/>
                 <a:cs typeface="Arial" pitchFamily="34" charset="-120"/>
               </a:rPr>
-              <a:t>UFV + BESS maximizam a injeção diária na rede da distribuidora (ex.: Energisa-MT).</a:t>
-            </a:r>
-            <a:endParaRPr lang="en-US" sz="1050" dirty="0"/>
-          </a:p>
-        </p:txBody>
-      </p:sp>
-      <p:sp>
-        <p:nvSpPr>
-          <p:cNvPr id="9" name="Shape 6"/>
-          <p:cNvSpPr/>
-          <p:nvPr/>
-        </p:nvSpPr>
-        <p:spPr>
-          <a:xfrm>
-            <a:off x="2683764" y="3419856"/>
-            <a:ext cx="192024" cy="201168"/>
-          </a:xfrm>
-          <a:prstGeom prst="chevron">
-            <a:avLst/>
-          </a:prstGeom>
-          <a:solidFill>
-            <a:srgbClr val="F2B705"/>
-          </a:solidFill>
-          <a:ln/>
-        </p:spPr>
-      </p:sp>
-      <p:sp>
-        <p:nvSpPr>
-          <p:cNvPr id="10" name="Shape 7"/>
-          <p:cNvSpPr/>
-          <p:nvPr/>
-        </p:nvSpPr>
-        <p:spPr>
-          <a:xfrm>
-            <a:off x="2889504" y="1737360"/>
-            <a:ext cx="2121408" cy="3566160"/>
+              <a:t>Substitui o gerador a diesel: irrigação, ordenha e frio seguem operando nas quedas de rede — rotina nas linhas rurais de fim de rede.</a:t>
+            </a:r>
+            <a:endParaRPr lang="en-US" sz="1150" dirty="0"/>
+          </a:p>
+        </p:txBody>
+      </p:sp>
+      <p:sp>
+        <p:nvSpPr>
+          <p:cNvPr id="8" name="Shape 5"/>
+          <p:cNvSpPr/>
+          <p:nvPr/>
+        </p:nvSpPr>
+        <p:spPr>
+          <a:xfrm>
+            <a:off x="6245352" y="1554480"/>
+            <a:ext cx="5440680" cy="2121408"/>
           </a:xfrm>
           <a:prstGeom prst="roundRect">
             <a:avLst>
-              <a:gd name="adj" fmla="val 3448"/>
+              <a:gd name="adj" fmla="val 3879"/>
             </a:avLst>
           </a:prstGeom>
           <a:solidFill>
@@ -9538,14 +10643,14 @@
       </p:sp>
       <p:sp>
         <p:nvSpPr>
-          <p:cNvPr id="11" name="Shape 8"/>
-          <p:cNvSpPr/>
-          <p:nvPr/>
-        </p:nvSpPr>
-        <p:spPr>
-          <a:xfrm>
-            <a:off x="3145536" y="2011680"/>
-            <a:ext cx="530352" cy="530352"/>
+          <p:cNvPr id="9" name="Shape 6"/>
+          <p:cNvSpPr/>
+          <p:nvPr/>
+        </p:nvSpPr>
+        <p:spPr>
+          <a:xfrm>
+            <a:off x="6537960" y="1828800"/>
+            <a:ext cx="512064" cy="512064"/>
           </a:xfrm>
           <a:prstGeom prst="ellipse">
             <a:avLst/>
@@ -9558,7 +10663,7 @@
       </p:sp>
       <p:pic>
         <p:nvPicPr>
-          <p:cNvPr id="12" name="Image 1" descr="preencoded.png">    </p:cNvPr>
+          <p:cNvPr id="10" name="Image 1" descr="preencoded.png">    </p:cNvPr>
           <p:cNvPicPr>
             <a:picLocks noChangeAspect="1"/>
           </p:cNvPicPr>
@@ -9572,8 +10677,8 @@
         </p:blipFill>
         <p:spPr>
           <a:xfrm>
-            <a:off x="3262213" y="2128357"/>
-            <a:ext cx="296997" cy="296997"/>
+            <a:off x="6650614" y="1941454"/>
+            <a:ext cx="286756" cy="286756"/>
           </a:xfrm>
           <a:prstGeom prst="rect">
             <a:avLst/>
@@ -9582,14 +10687,14 @@
       </p:pic>
       <p:sp>
         <p:nvSpPr>
-          <p:cNvPr id="13" name="Text 9"/>
-          <p:cNvSpPr/>
-          <p:nvPr/>
-        </p:nvSpPr>
-        <p:spPr>
-          <a:xfrm>
-            <a:off x="4325112" y="1956816"/>
-            <a:ext cx="457200" cy="502920"/>
+          <p:cNvPr id="11" name="Text 7"/>
+          <p:cNvSpPr/>
+          <p:nvPr/>
+        </p:nvSpPr>
+        <p:spPr>
+          <a:xfrm>
+            <a:off x="7205472" y="1810512"/>
+            <a:ext cx="4160520" cy="548640"/>
           </a:xfrm>
           <a:prstGeom prst="rect">
             <a:avLst/>
@@ -9601,53 +10706,11 @@
           <a:bodyPr wrap="square" lIns="0" tIns="0" rIns="0" bIns="0" rtlCol="0" anchor="ctr"/>
           <a:lstStyle/>
           <a:p>
-            <a:pPr algn="r" indent="0" marL="0">
-              <a:buNone/>
-            </a:pPr>
-            <a:r>
-              <a:rPr lang="en-US" sz="2600" b="1" dirty="0">
-                <a:solidFill>
-                  <a:srgbClr val="D8E1E7"/>
-                </a:solidFill>
-                <a:latin typeface="Arial" pitchFamily="34" charset="0"/>
-                <a:ea typeface="Arial" pitchFamily="34" charset="-122"/>
-                <a:cs typeface="Arial" pitchFamily="34" charset="-120"/>
-              </a:rPr>
-              <a:t>2</a:t>
-            </a:r>
-            <a:endParaRPr lang="en-US" sz="2600" dirty="0"/>
-          </a:p>
-        </p:txBody>
-      </p:sp>
-      <p:sp>
-        <p:nvSpPr>
-          <p:cNvPr id="14" name="Text 10"/>
-          <p:cNvSpPr/>
-          <p:nvPr/>
-        </p:nvSpPr>
-        <p:spPr>
-          <a:xfrm>
-            <a:off x="3145536" y="2743200"/>
-            <a:ext cx="1609344" cy="685800"/>
-          </a:xfrm>
-          <a:prstGeom prst="rect">
-            <a:avLst/>
-          </a:prstGeom>
-          <a:noFill/>
-          <a:ln/>
-        </p:spPr>
-        <p:txBody>
-          <a:bodyPr wrap="square" lIns="0" tIns="0" rIns="0" bIns="0" rtlCol="0" anchor="t"/>
-          <a:lstStyle/>
-          <a:p>
             <a:pPr indent="0" marL="0">
-              <a:lnSpc>
-                <a:spcPct val="102000"/>
-              </a:lnSpc>
-              <a:buNone/>
-            </a:pPr>
-            <a:r>
-              <a:rPr lang="en-US" sz="1350" b="1" dirty="0">
+              <a:buNone/>
+            </a:pPr>
+            <a:r>
+              <a:rPr lang="en-US" sz="1550" b="1" dirty="0">
                 <a:solidFill>
                   <a:srgbClr val="16303F"/>
                 </a:solidFill>
@@ -9655,22 +10718,22 @@
                 <a:ea typeface="Arial" pitchFamily="34" charset="-122"/>
                 <a:cs typeface="Arial" pitchFamily="34" charset="-120"/>
               </a:rPr>
-              <a:t>Conversão em créditos</a:t>
-            </a:r>
-            <a:endParaRPr lang="en-US" sz="1350" dirty="0"/>
-          </a:p>
-        </p:txBody>
-      </p:sp>
-      <p:sp>
-        <p:nvSpPr>
-          <p:cNvPr id="15" name="Text 11"/>
-          <p:cNvSpPr/>
-          <p:nvPr/>
-        </p:nvSpPr>
-        <p:spPr>
-          <a:xfrm>
-            <a:off x="3145536" y="3474720"/>
-            <a:ext cx="1609344" cy="1600200"/>
+              <a:t>Qualidade de energia</a:t>
+            </a:r>
+            <a:endParaRPr lang="en-US" sz="1550" dirty="0"/>
+          </a:p>
+        </p:txBody>
+      </p:sp>
+      <p:sp>
+        <p:nvSpPr>
+          <p:cNvPr id="12" name="Text 8"/>
+          <p:cNvSpPr/>
+          <p:nvPr/>
+        </p:nvSpPr>
+        <p:spPr>
+          <a:xfrm>
+            <a:off x="6537960" y="2487168"/>
+            <a:ext cx="4855464" cy="978408"/>
           </a:xfrm>
           <a:prstGeom prst="rect">
             <a:avLst/>
@@ -9689,7 +10752,7 @@
               <a:buNone/>
             </a:pPr>
             <a:r>
-              <a:rPr lang="en-US" sz="1050" dirty="0">
+              <a:rPr lang="en-US" sz="1150" dirty="0">
                 <a:solidFill>
                   <a:srgbClr val="3E4E59"/>
                 </a:solidFill>
@@ -9697,46 +10760,26 @@
                 <a:ea typeface="Arial" pitchFamily="34" charset="-122"/>
                 <a:cs typeface="Arial" pitchFamily="34" charset="-120"/>
               </a:rPr>
-              <a:t>A energia injetada converte-se em créditos na proporção 1 kWh = 1 crédito (GD I).</a:t>
-            </a:r>
-            <a:endParaRPr lang="en-US" sz="1050" dirty="0"/>
-          </a:p>
-        </p:txBody>
-      </p:sp>
-      <p:sp>
-        <p:nvSpPr>
-          <p:cNvPr id="16" name="Shape 12"/>
-          <p:cNvSpPr/>
-          <p:nvPr/>
-        </p:nvSpPr>
-        <p:spPr>
-          <a:xfrm>
-            <a:off x="5024628" y="3419856"/>
-            <a:ext cx="192024" cy="201168"/>
-          </a:xfrm>
-          <a:prstGeom prst="chevron">
-            <a:avLst/>
-          </a:prstGeom>
-          <a:solidFill>
-            <a:srgbClr val="F2B705"/>
-          </a:solidFill>
-          <a:ln/>
-        </p:spPr>
-      </p:sp>
-      <p:sp>
-        <p:nvSpPr>
-          <p:cNvPr id="17" name="Shape 13"/>
-          <p:cNvSpPr/>
-          <p:nvPr/>
-        </p:nvSpPr>
-        <p:spPr>
-          <a:xfrm>
-            <a:off x="5230368" y="1737360"/>
-            <a:ext cx="2121408" cy="3566160"/>
+              <a:t>Estabiliza tensão e frequência em redes rurais fracas, protegendo motores, bombas e inversores contra afundamentos e surtos.</a:t>
+            </a:r>
+            <a:endParaRPr lang="en-US" sz="1150" dirty="0"/>
+          </a:p>
+        </p:txBody>
+      </p:sp>
+      <p:sp>
+        <p:nvSpPr>
+          <p:cNvPr id="13" name="Shape 9"/>
+          <p:cNvSpPr/>
+          <p:nvPr/>
+        </p:nvSpPr>
+        <p:spPr>
+          <a:xfrm>
+            <a:off x="548640" y="3904488"/>
+            <a:ext cx="5440680" cy="2121408"/>
           </a:xfrm>
           <a:prstGeom prst="roundRect">
             <a:avLst>
-              <a:gd name="adj" fmla="val 3448"/>
+              <a:gd name="adj" fmla="val 3879"/>
             </a:avLst>
           </a:prstGeom>
           <a:solidFill>
@@ -9759,14 +10802,14 @@
       </p:sp>
       <p:sp>
         <p:nvSpPr>
-          <p:cNvPr id="18" name="Shape 14"/>
-          <p:cNvSpPr/>
-          <p:nvPr/>
-        </p:nvSpPr>
-        <p:spPr>
-          <a:xfrm>
-            <a:off x="5486400" y="2011680"/>
-            <a:ext cx="530352" cy="530352"/>
+          <p:cNvPr id="14" name="Shape 10"/>
+          <p:cNvSpPr/>
+          <p:nvPr/>
+        </p:nvSpPr>
+        <p:spPr>
+          <a:xfrm>
+            <a:off x="841248" y="4178808"/>
+            <a:ext cx="512064" cy="512064"/>
           </a:xfrm>
           <a:prstGeom prst="ellipse">
             <a:avLst/>
@@ -9779,7 +10822,7 @@
       </p:sp>
       <p:pic>
         <p:nvPicPr>
-          <p:cNvPr id="19" name="Image 2" descr="preencoded.png">    </p:cNvPr>
+          <p:cNvPr id="15" name="Image 2" descr="preencoded.png">    </p:cNvPr>
           <p:cNvPicPr>
             <a:picLocks noChangeAspect="1"/>
           </p:cNvPicPr>
@@ -9793,8 +10836,8 @@
         </p:blipFill>
         <p:spPr>
           <a:xfrm>
-            <a:off x="5603077" y="2128357"/>
-            <a:ext cx="296997" cy="296997"/>
+            <a:off x="953902" y="4291462"/>
+            <a:ext cx="286756" cy="286756"/>
           </a:xfrm>
           <a:prstGeom prst="rect">
             <a:avLst/>
@@ -9803,14 +10846,14 @@
       </p:pic>
       <p:sp>
         <p:nvSpPr>
-          <p:cNvPr id="20" name="Text 15"/>
-          <p:cNvSpPr/>
-          <p:nvPr/>
-        </p:nvSpPr>
-        <p:spPr>
-          <a:xfrm>
-            <a:off x="6665976" y="1956816"/>
-            <a:ext cx="457200" cy="502920"/>
+          <p:cNvPr id="16" name="Text 11"/>
+          <p:cNvSpPr/>
+          <p:nvPr/>
+        </p:nvSpPr>
+        <p:spPr>
+          <a:xfrm>
+            <a:off x="1508760" y="4160520"/>
+            <a:ext cx="4160520" cy="548640"/>
           </a:xfrm>
           <a:prstGeom prst="rect">
             <a:avLst/>
@@ -9822,53 +10865,11 @@
           <a:bodyPr wrap="square" lIns="0" tIns="0" rIns="0" bIns="0" rtlCol="0" anchor="ctr"/>
           <a:lstStyle/>
           <a:p>
-            <a:pPr algn="r" indent="0" marL="0">
-              <a:buNone/>
-            </a:pPr>
-            <a:r>
-              <a:rPr lang="en-US" sz="2600" b="1" dirty="0">
-                <a:solidFill>
-                  <a:srgbClr val="D8E1E7"/>
-                </a:solidFill>
-                <a:latin typeface="Arial" pitchFamily="34" charset="0"/>
-                <a:ea typeface="Arial" pitchFamily="34" charset="-122"/>
-                <a:cs typeface="Arial" pitchFamily="34" charset="-120"/>
-              </a:rPr>
-              <a:t>3</a:t>
-            </a:r>
-            <a:endParaRPr lang="en-US" sz="2600" dirty="0"/>
-          </a:p>
-        </p:txBody>
-      </p:sp>
-      <p:sp>
-        <p:nvSpPr>
-          <p:cNvPr id="21" name="Text 16"/>
-          <p:cNvSpPr/>
-          <p:nvPr/>
-        </p:nvSpPr>
-        <p:spPr>
-          <a:xfrm>
-            <a:off x="5486400" y="2743200"/>
-            <a:ext cx="1609344" cy="685800"/>
-          </a:xfrm>
-          <a:prstGeom prst="rect">
-            <a:avLst/>
-          </a:prstGeom>
-          <a:noFill/>
-          <a:ln/>
-        </p:spPr>
-        <p:txBody>
-          <a:bodyPr wrap="square" lIns="0" tIns="0" rIns="0" bIns="0" rtlCol="0" anchor="t"/>
-          <a:lstStyle/>
-          <a:p>
             <a:pPr indent="0" marL="0">
-              <a:lnSpc>
-                <a:spcPct val="102000"/>
-              </a:lnSpc>
-              <a:buNone/>
-            </a:pPr>
-            <a:r>
-              <a:rPr lang="en-US" sz="1350" b="1" dirty="0">
+              <a:buNone/>
+            </a:pPr>
+            <a:r>
+              <a:rPr lang="en-US" sz="1550" b="1" dirty="0">
                 <a:solidFill>
                   <a:srgbClr val="16303F"/>
                 </a:solidFill>
@@ -9876,22 +10877,22 @@
                 <a:ea typeface="Arial" pitchFamily="34" charset="-122"/>
                 <a:cs typeface="Arial" pitchFamily="34" charset="-120"/>
               </a:rPr>
-              <a:t>A estrutura (SPE)</a:t>
-            </a:r>
-            <a:endParaRPr lang="en-US" sz="1350" dirty="0"/>
-          </a:p>
-        </p:txBody>
-      </p:sp>
-      <p:sp>
-        <p:nvSpPr>
-          <p:cNvPr id="22" name="Text 17"/>
-          <p:cNvSpPr/>
-          <p:nvPr/>
-        </p:nvSpPr>
-        <p:spPr>
-          <a:xfrm>
-            <a:off x="5486400" y="3474720"/>
-            <a:ext cx="1609344" cy="1600200"/>
+              <a:t>Crescer sem esperar a rede</a:t>
+            </a:r>
+            <a:endParaRPr lang="en-US" sz="1550" dirty="0"/>
+          </a:p>
+        </p:txBody>
+      </p:sp>
+      <p:sp>
+        <p:nvSpPr>
+          <p:cNvPr id="17" name="Text 12"/>
+          <p:cNvSpPr/>
+          <p:nvPr/>
+        </p:nvSpPr>
+        <p:spPr>
+          <a:xfrm>
+            <a:off x="841248" y="4837176"/>
+            <a:ext cx="4855464" cy="978408"/>
           </a:xfrm>
           <a:prstGeom prst="rect">
             <a:avLst/>
@@ -9910,7 +10911,7 @@
               <a:buNone/>
             </a:pPr>
             <a:r>
-              <a:rPr lang="en-US" sz="1050" dirty="0">
+              <a:rPr lang="en-US" sz="1150" dirty="0">
                 <a:solidFill>
                   <a:srgbClr val="3E4E59"/>
                 </a:solidFill>
@@ -9918,46 +10919,26 @@
                 <a:ea typeface="Arial" pitchFamily="34" charset="-122"/>
                 <a:cs typeface="Arial" pitchFamily="34" charset="-120"/>
               </a:rPr>
-              <a:t>A SPE aluga equipamentos e cotas para a entidade organizadora (consórcio ou cooperativa).</a:t>
-            </a:r>
-            <a:endParaRPr lang="en-US" sz="1050" dirty="0"/>
-          </a:p>
-        </p:txBody>
-      </p:sp>
-      <p:sp>
-        <p:nvSpPr>
-          <p:cNvPr id="23" name="Shape 18"/>
-          <p:cNvSpPr/>
-          <p:nvPr/>
-        </p:nvSpPr>
-        <p:spPr>
-          <a:xfrm>
-            <a:off x="7365492" y="3419856"/>
-            <a:ext cx="192024" cy="201168"/>
-          </a:xfrm>
-          <a:prstGeom prst="chevron">
-            <a:avLst/>
-          </a:prstGeom>
-          <a:solidFill>
-            <a:srgbClr val="F2B705"/>
-          </a:solidFill>
-          <a:ln/>
-        </p:spPr>
-      </p:sp>
-      <p:sp>
-        <p:nvSpPr>
-          <p:cNvPr id="24" name="Shape 19"/>
-          <p:cNvSpPr/>
-          <p:nvPr/>
-        </p:nvSpPr>
-        <p:spPr>
-          <a:xfrm>
-            <a:off x="7571232" y="1737360"/>
-            <a:ext cx="2121408" cy="3566160"/>
+              <a:t>Alivia o ramal e posterga reforços de rede e aumento de demanda: novos pivôs e cargas entram sem depender de obra da distribuidora.</a:t>
+            </a:r>
+            <a:endParaRPr lang="en-US" sz="1150" dirty="0"/>
+          </a:p>
+        </p:txBody>
+      </p:sp>
+      <p:sp>
+        <p:nvSpPr>
+          <p:cNvPr id="18" name="Shape 13"/>
+          <p:cNvSpPr/>
+          <p:nvPr/>
+        </p:nvSpPr>
+        <p:spPr>
+          <a:xfrm>
+            <a:off x="6245352" y="3904488"/>
+            <a:ext cx="5440680" cy="2121408"/>
           </a:xfrm>
           <a:prstGeom prst="roundRect">
             <a:avLst>
-              <a:gd name="adj" fmla="val 3448"/>
+              <a:gd name="adj" fmla="val 3879"/>
             </a:avLst>
           </a:prstGeom>
           <a:solidFill>
@@ -9980,14 +10961,14 @@
       </p:sp>
       <p:sp>
         <p:nvSpPr>
-          <p:cNvPr id="25" name="Shape 20"/>
-          <p:cNvSpPr/>
-          <p:nvPr/>
-        </p:nvSpPr>
-        <p:spPr>
-          <a:xfrm>
-            <a:off x="7827264" y="2011680"/>
-            <a:ext cx="530352" cy="530352"/>
+          <p:cNvPr id="19" name="Shape 14"/>
+          <p:cNvSpPr/>
+          <p:nvPr/>
+        </p:nvSpPr>
+        <p:spPr>
+          <a:xfrm>
+            <a:off x="6537960" y="4178808"/>
+            <a:ext cx="512064" cy="512064"/>
           </a:xfrm>
           <a:prstGeom prst="ellipse">
             <a:avLst/>
@@ -10000,7 +10981,7 @@
       </p:sp>
       <p:pic>
         <p:nvPicPr>
-          <p:cNvPr id="26" name="Image 3" descr="preencoded.png">    </p:cNvPr>
+          <p:cNvPr id="20" name="Image 3" descr="preencoded.png">    </p:cNvPr>
           <p:cNvPicPr>
             <a:picLocks noChangeAspect="1"/>
           </p:cNvPicPr>
@@ -10014,8 +10995,8 @@
         </p:blipFill>
         <p:spPr>
           <a:xfrm>
-            <a:off x="7943941" y="2128357"/>
-            <a:ext cx="296997" cy="296997"/>
+            <a:off x="6650614" y="4291462"/>
+            <a:ext cx="286756" cy="286756"/>
           </a:xfrm>
           <a:prstGeom prst="rect">
             <a:avLst/>
@@ -10024,14 +11005,14 @@
       </p:pic>
       <p:sp>
         <p:nvSpPr>
-          <p:cNvPr id="27" name="Text 21"/>
-          <p:cNvSpPr/>
-          <p:nvPr/>
-        </p:nvSpPr>
-        <p:spPr>
-          <a:xfrm>
-            <a:off x="9006840" y="1956816"/>
-            <a:ext cx="457200" cy="502920"/>
+          <p:cNvPr id="21" name="Text 15"/>
+          <p:cNvSpPr/>
+          <p:nvPr/>
+        </p:nvSpPr>
+        <p:spPr>
+          <a:xfrm>
+            <a:off x="7205472" y="4160520"/>
+            <a:ext cx="4160520" cy="548640"/>
           </a:xfrm>
           <a:prstGeom prst="rect">
             <a:avLst/>
@@ -10043,53 +11024,11 @@
           <a:bodyPr wrap="square" lIns="0" tIns="0" rIns="0" bIns="0" rtlCol="0" anchor="ctr"/>
           <a:lstStyle/>
           <a:p>
-            <a:pPr algn="r" indent="0" marL="0">
-              <a:buNone/>
-            </a:pPr>
-            <a:r>
-              <a:rPr lang="en-US" sz="2600" b="1" dirty="0">
-                <a:solidFill>
-                  <a:srgbClr val="D8E1E7"/>
-                </a:solidFill>
-                <a:latin typeface="Arial" pitchFamily="34" charset="0"/>
-                <a:ea typeface="Arial" pitchFamily="34" charset="-122"/>
-                <a:cs typeface="Arial" pitchFamily="34" charset="-120"/>
-              </a:rPr>
-              <a:t>4</a:t>
-            </a:r>
-            <a:endParaRPr lang="en-US" sz="2600" dirty="0"/>
-          </a:p>
-        </p:txBody>
-      </p:sp>
-      <p:sp>
-        <p:nvSpPr>
-          <p:cNvPr id="28" name="Text 22"/>
-          <p:cNvSpPr/>
-          <p:nvPr/>
-        </p:nvSpPr>
-        <p:spPr>
-          <a:xfrm>
-            <a:off x="7827264" y="2743200"/>
-            <a:ext cx="1609344" cy="685800"/>
-          </a:xfrm>
-          <a:prstGeom prst="rect">
-            <a:avLst/>
-          </a:prstGeom>
-          <a:noFill/>
-          <a:ln/>
-        </p:spPr>
-        <p:txBody>
-          <a:bodyPr wrap="square" lIns="0" tIns="0" rIns="0" bIns="0" rtlCol="0" anchor="t"/>
-          <a:lstStyle/>
-          <a:p>
             <a:pPr indent="0" marL="0">
-              <a:lnSpc>
-                <a:spcPct val="102000"/>
-              </a:lnSpc>
-              <a:buNone/>
-            </a:pPr>
-            <a:r>
-              <a:rPr lang="en-US" sz="1350" b="1" dirty="0">
+              <a:buNone/>
+            </a:pPr>
+            <a:r>
+              <a:rPr lang="en-US" sz="1550" b="1" dirty="0">
                 <a:solidFill>
                   <a:srgbClr val="16303F"/>
                 </a:solidFill>
@@ -10097,22 +11036,22 @@
                 <a:ea typeface="Arial" pitchFamily="34" charset="-122"/>
                 <a:cs typeface="Arial" pitchFamily="34" charset="-120"/>
               </a:rPr>
-              <a:t>Monetização</a:t>
-            </a:r>
-            <a:endParaRPr lang="en-US" sz="1350" dirty="0"/>
-          </a:p>
-        </p:txBody>
-      </p:sp>
-      <p:sp>
-        <p:nvSpPr>
-          <p:cNvPr id="29" name="Text 23"/>
-          <p:cNvSpPr/>
-          <p:nvPr/>
-        </p:nvSpPr>
-        <p:spPr>
-          <a:xfrm>
-            <a:off x="7827264" y="3474720"/>
-            <a:ext cx="1609344" cy="1600200"/>
+              <a:t>Ativo ESG e acesso a crédito</a:t>
+            </a:r>
+            <a:endParaRPr lang="en-US" sz="1550" dirty="0"/>
+          </a:p>
+        </p:txBody>
+      </p:sp>
+      <p:sp>
+        <p:nvSpPr>
+          <p:cNvPr id="22" name="Text 16"/>
+          <p:cNvSpPr/>
+          <p:nvPr/>
+        </p:nvSpPr>
+        <p:spPr>
+          <a:xfrm>
+            <a:off x="6537960" y="4837176"/>
+            <a:ext cx="4855464" cy="978408"/>
           </a:xfrm>
           <a:prstGeom prst="rect">
             <a:avLst/>
@@ -10131,7 +11070,7 @@
               <a:buNone/>
             </a:pPr>
             <a:r>
-              <a:rPr lang="en-US" sz="1050" dirty="0">
+              <a:rPr lang="en-US" sz="1150" dirty="0">
                 <a:solidFill>
                   <a:srgbClr val="3E4E59"/>
                 </a:solidFill>
@@ -10139,120 +11078,22 @@
                 <a:ea typeface="Arial" pitchFamily="34" charset="-122"/>
                 <a:cs typeface="Arial" pitchFamily="34" charset="-120"/>
               </a:rPr>
-              <a:t>Produtores rurais e agroindústrias consorciados (Grupo B3) pagam o aluguel da cota com desconto atrativo (ex.: 27%).</a:t>
-            </a:r>
-            <a:endParaRPr lang="en-US" sz="1050" dirty="0"/>
-          </a:p>
-        </p:txBody>
-      </p:sp>
-      <p:sp>
-        <p:nvSpPr>
-          <p:cNvPr id="30" name="Shape 24"/>
-          <p:cNvSpPr/>
-          <p:nvPr/>
-        </p:nvSpPr>
-        <p:spPr>
-          <a:xfrm>
-            <a:off x="9706356" y="3419856"/>
-            <a:ext cx="192024" cy="201168"/>
-          </a:xfrm>
-          <a:prstGeom prst="chevron">
-            <a:avLst/>
-          </a:prstGeom>
-          <a:solidFill>
-            <a:srgbClr val="F2B705"/>
-          </a:solidFill>
-          <a:ln/>
-        </p:spPr>
-      </p:sp>
-      <p:sp>
-        <p:nvSpPr>
-          <p:cNvPr id="31" name="Shape 25"/>
-          <p:cNvSpPr/>
-          <p:nvPr/>
-        </p:nvSpPr>
-        <p:spPr>
-          <a:xfrm>
-            <a:off x="9912096" y="1737360"/>
-            <a:ext cx="2121408" cy="3566160"/>
-          </a:xfrm>
-          <a:prstGeom prst="roundRect">
-            <a:avLst>
-              <a:gd name="adj" fmla="val 3448"/>
-            </a:avLst>
-          </a:prstGeom>
-          <a:solidFill>
-            <a:srgbClr val="F5F8FA"/>
-          </a:solidFill>
-          <a:ln w="9525">
-            <a:solidFill>
-              <a:srgbClr val="D9E2E8"/>
-            </a:solidFill>
-            <a:prstDash val="solid"/>
-          </a:ln>
-          <a:effectLst>
-            <a:outerShdw sx="100000" sy="100000" kx="0" ky="0" algn="bl" rotWithShape="0" blurRad="88900" dist="25400" dir="5400000">
-              <a:srgbClr val="9AAAB4">
-                <a:alpha val="35000"/>
-              </a:srgbClr>
-            </a:outerShdw>
-          </a:effectLst>
-        </p:spPr>
-      </p:sp>
-      <p:sp>
-        <p:nvSpPr>
-          <p:cNvPr id="32" name="Shape 26"/>
-          <p:cNvSpPr/>
-          <p:nvPr/>
-        </p:nvSpPr>
-        <p:spPr>
-          <a:xfrm>
-            <a:off x="10168128" y="2011680"/>
-            <a:ext cx="530352" cy="530352"/>
-          </a:xfrm>
-          <a:prstGeom prst="ellipse">
-            <a:avLst/>
-          </a:prstGeom>
-          <a:solidFill>
-            <a:srgbClr val="F2B705"/>
-          </a:solidFill>
-          <a:ln/>
-        </p:spPr>
-      </p:sp>
-      <p:pic>
-        <p:nvPicPr>
-          <p:cNvPr id="33" name="Image 4" descr="preencoded.png">    </p:cNvPr>
-          <p:cNvPicPr>
-            <a:picLocks noChangeAspect="1"/>
-          </p:cNvPicPr>
-          <p:nvPr/>
-        </p:nvPicPr>
-        <p:blipFill>
-          <a:blip r:embed="rId5"/>
-          <a:stretch>
-            <a:fillRect/>
-          </a:stretch>
-        </p:blipFill>
-        <p:spPr>
-          <a:xfrm>
-            <a:off x="10284805" y="2128357"/>
-            <a:ext cx="296997" cy="296997"/>
-          </a:xfrm>
-          <a:prstGeom prst="rect">
-            <a:avLst/>
-          </a:prstGeom>
-        </p:spPr>
-      </p:pic>
-      <p:sp>
-        <p:nvSpPr>
-          <p:cNvPr id="34" name="Text 27"/>
-          <p:cNvSpPr/>
-          <p:nvPr/>
-        </p:nvSpPr>
-        <p:spPr>
-          <a:xfrm>
-            <a:off x="11347704" y="1956816"/>
-            <a:ext cx="457200" cy="502920"/>
+              <a:t>Energia limpa e firme: lastro para certificações, metas de descarbonização e crédito verde (Plano Safra / RenovAgro).</a:t>
+            </a:r>
+            <a:endParaRPr lang="en-US" sz="1150" dirty="0"/>
+          </a:p>
+        </p:txBody>
+      </p:sp>
+      <p:sp>
+        <p:nvSpPr>
+          <p:cNvPr id="23" name="Text 17"/>
+          <p:cNvSpPr/>
+          <p:nvPr/>
+        </p:nvSpPr>
+        <p:spPr>
+          <a:xfrm>
+            <a:off x="548640" y="5989320"/>
+            <a:ext cx="11091672" cy="320040"/>
           </a:xfrm>
           <a:prstGeom prst="rect">
             <a:avLst/>
@@ -10264,186 +11105,27 @@
           <a:bodyPr wrap="square" lIns="0" tIns="0" rIns="0" bIns="0" rtlCol="0" anchor="ctr"/>
           <a:lstStyle/>
           <a:p>
-            <a:pPr algn="r" indent="0" marL="0">
-              <a:buNone/>
-            </a:pPr>
-            <a:r>
-              <a:rPr lang="en-US" sz="2600" b="1" dirty="0">
-                <a:solidFill>
-                  <a:srgbClr val="D8E1E7"/>
-                </a:solidFill>
-                <a:latin typeface="Arial" pitchFamily="34" charset="0"/>
-                <a:ea typeface="Arial" pitchFamily="34" charset="-122"/>
-                <a:cs typeface="Arial" pitchFamily="34" charset="-120"/>
-              </a:rPr>
-              <a:t>5</a:t>
-            </a:r>
-            <a:endParaRPr lang="en-US" sz="2600" dirty="0"/>
-          </a:p>
-        </p:txBody>
-      </p:sp>
-      <p:sp>
-        <p:nvSpPr>
-          <p:cNvPr id="35" name="Text 28"/>
-          <p:cNvSpPr/>
-          <p:nvPr/>
-        </p:nvSpPr>
-        <p:spPr>
-          <a:xfrm>
-            <a:off x="10168128" y="2743200"/>
-            <a:ext cx="1609344" cy="685800"/>
-          </a:xfrm>
-          <a:prstGeom prst="rect">
-            <a:avLst/>
-          </a:prstGeom>
-          <a:noFill/>
-          <a:ln/>
-        </p:spPr>
-        <p:txBody>
-          <a:bodyPr wrap="square" lIns="0" tIns="0" rIns="0" bIns="0" rtlCol="0" anchor="t"/>
-          <a:lstStyle/>
-          <a:p>
             <a:pPr indent="0" marL="0">
-              <a:lnSpc>
-                <a:spcPct val="102000"/>
-              </a:lnSpc>
-              <a:buNone/>
-            </a:pPr>
-            <a:r>
-              <a:rPr lang="en-US" sz="1350" b="1" dirty="0">
-                <a:solidFill>
-                  <a:srgbClr val="16303F"/>
-                </a:solidFill>
-                <a:latin typeface="Arial" pitchFamily="34" charset="0"/>
-                <a:ea typeface="Arial" pitchFamily="34" charset="-122"/>
-                <a:cs typeface="Arial" pitchFamily="34" charset="-120"/>
-              </a:rPr>
-              <a:t>Abatimento</a:t>
-            </a:r>
-            <a:endParaRPr lang="en-US" sz="1350" dirty="0"/>
-          </a:p>
-        </p:txBody>
-      </p:sp>
-      <p:sp>
-        <p:nvSpPr>
-          <p:cNvPr id="36" name="Text 29"/>
-          <p:cNvSpPr/>
-          <p:nvPr/>
-        </p:nvSpPr>
-        <p:spPr>
-          <a:xfrm>
-            <a:off x="10168128" y="3474720"/>
-            <a:ext cx="1609344" cy="1600200"/>
-          </a:xfrm>
-          <a:prstGeom prst="rect">
-            <a:avLst/>
-          </a:prstGeom>
-          <a:noFill/>
-          <a:ln/>
-        </p:spPr>
-        <p:txBody>
-          <a:bodyPr wrap="square" lIns="0" tIns="0" rIns="0" bIns="0" rtlCol="0" anchor="t"/>
-          <a:lstStyle/>
-          <a:p>
-            <a:pPr indent="0" marL="0">
-              <a:lnSpc>
-                <a:spcPct val="110000"/>
-              </a:lnSpc>
-              <a:buNone/>
-            </a:pPr>
-            <a:r>
-              <a:rPr lang="en-US" sz="1050" dirty="0">
-                <a:solidFill>
-                  <a:srgbClr val="3E4E59"/>
-                </a:solidFill>
-                <a:latin typeface="Arial" pitchFamily="34" charset="0"/>
-                <a:ea typeface="Arial" pitchFamily="34" charset="-122"/>
-                <a:cs typeface="Arial" pitchFamily="34" charset="-120"/>
-              </a:rPr>
-              <a:t>Os créditos abatem a fatura dos clientes na distribuidora e o capital retorna à SPE.</a:t>
-            </a:r>
-            <a:endParaRPr lang="en-US" sz="1050" dirty="0"/>
-          </a:p>
-        </p:txBody>
-      </p:sp>
-      <p:sp>
-        <p:nvSpPr>
-          <p:cNvPr id="37" name="Shape 30"/>
-          <p:cNvSpPr/>
-          <p:nvPr/>
-        </p:nvSpPr>
-        <p:spPr>
-          <a:xfrm>
-            <a:off x="548640" y="5623560"/>
-            <a:ext cx="11091672" cy="566928"/>
-          </a:xfrm>
-          <a:prstGeom prst="roundRect">
-            <a:avLst>
-              <a:gd name="adj" fmla="val 12903"/>
-            </a:avLst>
-          </a:prstGeom>
-          <a:solidFill>
-            <a:srgbClr val="EAF1F6"/>
-          </a:solidFill>
-          <a:ln/>
-        </p:spPr>
-      </p:sp>
-      <p:sp>
-        <p:nvSpPr>
-          <p:cNvPr id="38" name="Text 31"/>
-          <p:cNvSpPr/>
-          <p:nvPr/>
-        </p:nvSpPr>
-        <p:spPr>
-          <a:xfrm>
-            <a:off x="777240" y="5623560"/>
-            <a:ext cx="10698480" cy="566928"/>
-          </a:xfrm>
-          <a:prstGeom prst="rect">
-            <a:avLst/>
-          </a:prstGeom>
-          <a:noFill/>
-          <a:ln/>
-        </p:spPr>
-        <p:txBody>
-          <a:bodyPr wrap="square" lIns="0" tIns="0" rIns="0" bIns="0" rtlCol="0" anchor="ctr"/>
-          <a:lstStyle/>
-          <a:p>
-            <a:pPr indent="0" marL="0">
-              <a:buNone/>
-            </a:pPr>
-            <a:r>
-              <a:rPr lang="en-US" sz="1250" b="1" dirty="0">
-                <a:solidFill>
-                  <a:srgbClr val="16303F"/>
-                </a:solidFill>
-                <a:latin typeface="Arial" pitchFamily="34" charset="0"/>
-                <a:ea typeface="Arial" pitchFamily="34" charset="-122"/>
-                <a:cs typeface="Arial" pitchFamily="34" charset="-120"/>
-              </a:rPr>
-              <a:t>Ciclo virtuoso:  </a:t>
-            </a:r>
-            <a:pPr indent="0" marL="0">
-              <a:buNone/>
-            </a:pPr>
-            <a:r>
-              <a:rPr lang="en-US" sz="1250" dirty="0">
-                <a:solidFill>
-                  <a:srgbClr val="3E4E59"/>
-                </a:solidFill>
-                <a:latin typeface="Arial" pitchFamily="34" charset="0"/>
-                <a:ea typeface="Arial" pitchFamily="34" charset="-122"/>
-                <a:cs typeface="Arial" pitchFamily="34" charset="-120"/>
-              </a:rPr>
-              <a:t>o abatimento na fatura remunera a SPE, que reinveste na operação — fechando o circuito financeiro da Geração Compartilhada.</a:t>
-            </a:r>
-            <a:endParaRPr lang="en-US" sz="1250" dirty="0"/>
-          </a:p>
-        </p:txBody>
-      </p:sp>
-      <p:sp>
-        <p:nvSpPr>
-          <p:cNvPr id="40" name="Text 32"/>
+              <a:buNone/>
+            </a:pPr>
+            <a:r>
+              <a:rPr lang="en-US" sz="1150" i="1" dirty="0">
+                <a:solidFill>
+                  <a:srgbClr val="7A8A94"/>
+                </a:solidFill>
+                <a:latin typeface="Arial" pitchFamily="34" charset="0"/>
+                <a:ea typeface="Arial" pitchFamily="34" charset="-122"/>
+                <a:cs typeface="Arial" pitchFamily="34" charset="-120"/>
+              </a:rPr>
+              <a:t>Cada serviço empilhado reduz risco operacional — valor que não aparece no fluxo de caixa, mas aparece na safra.</a:t>
+            </a:r>
+            <a:endParaRPr lang="en-US" sz="1150" dirty="0"/>
+          </a:p>
+        </p:txBody>
+      </p:sp>
+      <p:sp>
+        <p:nvSpPr>
+          <p:cNvPr id="25" name="Text 18"/>
           <p:cNvSpPr/>
           <p:nvPr/>
         </p:nvSpPr>
@@ -10482,7 +11164,7 @@
       </p:sp>
       <p:sp>
         <p:nvSpPr>
-          <p:cNvPr id="41" name="Text 33"/>
+          <p:cNvPr id="26" name="Text 19"/>
           <p:cNvSpPr/>
           <p:nvPr/>
         </p:nvSpPr>
@@ -10584,7 +11266,7 @@
                 <a:ea typeface="Arial" pitchFamily="34" charset="-122"/>
                 <a:cs typeface="Arial" pitchFamily="34" charset="-120"/>
               </a:rPr>
-              <a:t>Raio-X do CAPEX: onde o capital é alocado?</a:t>
+              <a:t>O Alicerce Regulatório: padronização e legalidade</a:t>
             </a:r>
             <a:endParaRPr lang="en-US" sz="3000" dirty="0"/>
           </a:p>
@@ -10592,96 +11274,100 @@
       </p:sp>
       <p:sp>
         <p:nvSpPr>
-          <p:cNvPr id="3" name="Shape 1"/>
-          <p:cNvSpPr/>
-          <p:nvPr/>
-        </p:nvSpPr>
-        <p:spPr>
-          <a:xfrm>
-            <a:off x="548640" y="1115568"/>
-            <a:ext cx="11091672" cy="512064"/>
+          <p:cNvPr id="3" name="Text 1"/>
+          <p:cNvSpPr/>
+          <p:nvPr/>
+        </p:nvSpPr>
+        <p:spPr>
+          <a:xfrm>
+            <a:off x="548640" y="1078992"/>
+            <a:ext cx="11064240" cy="365760"/>
+          </a:xfrm>
+          <a:prstGeom prst="rect">
+            <a:avLst/>
+          </a:prstGeom>
+          <a:noFill/>
+          <a:ln/>
+        </p:spPr>
+        <p:txBody>
+          <a:bodyPr wrap="square" lIns="0" tIns="0" rIns="0" bIns="0" rtlCol="0" anchor="ctr"/>
+          <a:lstStyle/>
+          <a:p>
+            <a:pPr indent="0" marL="0">
+              <a:buNone/>
+            </a:pPr>
+            <a:r>
+              <a:rPr lang="en-US" sz="1350" i="1" dirty="0">
+                <a:solidFill>
+                  <a:srgbClr val="7A8A94"/>
+                </a:solidFill>
+                <a:latin typeface="Arial" pitchFamily="34" charset="0"/>
+                <a:ea typeface="Arial" pitchFamily="34" charset="-122"/>
+                <a:cs typeface="Arial" pitchFamily="34" charset="-120"/>
+              </a:rPr>
+              <a:t>Dois instrumentos sustentam a confiança do mercado — um viabiliza o negócio, o outro viabiliza a engenharia.</a:t>
+            </a:r>
+            <a:endParaRPr lang="en-US" sz="1350" dirty="0"/>
+          </a:p>
+        </p:txBody>
+      </p:sp>
+      <p:sp>
+        <p:nvSpPr>
+          <p:cNvPr id="4" name="Shape 2"/>
+          <p:cNvSpPr/>
+          <p:nvPr/>
+        </p:nvSpPr>
+        <p:spPr>
+          <a:xfrm>
+            <a:off x="548640" y="1645920"/>
+            <a:ext cx="5440680" cy="4389120"/>
           </a:xfrm>
           <a:prstGeom prst="roundRect">
             <a:avLst>
-              <a:gd name="adj" fmla="val 14286"/>
+              <a:gd name="adj" fmla="val 1875"/>
             </a:avLst>
           </a:prstGeom>
           <a:solidFill>
-            <a:srgbClr val="EAF1F6"/>
+            <a:srgbClr val="F5F8FA"/>
           </a:solidFill>
-          <a:ln/>
-        </p:spPr>
-      </p:sp>
-      <p:sp>
-        <p:nvSpPr>
-          <p:cNvPr id="4" name="Text 2"/>
-          <p:cNvSpPr/>
-          <p:nvPr/>
-        </p:nvSpPr>
-        <p:spPr>
-          <a:xfrm>
-            <a:off x="777240" y="1115568"/>
-            <a:ext cx="10698480" cy="512064"/>
-          </a:xfrm>
-          <a:prstGeom prst="rect">
-            <a:avLst/>
-          </a:prstGeom>
-          <a:noFill/>
-          <a:ln/>
-        </p:spPr>
-        <p:txBody>
-          <a:bodyPr wrap="square" lIns="0" tIns="0" rIns="0" bIns="0" rtlCol="0" anchor="ctr"/>
-          <a:lstStyle/>
-          <a:p>
-            <a:pPr indent="0" marL="0">
-              <a:buNone/>
-            </a:pPr>
-            <a:r>
-              <a:rPr lang="en-US" sz="1300" b="1" dirty="0">
-                <a:solidFill>
-                  <a:srgbClr val="16303F"/>
-                </a:solidFill>
-                <a:latin typeface="Arial" pitchFamily="34" charset="0"/>
-                <a:ea typeface="Arial" pitchFamily="34" charset="-122"/>
-                <a:cs typeface="Arial" pitchFamily="34" charset="-120"/>
-              </a:rPr>
-              <a:t>Estudo de caso:  </a:t>
-            </a:r>
-            <a:pPr indent="0" marL="0">
-              <a:buNone/>
-            </a:pPr>
-            <a:r>
-              <a:rPr lang="en-US" sz="1300" dirty="0">
-                <a:solidFill>
-                  <a:srgbClr val="3E4E59"/>
-                </a:solidFill>
-                <a:latin typeface="Arial" pitchFamily="34" charset="0"/>
-                <a:ea typeface="Arial" pitchFamily="34" charset="-122"/>
-                <a:cs typeface="Arial" pitchFamily="34" charset="-120"/>
-              </a:rPr>
-              <a:t>planta híbrida de 3,0 MW (UFV) + 1.446 kWh (BESS)  ·  investimento total de </a:t>
-            </a:r>
-            <a:pPr indent="0" marL="0">
-              <a:buNone/>
-            </a:pPr>
-            <a:r>
-              <a:rPr lang="en-US" sz="1300" b="1" dirty="0">
-                <a:solidFill>
-                  <a:srgbClr val="16303F"/>
-                </a:solidFill>
-                <a:latin typeface="Arial" pitchFamily="34" charset="0"/>
-                <a:ea typeface="Arial" pitchFamily="34" charset="-122"/>
-                <a:cs typeface="Arial" pitchFamily="34" charset="-120"/>
-              </a:rPr>
-              <a:t>R$ 13,9 milhões</a:t>
-            </a:r>
-            <a:endParaRPr lang="en-US" sz="1300" dirty="0"/>
-          </a:p>
-        </p:txBody>
+          <a:ln w="9525">
+            <a:solidFill>
+              <a:srgbClr val="D9E2E8"/>
+            </a:solidFill>
+            <a:prstDash val="solid"/>
+          </a:ln>
+          <a:effectLst>
+            <a:outerShdw sx="100000" sy="100000" kx="0" ky="0" algn="bl" rotWithShape="0" blurRad="88900" dist="25400" dir="5400000">
+              <a:srgbClr val="9AAAB4">
+                <a:alpha val="35000"/>
+              </a:srgbClr>
+            </a:outerShdw>
+          </a:effectLst>
+        </p:spPr>
+      </p:sp>
+      <p:sp>
+        <p:nvSpPr>
+          <p:cNvPr id="5" name="Shape 3"/>
+          <p:cNvSpPr/>
+          <p:nvPr/>
+        </p:nvSpPr>
+        <p:spPr>
+          <a:xfrm>
+            <a:off x="868680" y="1938528"/>
+            <a:ext cx="566928" cy="566928"/>
+          </a:xfrm>
+          <a:prstGeom prst="ellipse">
+            <a:avLst/>
+          </a:prstGeom>
+          <a:solidFill>
+            <a:srgbClr val="F2B705"/>
+          </a:solidFill>
+          <a:ln/>
+        </p:spPr>
       </p:sp>
       <p:pic>
         <p:nvPicPr>
-          <p:cNvPr id="5" name="Image 0" descr="chart7.png">    </p:cNvPr>
+          <p:cNvPr id="6" name="Image 0" descr="preencoded.png">    </p:cNvPr>
           <p:cNvPicPr>
             <a:picLocks noChangeAspect="1"/>
           </p:cNvPicPr>
@@ -10695,8 +11381,8 @@
         </p:blipFill>
         <p:spPr>
           <a:xfrm>
-            <a:off x="685800" y="1874520"/>
-            <a:ext cx="10835640" cy="4160520"/>
+            <a:off x="993404" y="2063252"/>
+            <a:ext cx="317480" cy="317480"/>
           </a:xfrm>
           <a:prstGeom prst="rect">
             <a:avLst/>
@@ -10705,14 +11391,14 @@
       </p:pic>
       <p:sp>
         <p:nvSpPr>
-          <p:cNvPr id="6" name="Text 3"/>
-          <p:cNvSpPr/>
-          <p:nvPr/>
-        </p:nvSpPr>
-        <p:spPr>
-          <a:xfrm>
-            <a:off x="685800" y="6053328"/>
-            <a:ext cx="10835640" cy="365760"/>
+          <p:cNvPr id="7" name="Text 4"/>
+          <p:cNvSpPr/>
+          <p:nvPr/>
+        </p:nvSpPr>
+        <p:spPr>
+          <a:xfrm>
+            <a:off x="1600200" y="1956816"/>
+            <a:ext cx="4069080" cy="274320"/>
           </a:xfrm>
           <a:prstGeom prst="rect">
             <a:avLst/>
@@ -10728,23 +11414,406 @@
               <a:buNone/>
             </a:pPr>
             <a:r>
-              <a:rPr lang="en-US" sz="1150" i="1" dirty="0">
-                <a:solidFill>
-                  <a:srgbClr val="7A8A94"/>
-                </a:solidFill>
-                <a:latin typeface="Arial" pitchFamily="34" charset="0"/>
-                <a:ea typeface="Arial" pitchFamily="34" charset="-122"/>
-                <a:cs typeface="Arial" pitchFamily="34" charset="-120"/>
-              </a:rPr>
-              <a:t>Módulos fotovoltaicos e EPC dominam o orçamento; o sistema de baterias representa 12,59% do capital — e é ele que destrava a arbitragem.</a:t>
-            </a:r>
-            <a:endParaRPr lang="en-US" sz="1150" dirty="0"/>
-          </a:p>
-        </p:txBody>
-      </p:sp>
-      <p:sp>
-        <p:nvSpPr>
-          <p:cNvPr id="8" name="Text 4"/>
+              <a:rPr lang="en-US" sz="950" b="1" spc="200" kern="0" dirty="0">
+                <a:solidFill>
+                  <a:srgbClr val="B78A00"/>
+                </a:solidFill>
+                <a:latin typeface="Arial" pitchFamily="34" charset="0"/>
+                <a:ea typeface="Arial" pitchFamily="34" charset="-122"/>
+                <a:cs typeface="Arial" pitchFamily="34" charset="-120"/>
+              </a:rPr>
+              <a:t>VIABILIDADE DE NEGÓCIOS</a:t>
+            </a:r>
+            <a:endParaRPr lang="en-US" sz="950" dirty="0"/>
+          </a:p>
+        </p:txBody>
+      </p:sp>
+      <p:sp>
+        <p:nvSpPr>
+          <p:cNvPr id="8" name="Text 5"/>
+          <p:cNvSpPr/>
+          <p:nvPr/>
+        </p:nvSpPr>
+        <p:spPr>
+          <a:xfrm>
+            <a:off x="1600200" y="2194560"/>
+            <a:ext cx="4114800" cy="731520"/>
+          </a:xfrm>
+          <a:prstGeom prst="rect">
+            <a:avLst/>
+          </a:prstGeom>
+          <a:noFill/>
+          <a:ln/>
+        </p:spPr>
+        <p:txBody>
+          <a:bodyPr wrap="square" lIns="0" tIns="0" rIns="0" bIns="0" rtlCol="0" anchor="t"/>
+          <a:lstStyle/>
+          <a:p>
+            <a:pPr indent="0" marL="0">
+              <a:buNone/>
+            </a:pPr>
+            <a:r>
+              <a:rPr lang="en-US" sz="1650" b="1" dirty="0">
+                <a:solidFill>
+                  <a:srgbClr val="16303F"/>
+                </a:solidFill>
+                <a:latin typeface="Arial" pitchFamily="34" charset="0"/>
+                <a:ea typeface="Arial" pitchFamily="34" charset="-122"/>
+                <a:cs typeface="Arial" pitchFamily="34" charset="-120"/>
+              </a:rPr>
+              <a:t>O Marco Legal — Lei nº 14.300/2022</a:t>
+            </a:r>
+            <a:endParaRPr lang="en-US" sz="1650" dirty="0"/>
+          </a:p>
+        </p:txBody>
+      </p:sp>
+      <p:sp>
+        <p:nvSpPr>
+          <p:cNvPr id="9" name="Text 6"/>
+          <p:cNvSpPr/>
+          <p:nvPr/>
+        </p:nvSpPr>
+        <p:spPr>
+          <a:xfrm>
+            <a:off x="914400" y="3154680"/>
+            <a:ext cx="4709160" cy="2606040"/>
+          </a:xfrm>
+          <a:prstGeom prst="rect">
+            <a:avLst/>
+          </a:prstGeom>
+          <a:noFill/>
+          <a:ln/>
+        </p:spPr>
+        <p:txBody>
+          <a:bodyPr wrap="square" lIns="0" tIns="0" rIns="0" bIns="0" rtlCol="0" anchor="t"/>
+          <a:lstStyle/>
+          <a:p>
+            <a:pPr marL="152400" indent="-152400">
+              <a:lnSpc>
+                <a:spcPct val="110000"/>
+              </a:lnSpc>
+              <a:spcAft>
+                <a:spcPts val="1000"/>
+              </a:spcAft>
+              <a:buSzPct val="100000"/>
+              <a:buChar char="•"/>
+            </a:pPr>
+            <a:r>
+              <a:rPr lang="en-US" sz="1250" dirty="0">
+                <a:solidFill>
+                  <a:srgbClr val="3E4E59"/>
+                </a:solidFill>
+                <a:latin typeface="Arial" pitchFamily="34" charset="0"/>
+                <a:ea typeface="Arial" pitchFamily="34" charset="-122"/>
+                <a:cs typeface="Arial" pitchFamily="34" charset="-120"/>
+              </a:rPr>
+              <a:t>Instituiu a Geração Compartilhada no âmbito da Geração Distribuída.</a:t>
+            </a:r>
+            <a:endParaRPr lang="en-US" sz="1250" dirty="0"/>
+          </a:p>
+          <a:p>
+            <a:pPr marL="152400" indent="-152400">
+              <a:lnSpc>
+                <a:spcPct val="110000"/>
+              </a:lnSpc>
+              <a:spcAft>
+                <a:spcPts val="1000"/>
+              </a:spcAft>
+              <a:buSzPct val="100000"/>
+              <a:buChar char="•"/>
+            </a:pPr>
+            <a:r>
+              <a:rPr lang="en-US" sz="1250" dirty="0">
+                <a:solidFill>
+                  <a:srgbClr val="3E4E59"/>
+                </a:solidFill>
+                <a:latin typeface="Arial" pitchFamily="34" charset="0"/>
+                <a:ea typeface="Arial" pitchFamily="34" charset="-122"/>
+                <a:cs typeface="Arial" pitchFamily="34" charset="-120"/>
+              </a:rPr>
+              <a:t>Permite a união de interessados via consórcio, cooperativa ou associação — arranjo natural para cooperativas e associações de produtores rurais — para compartilhar créditos de uma UFV de até 3 MW.</a:t>
+            </a:r>
+            <a:endParaRPr lang="en-US" sz="1250" dirty="0"/>
+          </a:p>
+          <a:p>
+            <a:pPr marL="152400" indent="-152400">
+              <a:lnSpc>
+                <a:spcPct val="110000"/>
+              </a:lnSpc>
+              <a:spcAft>
+                <a:spcPts val="1000"/>
+              </a:spcAft>
+              <a:buSzPct val="100000"/>
+              <a:buChar char="•"/>
+            </a:pPr>
+            <a:r>
+              <a:rPr lang="en-US" sz="1250" dirty="0">
+                <a:solidFill>
+                  <a:srgbClr val="3E4E59"/>
+                </a:solidFill>
+                <a:latin typeface="Arial" pitchFamily="34" charset="0"/>
+                <a:ea typeface="Arial" pitchFamily="34" charset="-122"/>
+                <a:cs typeface="Arial" pitchFamily="34" charset="-120"/>
+              </a:rPr>
+              <a:t>O BESS atua como otimizador dessa injeção, maximizando o valor de cada crédito gerado.</a:t>
+            </a:r>
+            <a:endParaRPr lang="en-US" sz="1250" dirty="0"/>
+          </a:p>
+        </p:txBody>
+      </p:sp>
+      <p:sp>
+        <p:nvSpPr>
+          <p:cNvPr id="10" name="Shape 7"/>
+          <p:cNvSpPr/>
+          <p:nvPr/>
+        </p:nvSpPr>
+        <p:spPr>
+          <a:xfrm>
+            <a:off x="6245352" y="1645920"/>
+            <a:ext cx="5440680" cy="4389120"/>
+          </a:xfrm>
+          <a:prstGeom prst="roundRect">
+            <a:avLst>
+              <a:gd name="adj" fmla="val 1875"/>
+            </a:avLst>
+          </a:prstGeom>
+          <a:solidFill>
+            <a:srgbClr val="F5F8FA"/>
+          </a:solidFill>
+          <a:ln w="9525">
+            <a:solidFill>
+              <a:srgbClr val="D9E2E8"/>
+            </a:solidFill>
+            <a:prstDash val="solid"/>
+          </a:ln>
+          <a:effectLst>
+            <a:outerShdw sx="100000" sy="100000" kx="0" ky="0" algn="bl" rotWithShape="0" blurRad="88900" dist="25400" dir="5400000">
+              <a:srgbClr val="9AAAB4">
+                <a:alpha val="35000"/>
+              </a:srgbClr>
+            </a:outerShdw>
+          </a:effectLst>
+        </p:spPr>
+      </p:sp>
+      <p:sp>
+        <p:nvSpPr>
+          <p:cNvPr id="11" name="Shape 8"/>
+          <p:cNvSpPr/>
+          <p:nvPr/>
+        </p:nvSpPr>
+        <p:spPr>
+          <a:xfrm>
+            <a:off x="6565392" y="1938528"/>
+            <a:ext cx="566928" cy="566928"/>
+          </a:xfrm>
+          <a:prstGeom prst="ellipse">
+            <a:avLst/>
+          </a:prstGeom>
+          <a:solidFill>
+            <a:srgbClr val="F2B705"/>
+          </a:solidFill>
+          <a:ln/>
+        </p:spPr>
+      </p:sp>
+      <p:pic>
+        <p:nvPicPr>
+          <p:cNvPr id="12" name="Image 1" descr="preencoded.png">    </p:cNvPr>
+          <p:cNvPicPr>
+            <a:picLocks noChangeAspect="1"/>
+          </p:cNvPicPr>
+          <p:nvPr/>
+        </p:nvPicPr>
+        <p:blipFill>
+          <a:blip r:embed="rId2"/>
+          <a:stretch>
+            <a:fillRect/>
+          </a:stretch>
+        </p:blipFill>
+        <p:spPr>
+          <a:xfrm>
+            <a:off x="6690116" y="2063252"/>
+            <a:ext cx="317480" cy="317480"/>
+          </a:xfrm>
+          <a:prstGeom prst="rect">
+            <a:avLst/>
+          </a:prstGeom>
+        </p:spPr>
+      </p:pic>
+      <p:sp>
+        <p:nvSpPr>
+          <p:cNvPr id="13" name="Text 9"/>
+          <p:cNvSpPr/>
+          <p:nvPr/>
+        </p:nvSpPr>
+        <p:spPr>
+          <a:xfrm>
+            <a:off x="7296912" y="1956816"/>
+            <a:ext cx="4069080" cy="274320"/>
+          </a:xfrm>
+          <a:prstGeom prst="rect">
+            <a:avLst/>
+          </a:prstGeom>
+          <a:noFill/>
+          <a:ln/>
+        </p:spPr>
+        <p:txBody>
+          <a:bodyPr wrap="square" lIns="0" tIns="0" rIns="0" bIns="0" rtlCol="0" anchor="ctr"/>
+          <a:lstStyle/>
+          <a:p>
+            <a:pPr indent="0" marL="0">
+              <a:buNone/>
+            </a:pPr>
+            <a:r>
+              <a:rPr lang="en-US" sz="950" b="1" spc="200" kern="0" dirty="0">
+                <a:solidFill>
+                  <a:srgbClr val="B78A00"/>
+                </a:solidFill>
+                <a:latin typeface="Arial" pitchFamily="34" charset="0"/>
+                <a:ea typeface="Arial" pitchFamily="34" charset="-122"/>
+                <a:cs typeface="Arial" pitchFamily="34" charset="-120"/>
+              </a:rPr>
+              <a:t>VIABILIDADE DE ENGENHARIA</a:t>
+            </a:r>
+            <a:endParaRPr lang="en-US" sz="950" dirty="0"/>
+          </a:p>
+        </p:txBody>
+      </p:sp>
+      <p:sp>
+        <p:nvSpPr>
+          <p:cNvPr id="14" name="Text 10"/>
+          <p:cNvSpPr/>
+          <p:nvPr/>
+        </p:nvSpPr>
+        <p:spPr>
+          <a:xfrm>
+            <a:off x="7296912" y="2194560"/>
+            <a:ext cx="4114800" cy="731520"/>
+          </a:xfrm>
+          <a:prstGeom prst="rect">
+            <a:avLst/>
+          </a:prstGeom>
+          <a:noFill/>
+          <a:ln/>
+        </p:spPr>
+        <p:txBody>
+          <a:bodyPr wrap="square" lIns="0" tIns="0" rIns="0" bIns="0" rtlCol="0" anchor="t"/>
+          <a:lstStyle/>
+          <a:p>
+            <a:pPr indent="0" marL="0">
+              <a:buNone/>
+            </a:pPr>
+            <a:r>
+              <a:rPr lang="en-US" sz="1650" b="1" dirty="0">
+                <a:solidFill>
+                  <a:srgbClr val="16303F"/>
+                </a:solidFill>
+                <a:latin typeface="Arial" pitchFamily="34" charset="0"/>
+                <a:ea typeface="Arial" pitchFamily="34" charset="-122"/>
+                <a:cs typeface="Arial" pitchFamily="34" charset="-120"/>
+              </a:rPr>
+              <a:t>A Norma Técnica — ABNT NBR 17153</a:t>
+            </a:r>
+            <a:endParaRPr lang="en-US" sz="1650" dirty="0"/>
+          </a:p>
+        </p:txBody>
+      </p:sp>
+      <p:sp>
+        <p:nvSpPr>
+          <p:cNvPr id="15" name="Text 11"/>
+          <p:cNvSpPr/>
+          <p:nvPr/>
+        </p:nvSpPr>
+        <p:spPr>
+          <a:xfrm>
+            <a:off x="6611112" y="3154680"/>
+            <a:ext cx="4709160" cy="2606040"/>
+          </a:xfrm>
+          <a:prstGeom prst="rect">
+            <a:avLst/>
+          </a:prstGeom>
+          <a:noFill/>
+          <a:ln/>
+        </p:spPr>
+        <p:txBody>
+          <a:bodyPr wrap="square" lIns="0" tIns="0" rIns="0" bIns="0" rtlCol="0" anchor="t"/>
+          <a:lstStyle/>
+          <a:p>
+            <a:pPr marL="152400" indent="-152400">
+              <a:lnSpc>
+                <a:spcPct val="110000"/>
+              </a:lnSpc>
+              <a:spcAft>
+                <a:spcPts val="1000"/>
+              </a:spcAft>
+              <a:buSzPct val="100000"/>
+              <a:buChar char="•"/>
+            </a:pPr>
+            <a:r>
+              <a:rPr lang="en-US" sz="1250" dirty="0">
+                <a:solidFill>
+                  <a:srgbClr val="3E4E59"/>
+                </a:solidFill>
+                <a:latin typeface="Arial" pitchFamily="34" charset="0"/>
+                <a:ea typeface="Arial" pitchFamily="34" charset="-122"/>
+                <a:cs typeface="Arial" pitchFamily="34" charset="-120"/>
+              </a:rPr>
+              <a:t>Em processo de revisão estratégica (fev/2026), com base na IEC 61427-2.</a:t>
+            </a:r>
+            <a:endParaRPr lang="en-US" sz="1250" dirty="0"/>
+          </a:p>
+          <a:p>
+            <a:pPr marL="152400" indent="-152400">
+              <a:lnSpc>
+                <a:spcPct val="110000"/>
+              </a:lnSpc>
+              <a:spcAft>
+                <a:spcPts val="1000"/>
+              </a:spcAft>
+              <a:buSzPct val="100000"/>
+              <a:buChar char="•"/>
+            </a:pPr>
+            <a:r>
+              <a:rPr lang="en-US" sz="1250" dirty="0">
+                <a:solidFill>
+                  <a:srgbClr val="3E4E59"/>
+                </a:solidFill>
+                <a:latin typeface="Arial" pitchFamily="34" charset="0"/>
+                <a:ea typeface="Arial" pitchFamily="34" charset="-122"/>
+                <a:cs typeface="Arial" pitchFamily="34" charset="-120"/>
+              </a:rPr>
+              <a:t>Define requisitos rígidos de segurança e ensaio para baterias estacionárias conectadas à rede (on-grid).</a:t>
+            </a:r>
+            <a:endParaRPr lang="en-US" sz="1250" dirty="0"/>
+          </a:p>
+          <a:p>
+            <a:pPr marL="152400" indent="-152400">
+              <a:lnSpc>
+                <a:spcPct val="110000"/>
+              </a:lnSpc>
+              <a:spcAft>
+                <a:spcPts val="1000"/>
+              </a:spcAft>
+              <a:buSzPct val="100000"/>
+              <a:buChar char="•"/>
+            </a:pPr>
+            <a:r>
+              <a:rPr lang="en-US" sz="1250" dirty="0">
+                <a:solidFill>
+                  <a:srgbClr val="3E4E59"/>
+                </a:solidFill>
+                <a:latin typeface="Arial" pitchFamily="34" charset="0"/>
+                <a:ea typeface="Arial" pitchFamily="34" charset="-122"/>
+                <a:cs typeface="Arial" pitchFamily="34" charset="-120"/>
+              </a:rPr>
+              <a:t>Alinha o Brasil às melhores práticas globais de transição energética.</a:t>
+            </a:r>
+            <a:endParaRPr lang="en-US" sz="1250" dirty="0"/>
+          </a:p>
+        </p:txBody>
+      </p:sp>
+      <p:sp>
+        <p:nvSpPr>
+          <p:cNvPr id="17" name="Text 12"/>
           <p:cNvSpPr/>
           <p:nvPr/>
         </p:nvSpPr>
@@ -10783,7 +11852,7 @@
       </p:sp>
       <p:sp>
         <p:nvSpPr>
-          <p:cNvPr id="9" name="Text 5"/>
+          <p:cNvPr id="18" name="Text 13"/>
           <p:cNvSpPr/>
           <p:nvPr/>
         </p:nvSpPr>
@@ -10885,50 +11954,26 @@
                 <a:ea typeface="Arial" pitchFamily="34" charset="-122"/>
                 <a:cs typeface="Arial" pitchFamily="34" charset="-120"/>
               </a:rPr>
-              <a:t>A Janela de Oportunidade Tributária  |  estudo: Mato Grosso</a:t>
+              <a:t>O Fluxo de Receita: Geração Compartilhada na prática</a:t>
             </a:r>
             <a:endParaRPr lang="en-US" sz="3000" dirty="0"/>
           </a:p>
         </p:txBody>
       </p:sp>
-      <p:pic>
-        <p:nvPicPr>
-          <p:cNvPr id="3" name="Image 0" descr="chart8.png">    </p:cNvPr>
-          <p:cNvPicPr>
-            <a:picLocks noChangeAspect="1"/>
-          </p:cNvPicPr>
-          <p:nvPr/>
-        </p:nvPicPr>
-        <p:blipFill>
-          <a:blip r:embed="rId1"/>
-          <a:stretch>
-            <a:fillRect/>
-          </a:stretch>
-        </p:blipFill>
-        <p:spPr>
-          <a:xfrm>
-            <a:off x="594360" y="1600200"/>
-            <a:ext cx="6949440" cy="4480560"/>
-          </a:xfrm>
-          <a:prstGeom prst="rect">
-            <a:avLst/>
-          </a:prstGeom>
-        </p:spPr>
-      </p:pic>
-      <p:sp>
-        <p:nvSpPr>
-          <p:cNvPr id="4" name="Shape 1"/>
-          <p:cNvSpPr/>
-          <p:nvPr/>
-        </p:nvSpPr>
-        <p:spPr>
-          <a:xfrm>
-            <a:off x="8001000" y="1554480"/>
-            <a:ext cx="3639312" cy="4480560"/>
+      <p:sp>
+        <p:nvSpPr>
+          <p:cNvPr id="3" name="Shape 1"/>
+          <p:cNvSpPr/>
+          <p:nvPr/>
+        </p:nvSpPr>
+        <p:spPr>
+          <a:xfrm>
+            <a:off x="548640" y="1737360"/>
+            <a:ext cx="2121408" cy="3566160"/>
           </a:xfrm>
           <a:prstGeom prst="roundRect">
             <a:avLst>
-              <a:gd name="adj" fmla="val 2261"/>
+              <a:gd name="adj" fmla="val 3448"/>
             </a:avLst>
           </a:prstGeom>
           <a:solidFill>
@@ -10951,14 +11996,14 @@
       </p:sp>
       <p:sp>
         <p:nvSpPr>
-          <p:cNvPr id="5" name="Shape 2"/>
-          <p:cNvSpPr/>
-          <p:nvPr/>
-        </p:nvSpPr>
-        <p:spPr>
-          <a:xfrm>
-            <a:off x="8293608" y="1828800"/>
-            <a:ext cx="548640" cy="548640"/>
+          <p:cNvPr id="4" name="Shape 2"/>
+          <p:cNvSpPr/>
+          <p:nvPr/>
+        </p:nvSpPr>
+        <p:spPr>
+          <a:xfrm>
+            <a:off x="804672" y="2011680"/>
+            <a:ext cx="530352" cy="530352"/>
           </a:xfrm>
           <a:prstGeom prst="ellipse">
             <a:avLst/>
@@ -10971,7 +12016,228 @@
       </p:sp>
       <p:pic>
         <p:nvPicPr>
-          <p:cNvPr id="6" name="Image 1" descr="preencoded.png">    </p:cNvPr>
+          <p:cNvPr id="5" name="Image 0" descr="preencoded.png">    </p:cNvPr>
+          <p:cNvPicPr>
+            <a:picLocks noChangeAspect="1"/>
+          </p:cNvPicPr>
+          <p:nvPr/>
+        </p:nvPicPr>
+        <p:blipFill>
+          <a:blip r:embed="rId1"/>
+          <a:stretch>
+            <a:fillRect/>
+          </a:stretch>
+        </p:blipFill>
+        <p:spPr>
+          <a:xfrm>
+            <a:off x="921349" y="2128357"/>
+            <a:ext cx="296997" cy="296997"/>
+          </a:xfrm>
+          <a:prstGeom prst="rect">
+            <a:avLst/>
+          </a:prstGeom>
+        </p:spPr>
+      </p:pic>
+      <p:sp>
+        <p:nvSpPr>
+          <p:cNvPr id="6" name="Text 3"/>
+          <p:cNvSpPr/>
+          <p:nvPr/>
+        </p:nvSpPr>
+        <p:spPr>
+          <a:xfrm>
+            <a:off x="1984248" y="1956816"/>
+            <a:ext cx="457200" cy="502920"/>
+          </a:xfrm>
+          <a:prstGeom prst="rect">
+            <a:avLst/>
+          </a:prstGeom>
+          <a:noFill/>
+          <a:ln/>
+        </p:spPr>
+        <p:txBody>
+          <a:bodyPr wrap="square" lIns="0" tIns="0" rIns="0" bIns="0" rtlCol="0" anchor="ctr"/>
+          <a:lstStyle/>
+          <a:p>
+            <a:pPr algn="r" indent="0" marL="0">
+              <a:buNone/>
+            </a:pPr>
+            <a:r>
+              <a:rPr lang="en-US" sz="2600" b="1" dirty="0">
+                <a:solidFill>
+                  <a:srgbClr val="D8E1E7"/>
+                </a:solidFill>
+                <a:latin typeface="Arial" pitchFamily="34" charset="0"/>
+                <a:ea typeface="Arial" pitchFamily="34" charset="-122"/>
+                <a:cs typeface="Arial" pitchFamily="34" charset="-120"/>
+              </a:rPr>
+              <a:t>1</a:t>
+            </a:r>
+            <a:endParaRPr lang="en-US" sz="2600" dirty="0"/>
+          </a:p>
+        </p:txBody>
+      </p:sp>
+      <p:sp>
+        <p:nvSpPr>
+          <p:cNvPr id="7" name="Text 4"/>
+          <p:cNvSpPr/>
+          <p:nvPr/>
+        </p:nvSpPr>
+        <p:spPr>
+          <a:xfrm>
+            <a:off x="804672" y="2743200"/>
+            <a:ext cx="1609344" cy="685800"/>
+          </a:xfrm>
+          <a:prstGeom prst="rect">
+            <a:avLst/>
+          </a:prstGeom>
+          <a:noFill/>
+          <a:ln/>
+        </p:spPr>
+        <p:txBody>
+          <a:bodyPr wrap="square" lIns="0" tIns="0" rIns="0" bIns="0" rtlCol="0" anchor="t"/>
+          <a:lstStyle/>
+          <a:p>
+            <a:pPr indent="0" marL="0">
+              <a:lnSpc>
+                <a:spcPct val="102000"/>
+              </a:lnSpc>
+              <a:buNone/>
+            </a:pPr>
+            <a:r>
+              <a:rPr lang="en-US" sz="1350" b="1" dirty="0">
+                <a:solidFill>
+                  <a:srgbClr val="16303F"/>
+                </a:solidFill>
+                <a:latin typeface="Arial" pitchFamily="34" charset="0"/>
+                <a:ea typeface="Arial" pitchFamily="34" charset="-122"/>
+                <a:cs typeface="Arial" pitchFamily="34" charset="-120"/>
+              </a:rPr>
+              <a:t>Geração e armazenamento</a:t>
+            </a:r>
+            <a:endParaRPr lang="en-US" sz="1350" dirty="0"/>
+          </a:p>
+        </p:txBody>
+      </p:sp>
+      <p:sp>
+        <p:nvSpPr>
+          <p:cNvPr id="8" name="Text 5"/>
+          <p:cNvSpPr/>
+          <p:nvPr/>
+        </p:nvSpPr>
+        <p:spPr>
+          <a:xfrm>
+            <a:off x="804672" y="3474720"/>
+            <a:ext cx="1609344" cy="1600200"/>
+          </a:xfrm>
+          <a:prstGeom prst="rect">
+            <a:avLst/>
+          </a:prstGeom>
+          <a:noFill/>
+          <a:ln/>
+        </p:spPr>
+        <p:txBody>
+          <a:bodyPr wrap="square" lIns="0" tIns="0" rIns="0" bIns="0" rtlCol="0" anchor="t"/>
+          <a:lstStyle/>
+          <a:p>
+            <a:pPr indent="0" marL="0">
+              <a:lnSpc>
+                <a:spcPct val="110000"/>
+              </a:lnSpc>
+              <a:buNone/>
+            </a:pPr>
+            <a:r>
+              <a:rPr lang="en-US" sz="1050" dirty="0">
+                <a:solidFill>
+                  <a:srgbClr val="3E4E59"/>
+                </a:solidFill>
+                <a:latin typeface="Arial" pitchFamily="34" charset="0"/>
+                <a:ea typeface="Arial" pitchFamily="34" charset="-122"/>
+                <a:cs typeface="Arial" pitchFamily="34" charset="-120"/>
+              </a:rPr>
+              <a:t>UFV + BESS maximizam a injeção diária na rede da distribuidora (ex.: Energisa-MT).</a:t>
+            </a:r>
+            <a:endParaRPr lang="en-US" sz="1050" dirty="0"/>
+          </a:p>
+        </p:txBody>
+      </p:sp>
+      <p:sp>
+        <p:nvSpPr>
+          <p:cNvPr id="9" name="Shape 6"/>
+          <p:cNvSpPr/>
+          <p:nvPr/>
+        </p:nvSpPr>
+        <p:spPr>
+          <a:xfrm>
+            <a:off x="2683764" y="3419856"/>
+            <a:ext cx="192024" cy="201168"/>
+          </a:xfrm>
+          <a:prstGeom prst="chevron">
+            <a:avLst/>
+          </a:prstGeom>
+          <a:solidFill>
+            <a:srgbClr val="F2B705"/>
+          </a:solidFill>
+          <a:ln/>
+        </p:spPr>
+      </p:sp>
+      <p:sp>
+        <p:nvSpPr>
+          <p:cNvPr id="10" name="Shape 7"/>
+          <p:cNvSpPr/>
+          <p:nvPr/>
+        </p:nvSpPr>
+        <p:spPr>
+          <a:xfrm>
+            <a:off x="2889504" y="1737360"/>
+            <a:ext cx="2121408" cy="3566160"/>
+          </a:xfrm>
+          <a:prstGeom prst="roundRect">
+            <a:avLst>
+              <a:gd name="adj" fmla="val 3448"/>
+            </a:avLst>
+          </a:prstGeom>
+          <a:solidFill>
+            <a:srgbClr val="F5F8FA"/>
+          </a:solidFill>
+          <a:ln w="9525">
+            <a:solidFill>
+              <a:srgbClr val="D9E2E8"/>
+            </a:solidFill>
+            <a:prstDash val="solid"/>
+          </a:ln>
+          <a:effectLst>
+            <a:outerShdw sx="100000" sy="100000" kx="0" ky="0" algn="bl" rotWithShape="0" blurRad="88900" dist="25400" dir="5400000">
+              <a:srgbClr val="9AAAB4">
+                <a:alpha val="35000"/>
+              </a:srgbClr>
+            </a:outerShdw>
+          </a:effectLst>
+        </p:spPr>
+      </p:sp>
+      <p:sp>
+        <p:nvSpPr>
+          <p:cNvPr id="11" name="Shape 8"/>
+          <p:cNvSpPr/>
+          <p:nvPr/>
+        </p:nvSpPr>
+        <p:spPr>
+          <a:xfrm>
+            <a:off x="3145536" y="2011680"/>
+            <a:ext cx="530352" cy="530352"/>
+          </a:xfrm>
+          <a:prstGeom prst="ellipse">
+            <a:avLst/>
+          </a:prstGeom>
+          <a:solidFill>
+            <a:srgbClr val="F2B705"/>
+          </a:solidFill>
+          <a:ln/>
+        </p:spPr>
+      </p:sp>
+      <p:pic>
+        <p:nvPicPr>
+          <p:cNvPr id="12" name="Image 1" descr="preencoded.png">    </p:cNvPr>
           <p:cNvPicPr>
             <a:picLocks noChangeAspect="1"/>
           </p:cNvPicPr>
@@ -10985,8 +12251,8 @@
         </p:blipFill>
         <p:spPr>
           <a:xfrm>
-            <a:off x="8414309" y="1949501"/>
-            <a:ext cx="307238" cy="307238"/>
+            <a:off x="3262213" y="2128357"/>
+            <a:ext cx="296997" cy="296997"/>
           </a:xfrm>
           <a:prstGeom prst="rect">
             <a:avLst/>
@@ -10995,14 +12261,14 @@
       </p:pic>
       <p:sp>
         <p:nvSpPr>
-          <p:cNvPr id="7" name="Text 3"/>
-          <p:cNvSpPr/>
-          <p:nvPr/>
-        </p:nvSpPr>
-        <p:spPr>
-          <a:xfrm>
-            <a:off x="8293608" y="2468880"/>
-            <a:ext cx="3054096" cy="457200"/>
+          <p:cNvPr id="13" name="Text 9"/>
+          <p:cNvSpPr/>
+          <p:nvPr/>
+        </p:nvSpPr>
+        <p:spPr>
+          <a:xfrm>
+            <a:off x="4325112" y="1956816"/>
+            <a:ext cx="457200" cy="502920"/>
           </a:xfrm>
           <a:prstGeom prst="rect">
             <a:avLst/>
@@ -11014,11 +12280,53 @@
           <a:bodyPr wrap="square" lIns="0" tIns="0" rIns="0" bIns="0" rtlCol="0" anchor="ctr"/>
           <a:lstStyle/>
           <a:p>
+            <a:pPr algn="r" indent="0" marL="0">
+              <a:buNone/>
+            </a:pPr>
+            <a:r>
+              <a:rPr lang="en-US" sz="2600" b="1" dirty="0">
+                <a:solidFill>
+                  <a:srgbClr val="D8E1E7"/>
+                </a:solidFill>
+                <a:latin typeface="Arial" pitchFamily="34" charset="0"/>
+                <a:ea typeface="Arial" pitchFamily="34" charset="-122"/>
+                <a:cs typeface="Arial" pitchFamily="34" charset="-120"/>
+              </a:rPr>
+              <a:t>2</a:t>
+            </a:r>
+            <a:endParaRPr lang="en-US" sz="2600" dirty="0"/>
+          </a:p>
+        </p:txBody>
+      </p:sp>
+      <p:sp>
+        <p:nvSpPr>
+          <p:cNvPr id="14" name="Text 10"/>
+          <p:cNvSpPr/>
+          <p:nvPr/>
+        </p:nvSpPr>
+        <p:spPr>
+          <a:xfrm>
+            <a:off x="3145536" y="2743200"/>
+            <a:ext cx="1609344" cy="685800"/>
+          </a:xfrm>
+          <a:prstGeom prst="rect">
+            <a:avLst/>
+          </a:prstGeom>
+          <a:noFill/>
+          <a:ln/>
+        </p:spPr>
+        <p:txBody>
+          <a:bodyPr wrap="square" lIns="0" tIns="0" rIns="0" bIns="0" rtlCol="0" anchor="t"/>
+          <a:lstStyle/>
+          <a:p>
             <a:pPr indent="0" marL="0">
-              <a:buNone/>
-            </a:pPr>
-            <a:r>
-              <a:rPr lang="en-US" sz="1600" b="1" dirty="0">
+              <a:lnSpc>
+                <a:spcPct val="102000"/>
+              </a:lnSpc>
+              <a:buNone/>
+            </a:pPr>
+            <a:r>
+              <a:rPr lang="en-US" sz="1350" b="1" dirty="0">
                 <a:solidFill>
                   <a:srgbClr val="16303F"/>
                 </a:solidFill>
@@ -11026,22 +12334,22 @@
                 <a:ea typeface="Arial" pitchFamily="34" charset="-122"/>
                 <a:cs typeface="Arial" pitchFamily="34" charset="-120"/>
               </a:rPr>
-              <a:t>O tempo é a variável crítica</a:t>
-            </a:r>
-            <a:endParaRPr lang="en-US" sz="1600" dirty="0"/>
-          </a:p>
-        </p:txBody>
-      </p:sp>
-      <p:sp>
-        <p:nvSpPr>
-          <p:cNvPr id="8" name="Text 4"/>
-          <p:cNvSpPr/>
-          <p:nvPr/>
-        </p:nvSpPr>
-        <p:spPr>
-          <a:xfrm>
-            <a:off x="8293608" y="2971800"/>
-            <a:ext cx="3054096" cy="2788920"/>
+              <a:t>Conversão em créditos</a:t>
+            </a:r>
+            <a:endParaRPr lang="en-US" sz="1350" dirty="0"/>
+          </a:p>
+        </p:txBody>
+      </p:sp>
+      <p:sp>
+        <p:nvSpPr>
+          <p:cNvPr id="15" name="Text 11"/>
+          <p:cNvSpPr/>
+          <p:nvPr/>
+        </p:nvSpPr>
+        <p:spPr>
+          <a:xfrm>
+            <a:off x="3145536" y="3474720"/>
+            <a:ext cx="1609344" cy="1600200"/>
           </a:xfrm>
           <a:prstGeom prst="rect">
             <a:avLst/>
@@ -11060,7 +12368,7 @@
               <a:buNone/>
             </a:pPr>
             <a:r>
-              <a:rPr lang="en-US" sz="1150" dirty="0">
+              <a:rPr lang="en-US" sz="1050" dirty="0">
                 <a:solidFill>
                   <a:srgbClr val="3E4E59"/>
                 </a:solidFill>
@@ -11068,10 +12376,211 @@
                 <a:ea typeface="Arial" pitchFamily="34" charset="-122"/>
                 <a:cs typeface="Arial" pitchFamily="34" charset="-120"/>
               </a:rPr>
-              <a:t>MT aderiu ao Convênio ICMS nº 16/2015 já em 2015: desde 2016, a energia compensada é isenta do ICMS (alíquota de 17%).</a:t>
-            </a:r>
-            <a:endParaRPr lang="en-US" sz="1150" dirty="0"/>
-          </a:p>
+              <a:t>A energia injetada converte-se em créditos na proporção 1 kWh = 1 crédito (GD I).</a:t>
+            </a:r>
+            <a:endParaRPr lang="en-US" sz="1050" dirty="0"/>
+          </a:p>
+        </p:txBody>
+      </p:sp>
+      <p:sp>
+        <p:nvSpPr>
+          <p:cNvPr id="16" name="Shape 12"/>
+          <p:cNvSpPr/>
+          <p:nvPr/>
+        </p:nvSpPr>
+        <p:spPr>
+          <a:xfrm>
+            <a:off x="5024628" y="3419856"/>
+            <a:ext cx="192024" cy="201168"/>
+          </a:xfrm>
+          <a:prstGeom prst="chevron">
+            <a:avLst/>
+          </a:prstGeom>
+          <a:solidFill>
+            <a:srgbClr val="F2B705"/>
+          </a:solidFill>
+          <a:ln/>
+        </p:spPr>
+      </p:sp>
+      <p:sp>
+        <p:nvSpPr>
+          <p:cNvPr id="17" name="Shape 13"/>
+          <p:cNvSpPr/>
+          <p:nvPr/>
+        </p:nvSpPr>
+        <p:spPr>
+          <a:xfrm>
+            <a:off x="5230368" y="1737360"/>
+            <a:ext cx="2121408" cy="3566160"/>
+          </a:xfrm>
+          <a:prstGeom prst="roundRect">
+            <a:avLst>
+              <a:gd name="adj" fmla="val 3448"/>
+            </a:avLst>
+          </a:prstGeom>
+          <a:solidFill>
+            <a:srgbClr val="F5F8FA"/>
+          </a:solidFill>
+          <a:ln w="9525">
+            <a:solidFill>
+              <a:srgbClr val="D9E2E8"/>
+            </a:solidFill>
+            <a:prstDash val="solid"/>
+          </a:ln>
+          <a:effectLst>
+            <a:outerShdw sx="100000" sy="100000" kx="0" ky="0" algn="bl" rotWithShape="0" blurRad="88900" dist="25400" dir="5400000">
+              <a:srgbClr val="9AAAB4">
+                <a:alpha val="35000"/>
+              </a:srgbClr>
+            </a:outerShdw>
+          </a:effectLst>
+        </p:spPr>
+      </p:sp>
+      <p:sp>
+        <p:nvSpPr>
+          <p:cNvPr id="18" name="Shape 14"/>
+          <p:cNvSpPr/>
+          <p:nvPr/>
+        </p:nvSpPr>
+        <p:spPr>
+          <a:xfrm>
+            <a:off x="5486400" y="2011680"/>
+            <a:ext cx="530352" cy="530352"/>
+          </a:xfrm>
+          <a:prstGeom prst="ellipse">
+            <a:avLst/>
+          </a:prstGeom>
+          <a:solidFill>
+            <a:srgbClr val="F2B705"/>
+          </a:solidFill>
+          <a:ln/>
+        </p:spPr>
+      </p:sp>
+      <p:pic>
+        <p:nvPicPr>
+          <p:cNvPr id="19" name="Image 2" descr="preencoded.png">    </p:cNvPr>
+          <p:cNvPicPr>
+            <a:picLocks noChangeAspect="1"/>
+          </p:cNvPicPr>
+          <p:nvPr/>
+        </p:nvPicPr>
+        <p:blipFill>
+          <a:blip r:embed="rId3"/>
+          <a:stretch>
+            <a:fillRect/>
+          </a:stretch>
+        </p:blipFill>
+        <p:spPr>
+          <a:xfrm>
+            <a:off x="5603077" y="2128357"/>
+            <a:ext cx="296997" cy="296997"/>
+          </a:xfrm>
+          <a:prstGeom prst="rect">
+            <a:avLst/>
+          </a:prstGeom>
+        </p:spPr>
+      </p:pic>
+      <p:sp>
+        <p:nvSpPr>
+          <p:cNvPr id="20" name="Text 15"/>
+          <p:cNvSpPr/>
+          <p:nvPr/>
+        </p:nvSpPr>
+        <p:spPr>
+          <a:xfrm>
+            <a:off x="6665976" y="1956816"/>
+            <a:ext cx="457200" cy="502920"/>
+          </a:xfrm>
+          <a:prstGeom prst="rect">
+            <a:avLst/>
+          </a:prstGeom>
+          <a:noFill/>
+          <a:ln/>
+        </p:spPr>
+        <p:txBody>
+          <a:bodyPr wrap="square" lIns="0" tIns="0" rIns="0" bIns="0" rtlCol="0" anchor="ctr"/>
+          <a:lstStyle/>
+          <a:p>
+            <a:pPr algn="r" indent="0" marL="0">
+              <a:buNone/>
+            </a:pPr>
+            <a:r>
+              <a:rPr lang="en-US" sz="2600" b="1" dirty="0">
+                <a:solidFill>
+                  <a:srgbClr val="D8E1E7"/>
+                </a:solidFill>
+                <a:latin typeface="Arial" pitchFamily="34" charset="0"/>
+                <a:ea typeface="Arial" pitchFamily="34" charset="-122"/>
+                <a:cs typeface="Arial" pitchFamily="34" charset="-120"/>
+              </a:rPr>
+              <a:t>3</a:t>
+            </a:r>
+            <a:endParaRPr lang="en-US" sz="2600" dirty="0"/>
+          </a:p>
+        </p:txBody>
+      </p:sp>
+      <p:sp>
+        <p:nvSpPr>
+          <p:cNvPr id="21" name="Text 16"/>
+          <p:cNvSpPr/>
+          <p:nvPr/>
+        </p:nvSpPr>
+        <p:spPr>
+          <a:xfrm>
+            <a:off x="5486400" y="2743200"/>
+            <a:ext cx="1609344" cy="685800"/>
+          </a:xfrm>
+          <a:prstGeom prst="rect">
+            <a:avLst/>
+          </a:prstGeom>
+          <a:noFill/>
+          <a:ln/>
+        </p:spPr>
+        <p:txBody>
+          <a:bodyPr wrap="square" lIns="0" tIns="0" rIns="0" bIns="0" rtlCol="0" anchor="t"/>
+          <a:lstStyle/>
+          <a:p>
+            <a:pPr indent="0" marL="0">
+              <a:lnSpc>
+                <a:spcPct val="102000"/>
+              </a:lnSpc>
+              <a:buNone/>
+            </a:pPr>
+            <a:r>
+              <a:rPr lang="en-US" sz="1350" b="1" dirty="0">
+                <a:solidFill>
+                  <a:srgbClr val="16303F"/>
+                </a:solidFill>
+                <a:latin typeface="Arial" pitchFamily="34" charset="0"/>
+                <a:ea typeface="Arial" pitchFamily="34" charset="-122"/>
+                <a:cs typeface="Arial" pitchFamily="34" charset="-120"/>
+              </a:rPr>
+              <a:t>A estrutura (SPE)</a:t>
+            </a:r>
+            <a:endParaRPr lang="en-US" sz="1350" dirty="0"/>
+          </a:p>
+        </p:txBody>
+      </p:sp>
+      <p:sp>
+        <p:nvSpPr>
+          <p:cNvPr id="22" name="Text 17"/>
+          <p:cNvSpPr/>
+          <p:nvPr/>
+        </p:nvSpPr>
+        <p:spPr>
+          <a:xfrm>
+            <a:off x="5486400" y="3474720"/>
+            <a:ext cx="1609344" cy="1600200"/>
+          </a:xfrm>
+          <a:prstGeom prst="rect">
+            <a:avLst/>
+          </a:prstGeom>
+          <a:noFill/>
+          <a:ln/>
+        </p:spPr>
+        <p:txBody>
+          <a:bodyPr wrap="square" lIns="0" tIns="0" rIns="0" bIns="0" rtlCol="0" anchor="t"/>
+          <a:lstStyle/>
           <a:p>
             <a:pPr indent="0" marL="0">
               <a:lnSpc>
@@ -11079,8 +12588,220 @@
               </a:lnSpc>
               <a:buNone/>
             </a:pPr>
-            <a:endParaRPr lang="en-US" sz="1150" dirty="0"/>
-          </a:p>
+            <a:r>
+              <a:rPr lang="en-US" sz="1050" dirty="0">
+                <a:solidFill>
+                  <a:srgbClr val="3E4E59"/>
+                </a:solidFill>
+                <a:latin typeface="Arial" pitchFamily="34" charset="0"/>
+                <a:ea typeface="Arial" pitchFamily="34" charset="-122"/>
+                <a:cs typeface="Arial" pitchFamily="34" charset="-120"/>
+              </a:rPr>
+              <a:t>A SPE aluga equipamentos e cotas para a entidade organizadora (consórcio ou cooperativa).</a:t>
+            </a:r>
+            <a:endParaRPr lang="en-US" sz="1050" dirty="0"/>
+          </a:p>
+        </p:txBody>
+      </p:sp>
+      <p:sp>
+        <p:nvSpPr>
+          <p:cNvPr id="23" name="Shape 18"/>
+          <p:cNvSpPr/>
+          <p:nvPr/>
+        </p:nvSpPr>
+        <p:spPr>
+          <a:xfrm>
+            <a:off x="7365492" y="3419856"/>
+            <a:ext cx="192024" cy="201168"/>
+          </a:xfrm>
+          <a:prstGeom prst="chevron">
+            <a:avLst/>
+          </a:prstGeom>
+          <a:solidFill>
+            <a:srgbClr val="F2B705"/>
+          </a:solidFill>
+          <a:ln/>
+        </p:spPr>
+      </p:sp>
+      <p:sp>
+        <p:nvSpPr>
+          <p:cNvPr id="24" name="Shape 19"/>
+          <p:cNvSpPr/>
+          <p:nvPr/>
+        </p:nvSpPr>
+        <p:spPr>
+          <a:xfrm>
+            <a:off x="7571232" y="1737360"/>
+            <a:ext cx="2121408" cy="3566160"/>
+          </a:xfrm>
+          <a:prstGeom prst="roundRect">
+            <a:avLst>
+              <a:gd name="adj" fmla="val 3448"/>
+            </a:avLst>
+          </a:prstGeom>
+          <a:solidFill>
+            <a:srgbClr val="F5F8FA"/>
+          </a:solidFill>
+          <a:ln w="9525">
+            <a:solidFill>
+              <a:srgbClr val="D9E2E8"/>
+            </a:solidFill>
+            <a:prstDash val="solid"/>
+          </a:ln>
+          <a:effectLst>
+            <a:outerShdw sx="100000" sy="100000" kx="0" ky="0" algn="bl" rotWithShape="0" blurRad="88900" dist="25400" dir="5400000">
+              <a:srgbClr val="9AAAB4">
+                <a:alpha val="35000"/>
+              </a:srgbClr>
+            </a:outerShdw>
+          </a:effectLst>
+        </p:spPr>
+      </p:sp>
+      <p:sp>
+        <p:nvSpPr>
+          <p:cNvPr id="25" name="Shape 20"/>
+          <p:cNvSpPr/>
+          <p:nvPr/>
+        </p:nvSpPr>
+        <p:spPr>
+          <a:xfrm>
+            <a:off x="7827264" y="2011680"/>
+            <a:ext cx="530352" cy="530352"/>
+          </a:xfrm>
+          <a:prstGeom prst="ellipse">
+            <a:avLst/>
+          </a:prstGeom>
+          <a:solidFill>
+            <a:srgbClr val="F2B705"/>
+          </a:solidFill>
+          <a:ln/>
+        </p:spPr>
+      </p:sp>
+      <p:pic>
+        <p:nvPicPr>
+          <p:cNvPr id="26" name="Image 3" descr="preencoded.png">    </p:cNvPr>
+          <p:cNvPicPr>
+            <a:picLocks noChangeAspect="1"/>
+          </p:cNvPicPr>
+          <p:nvPr/>
+        </p:nvPicPr>
+        <p:blipFill>
+          <a:blip r:embed="rId4"/>
+          <a:stretch>
+            <a:fillRect/>
+          </a:stretch>
+        </p:blipFill>
+        <p:spPr>
+          <a:xfrm>
+            <a:off x="7943941" y="2128357"/>
+            <a:ext cx="296997" cy="296997"/>
+          </a:xfrm>
+          <a:prstGeom prst="rect">
+            <a:avLst/>
+          </a:prstGeom>
+        </p:spPr>
+      </p:pic>
+      <p:sp>
+        <p:nvSpPr>
+          <p:cNvPr id="27" name="Text 21"/>
+          <p:cNvSpPr/>
+          <p:nvPr/>
+        </p:nvSpPr>
+        <p:spPr>
+          <a:xfrm>
+            <a:off x="9006840" y="1956816"/>
+            <a:ext cx="457200" cy="502920"/>
+          </a:xfrm>
+          <a:prstGeom prst="rect">
+            <a:avLst/>
+          </a:prstGeom>
+          <a:noFill/>
+          <a:ln/>
+        </p:spPr>
+        <p:txBody>
+          <a:bodyPr wrap="square" lIns="0" tIns="0" rIns="0" bIns="0" rtlCol="0" anchor="ctr"/>
+          <a:lstStyle/>
+          <a:p>
+            <a:pPr algn="r" indent="0" marL="0">
+              <a:buNone/>
+            </a:pPr>
+            <a:r>
+              <a:rPr lang="en-US" sz="2600" b="1" dirty="0">
+                <a:solidFill>
+                  <a:srgbClr val="D8E1E7"/>
+                </a:solidFill>
+                <a:latin typeface="Arial" pitchFamily="34" charset="0"/>
+                <a:ea typeface="Arial" pitchFamily="34" charset="-122"/>
+                <a:cs typeface="Arial" pitchFamily="34" charset="-120"/>
+              </a:rPr>
+              <a:t>4</a:t>
+            </a:r>
+            <a:endParaRPr lang="en-US" sz="2600" dirty="0"/>
+          </a:p>
+        </p:txBody>
+      </p:sp>
+      <p:sp>
+        <p:nvSpPr>
+          <p:cNvPr id="28" name="Text 22"/>
+          <p:cNvSpPr/>
+          <p:nvPr/>
+        </p:nvSpPr>
+        <p:spPr>
+          <a:xfrm>
+            <a:off x="7827264" y="2743200"/>
+            <a:ext cx="1609344" cy="685800"/>
+          </a:xfrm>
+          <a:prstGeom prst="rect">
+            <a:avLst/>
+          </a:prstGeom>
+          <a:noFill/>
+          <a:ln/>
+        </p:spPr>
+        <p:txBody>
+          <a:bodyPr wrap="square" lIns="0" tIns="0" rIns="0" bIns="0" rtlCol="0" anchor="t"/>
+          <a:lstStyle/>
+          <a:p>
+            <a:pPr indent="0" marL="0">
+              <a:lnSpc>
+                <a:spcPct val="102000"/>
+              </a:lnSpc>
+              <a:buNone/>
+            </a:pPr>
+            <a:r>
+              <a:rPr lang="en-US" sz="1350" b="1" dirty="0">
+                <a:solidFill>
+                  <a:srgbClr val="16303F"/>
+                </a:solidFill>
+                <a:latin typeface="Arial" pitchFamily="34" charset="0"/>
+                <a:ea typeface="Arial" pitchFamily="34" charset="-122"/>
+                <a:cs typeface="Arial" pitchFamily="34" charset="-120"/>
+              </a:rPr>
+              <a:t>Monetização</a:t>
+            </a:r>
+            <a:endParaRPr lang="en-US" sz="1350" dirty="0"/>
+          </a:p>
+        </p:txBody>
+      </p:sp>
+      <p:sp>
+        <p:nvSpPr>
+          <p:cNvPr id="29" name="Text 23"/>
+          <p:cNvSpPr/>
+          <p:nvPr/>
+        </p:nvSpPr>
+        <p:spPr>
+          <a:xfrm>
+            <a:off x="7827264" y="3474720"/>
+            <a:ext cx="1609344" cy="1600200"/>
+          </a:xfrm>
+          <a:prstGeom prst="rect">
+            <a:avLst/>
+          </a:prstGeom>
+          <a:noFill/>
+          <a:ln/>
+        </p:spPr>
+        <p:txBody>
+          <a:bodyPr wrap="square" lIns="0" tIns="0" rIns="0" bIns="0" rtlCol="0" anchor="t"/>
+          <a:lstStyle/>
           <a:p>
             <a:pPr indent="0" marL="0">
               <a:lnSpc>
@@ -11089,7 +12810,7 @@
               <a:buNone/>
             </a:pPr>
             <a:r>
-              <a:rPr lang="en-US" sz="1150" dirty="0">
+              <a:rPr lang="en-US" sz="1050" dirty="0">
                 <a:solidFill>
                   <a:srgbClr val="3E4E59"/>
                 </a:solidFill>
@@ -11097,10 +12818,211 @@
                 <a:ea typeface="Arial" pitchFamily="34" charset="-122"/>
                 <a:cs typeface="Arial" pitchFamily="34" charset="-120"/>
               </a:rPr>
-              <a:t>O benefício é pleno até 2028, cai 20% ao ano a partir de 2029 e termina em 2033 — posicionar a UFV + BESS agora maximiza o caixa dos melhores anos.</a:t>
-            </a:r>
-            <a:endParaRPr lang="en-US" sz="1150" dirty="0"/>
-          </a:p>
+              <a:t>Produtores rurais e agroindústrias consorciados (Grupo B3) pagam o aluguel da cota com desconto atrativo (ex.: 27%).</a:t>
+            </a:r>
+            <a:endParaRPr lang="en-US" sz="1050" dirty="0"/>
+          </a:p>
+        </p:txBody>
+      </p:sp>
+      <p:sp>
+        <p:nvSpPr>
+          <p:cNvPr id="30" name="Shape 24"/>
+          <p:cNvSpPr/>
+          <p:nvPr/>
+        </p:nvSpPr>
+        <p:spPr>
+          <a:xfrm>
+            <a:off x="9706356" y="3419856"/>
+            <a:ext cx="192024" cy="201168"/>
+          </a:xfrm>
+          <a:prstGeom prst="chevron">
+            <a:avLst/>
+          </a:prstGeom>
+          <a:solidFill>
+            <a:srgbClr val="F2B705"/>
+          </a:solidFill>
+          <a:ln/>
+        </p:spPr>
+      </p:sp>
+      <p:sp>
+        <p:nvSpPr>
+          <p:cNvPr id="31" name="Shape 25"/>
+          <p:cNvSpPr/>
+          <p:nvPr/>
+        </p:nvSpPr>
+        <p:spPr>
+          <a:xfrm>
+            <a:off x="9912096" y="1737360"/>
+            <a:ext cx="2121408" cy="3566160"/>
+          </a:xfrm>
+          <a:prstGeom prst="roundRect">
+            <a:avLst>
+              <a:gd name="adj" fmla="val 3448"/>
+            </a:avLst>
+          </a:prstGeom>
+          <a:solidFill>
+            <a:srgbClr val="F5F8FA"/>
+          </a:solidFill>
+          <a:ln w="9525">
+            <a:solidFill>
+              <a:srgbClr val="D9E2E8"/>
+            </a:solidFill>
+            <a:prstDash val="solid"/>
+          </a:ln>
+          <a:effectLst>
+            <a:outerShdw sx="100000" sy="100000" kx="0" ky="0" algn="bl" rotWithShape="0" blurRad="88900" dist="25400" dir="5400000">
+              <a:srgbClr val="9AAAB4">
+                <a:alpha val="35000"/>
+              </a:srgbClr>
+            </a:outerShdw>
+          </a:effectLst>
+        </p:spPr>
+      </p:sp>
+      <p:sp>
+        <p:nvSpPr>
+          <p:cNvPr id="32" name="Shape 26"/>
+          <p:cNvSpPr/>
+          <p:nvPr/>
+        </p:nvSpPr>
+        <p:spPr>
+          <a:xfrm>
+            <a:off x="10168128" y="2011680"/>
+            <a:ext cx="530352" cy="530352"/>
+          </a:xfrm>
+          <a:prstGeom prst="ellipse">
+            <a:avLst/>
+          </a:prstGeom>
+          <a:solidFill>
+            <a:srgbClr val="F2B705"/>
+          </a:solidFill>
+          <a:ln/>
+        </p:spPr>
+      </p:sp>
+      <p:pic>
+        <p:nvPicPr>
+          <p:cNvPr id="33" name="Image 4" descr="preencoded.png">    </p:cNvPr>
+          <p:cNvPicPr>
+            <a:picLocks noChangeAspect="1"/>
+          </p:cNvPicPr>
+          <p:nvPr/>
+        </p:nvPicPr>
+        <p:blipFill>
+          <a:blip r:embed="rId5"/>
+          <a:stretch>
+            <a:fillRect/>
+          </a:stretch>
+        </p:blipFill>
+        <p:spPr>
+          <a:xfrm>
+            <a:off x="10284805" y="2128357"/>
+            <a:ext cx="296997" cy="296997"/>
+          </a:xfrm>
+          <a:prstGeom prst="rect">
+            <a:avLst/>
+          </a:prstGeom>
+        </p:spPr>
+      </p:pic>
+      <p:sp>
+        <p:nvSpPr>
+          <p:cNvPr id="34" name="Text 27"/>
+          <p:cNvSpPr/>
+          <p:nvPr/>
+        </p:nvSpPr>
+        <p:spPr>
+          <a:xfrm>
+            <a:off x="11347704" y="1956816"/>
+            <a:ext cx="457200" cy="502920"/>
+          </a:xfrm>
+          <a:prstGeom prst="rect">
+            <a:avLst/>
+          </a:prstGeom>
+          <a:noFill/>
+          <a:ln/>
+        </p:spPr>
+        <p:txBody>
+          <a:bodyPr wrap="square" lIns="0" tIns="0" rIns="0" bIns="0" rtlCol="0" anchor="ctr"/>
+          <a:lstStyle/>
+          <a:p>
+            <a:pPr algn="r" indent="0" marL="0">
+              <a:buNone/>
+            </a:pPr>
+            <a:r>
+              <a:rPr lang="en-US" sz="2600" b="1" dirty="0">
+                <a:solidFill>
+                  <a:srgbClr val="D8E1E7"/>
+                </a:solidFill>
+                <a:latin typeface="Arial" pitchFamily="34" charset="0"/>
+                <a:ea typeface="Arial" pitchFamily="34" charset="-122"/>
+                <a:cs typeface="Arial" pitchFamily="34" charset="-120"/>
+              </a:rPr>
+              <a:t>5</a:t>
+            </a:r>
+            <a:endParaRPr lang="en-US" sz="2600" dirty="0"/>
+          </a:p>
+        </p:txBody>
+      </p:sp>
+      <p:sp>
+        <p:nvSpPr>
+          <p:cNvPr id="35" name="Text 28"/>
+          <p:cNvSpPr/>
+          <p:nvPr/>
+        </p:nvSpPr>
+        <p:spPr>
+          <a:xfrm>
+            <a:off x="10168128" y="2743200"/>
+            <a:ext cx="1609344" cy="685800"/>
+          </a:xfrm>
+          <a:prstGeom prst="rect">
+            <a:avLst/>
+          </a:prstGeom>
+          <a:noFill/>
+          <a:ln/>
+        </p:spPr>
+        <p:txBody>
+          <a:bodyPr wrap="square" lIns="0" tIns="0" rIns="0" bIns="0" rtlCol="0" anchor="t"/>
+          <a:lstStyle/>
+          <a:p>
+            <a:pPr indent="0" marL="0">
+              <a:lnSpc>
+                <a:spcPct val="102000"/>
+              </a:lnSpc>
+              <a:buNone/>
+            </a:pPr>
+            <a:r>
+              <a:rPr lang="en-US" sz="1350" b="1" dirty="0">
+                <a:solidFill>
+                  <a:srgbClr val="16303F"/>
+                </a:solidFill>
+                <a:latin typeface="Arial" pitchFamily="34" charset="0"/>
+                <a:ea typeface="Arial" pitchFamily="34" charset="-122"/>
+                <a:cs typeface="Arial" pitchFamily="34" charset="-120"/>
+              </a:rPr>
+              <a:t>Abatimento</a:t>
+            </a:r>
+            <a:endParaRPr lang="en-US" sz="1350" dirty="0"/>
+          </a:p>
+        </p:txBody>
+      </p:sp>
+      <p:sp>
+        <p:nvSpPr>
+          <p:cNvPr id="36" name="Text 29"/>
+          <p:cNvSpPr/>
+          <p:nvPr/>
+        </p:nvSpPr>
+        <p:spPr>
+          <a:xfrm>
+            <a:off x="10168128" y="3474720"/>
+            <a:ext cx="1609344" cy="1600200"/>
+          </a:xfrm>
+          <a:prstGeom prst="rect">
+            <a:avLst/>
+          </a:prstGeom>
+          <a:noFill/>
+          <a:ln/>
+        </p:spPr>
+        <p:txBody>
+          <a:bodyPr wrap="square" lIns="0" tIns="0" rIns="0" bIns="0" rtlCol="0" anchor="t"/>
+          <a:lstStyle/>
           <a:p>
             <a:pPr indent="0" marL="0">
               <a:lnSpc>
@@ -11108,17 +13030,83 @@
               </a:lnSpc>
               <a:buNone/>
             </a:pPr>
-            <a:endParaRPr lang="en-US" sz="1150" dirty="0"/>
-          </a:p>
+            <a:r>
+              <a:rPr lang="en-US" sz="1050" dirty="0">
+                <a:solidFill>
+                  <a:srgbClr val="3E4E59"/>
+                </a:solidFill>
+                <a:latin typeface="Arial" pitchFamily="34" charset="0"/>
+                <a:ea typeface="Arial" pitchFamily="34" charset="-122"/>
+                <a:cs typeface="Arial" pitchFamily="34" charset="-120"/>
+              </a:rPr>
+              <a:t>Os créditos abatem a fatura dos clientes na distribuidora e o capital retorna à SPE.</a:t>
+            </a:r>
+            <a:endParaRPr lang="en-US" sz="1050" dirty="0"/>
+          </a:p>
+        </p:txBody>
+      </p:sp>
+      <p:sp>
+        <p:nvSpPr>
+          <p:cNvPr id="37" name="Shape 30"/>
+          <p:cNvSpPr/>
+          <p:nvPr/>
+        </p:nvSpPr>
+        <p:spPr>
+          <a:xfrm>
+            <a:off x="548640" y="5623560"/>
+            <a:ext cx="11091672" cy="566928"/>
+          </a:xfrm>
+          <a:prstGeom prst="roundRect">
+            <a:avLst>
+              <a:gd name="adj" fmla="val 12903"/>
+            </a:avLst>
+          </a:prstGeom>
+          <a:solidFill>
+            <a:srgbClr val="EAF1F6"/>
+          </a:solidFill>
+          <a:ln/>
+        </p:spPr>
+      </p:sp>
+      <p:sp>
+        <p:nvSpPr>
+          <p:cNvPr id="38" name="Text 31"/>
+          <p:cNvSpPr/>
+          <p:nvPr/>
+        </p:nvSpPr>
+        <p:spPr>
+          <a:xfrm>
+            <a:off x="777240" y="5623560"/>
+            <a:ext cx="10698480" cy="566928"/>
+          </a:xfrm>
+          <a:prstGeom prst="rect">
+            <a:avLst/>
+          </a:prstGeom>
+          <a:noFill/>
+          <a:ln/>
+        </p:spPr>
+        <p:txBody>
+          <a:bodyPr wrap="square" lIns="0" tIns="0" rIns="0" bIns="0" rtlCol="0" anchor="ctr"/>
+          <a:lstStyle/>
           <a:p>
             <a:pPr indent="0" marL="0">
-              <a:lnSpc>
-                <a:spcPct val="110000"/>
-              </a:lnSpc>
-              <a:buNone/>
-            </a:pPr>
-            <a:r>
-              <a:rPr lang="en-US" sz="1150" dirty="0">
+              <a:buNone/>
+            </a:pPr>
+            <a:r>
+              <a:rPr lang="en-US" sz="1250" b="1" dirty="0">
+                <a:solidFill>
+                  <a:srgbClr val="16303F"/>
+                </a:solidFill>
+                <a:latin typeface="Arial" pitchFamily="34" charset="0"/>
+                <a:ea typeface="Arial" pitchFamily="34" charset="-122"/>
+                <a:cs typeface="Arial" pitchFamily="34" charset="-120"/>
+              </a:rPr>
+              <a:t>Ciclo virtuoso:  </a:t>
+            </a:r>
+            <a:pPr indent="0" marL="0">
+              <a:buNone/>
+            </a:pPr>
+            <a:r>
+              <a:rPr lang="en-US" sz="1250" dirty="0">
                 <a:solidFill>
                   <a:srgbClr val="3E4E59"/>
                 </a:solidFill>
@@ -11126,54 +13114,15 @@
                 <a:ea typeface="Arial" pitchFamily="34" charset="-122"/>
                 <a:cs typeface="Arial" pitchFamily="34" charset="-120"/>
               </a:rPr>
-              <a:t>Bônus agro: ICMS zero em equipamentos de irrigação (Decreto nº 1.971/2026).</a:t>
-            </a:r>
-            <a:endParaRPr lang="en-US" sz="1150" dirty="0"/>
-          </a:p>
-        </p:txBody>
-      </p:sp>
-      <p:sp>
-        <p:nvSpPr>
-          <p:cNvPr id="9" name="Text 5"/>
-          <p:cNvSpPr/>
-          <p:nvPr/>
-        </p:nvSpPr>
-        <p:spPr>
-          <a:xfrm>
-            <a:off x="594360" y="6144768"/>
-            <a:ext cx="6949440" cy="256032"/>
-          </a:xfrm>
-          <a:prstGeom prst="rect">
-            <a:avLst/>
-          </a:prstGeom>
-          <a:noFill/>
-          <a:ln/>
-        </p:spPr>
-        <p:txBody>
-          <a:bodyPr wrap="square" lIns="0" tIns="0" rIns="0" bIns="0" rtlCol="0" anchor="ctr"/>
-          <a:lstStyle/>
-          <a:p>
-            <a:pPr indent="0" marL="0">
-              <a:buNone/>
-            </a:pPr>
-            <a:r>
-              <a:rPr lang="en-US" sz="850" i="1" dirty="0">
-                <a:solidFill>
-                  <a:srgbClr val="7A8A94"/>
-                </a:solidFill>
-                <a:latin typeface="Arial" pitchFamily="34" charset="0"/>
-                <a:ea typeface="Arial" pitchFamily="34" charset="-122"/>
-                <a:cs typeface="Arial" pitchFamily="34" charset="-120"/>
-              </a:rPr>
-              <a:t>Fontes: CONFAZ (Convênio ICMS nº 16/2015) · SEFAZ-MT · Decreto MT nº 1.971/2026.</a:t>
-            </a:r>
-            <a:endParaRPr lang="en-US" sz="850" dirty="0"/>
-          </a:p>
-        </p:txBody>
-      </p:sp>
-      <p:sp>
-        <p:nvSpPr>
-          <p:cNvPr id="11" name="Text 6"/>
+              <a:t>o abatimento na fatura remunera a SPE, que reinveste na operação — fechando o circuito financeiro da Geração Compartilhada.</a:t>
+            </a:r>
+            <a:endParaRPr lang="en-US" sz="1250" dirty="0"/>
+          </a:p>
+        </p:txBody>
+      </p:sp>
+      <p:sp>
+        <p:nvSpPr>
+          <p:cNvPr id="40" name="Text 32"/>
           <p:cNvSpPr/>
           <p:nvPr/>
         </p:nvSpPr>
@@ -11212,7 +13161,7 @@
       </p:sp>
       <p:sp>
         <p:nvSpPr>
-          <p:cNvPr id="12" name="Text 7"/>
+          <p:cNvPr id="41" name="Text 33"/>
           <p:cNvSpPr/>
           <p:nvPr/>
         </p:nvSpPr>

--- a/apresentacoes/BESS_Brasil_Lucas_Silva_Costa.pptx
+++ b/apresentacoes/BESS_Brasil_Lucas_Silva_Costa.pptx
@@ -9501,357 +9501,33 @@
           </a:p>
         </p:txBody>
       </p:sp>
-      <p:sp>
-        <p:nvSpPr>
-          <p:cNvPr id="3" name="Shape 1"/>
-          <p:cNvSpPr/>
-          <p:nvPr/>
-        </p:nvSpPr>
-        <p:spPr>
-          <a:xfrm>
-            <a:off x="685800" y="5138928"/>
-            <a:ext cx="4160520" cy="786384"/>
-          </a:xfrm>
-          <a:prstGeom prst="roundRect">
-            <a:avLst>
-              <a:gd name="adj" fmla="val 6977"/>
-            </a:avLst>
-          </a:prstGeom>
-          <a:solidFill>
-            <a:srgbClr val="31485A"/>
-          </a:solidFill>
-          <a:ln/>
-          <a:effectLst>
-            <a:outerShdw sx="100000" sy="100000" kx="0" ky="0" algn="bl" rotWithShape="0" blurRad="88900" dist="25400" dir="5400000">
-              <a:srgbClr val="9AAAB4">
-                <a:alpha val="35000"/>
-              </a:srgbClr>
-            </a:outerShdw>
-          </a:effectLst>
-        </p:spPr>
-      </p:sp>
-      <p:sp>
-        <p:nvSpPr>
-          <p:cNvPr id="4" name="Text 2"/>
-          <p:cNvSpPr/>
-          <p:nvPr/>
-        </p:nvSpPr>
-        <p:spPr>
-          <a:xfrm>
-            <a:off x="886968" y="5138928"/>
-            <a:ext cx="3758184" cy="786384"/>
-          </a:xfrm>
-          <a:prstGeom prst="rect">
-            <a:avLst/>
-          </a:prstGeom>
-          <a:noFill/>
-          <a:ln/>
-        </p:spPr>
-        <p:txBody>
-          <a:bodyPr wrap="square" lIns="0" tIns="0" rIns="0" bIns="0" rtlCol="0" anchor="ctr"/>
-          <a:lstStyle/>
-          <a:p>
-            <a:pPr indent="0" marL="0">
-              <a:lnSpc>
-                <a:spcPct val="100000"/>
-              </a:lnSpc>
-              <a:buNone/>
-            </a:pPr>
-            <a:r>
-              <a:rPr lang="en-US" sz="1250" b="1" dirty="0">
-                <a:solidFill>
-                  <a:srgbClr val="FFFFFF"/>
-                </a:solidFill>
-                <a:latin typeface="Arial" pitchFamily="34" charset="0"/>
-                <a:ea typeface="Arial" pitchFamily="34" charset="-122"/>
-                <a:cs typeface="Arial" pitchFamily="34" charset="-120"/>
-              </a:rPr>
-              <a:t>Arbitragem tarifária (Time Shifting)</a:t>
-            </a:r>
-            <a:endParaRPr lang="en-US" sz="1250" dirty="0"/>
-          </a:p>
-        </p:txBody>
-      </p:sp>
-      <p:sp>
-        <p:nvSpPr>
-          <p:cNvPr id="5" name="Shape 3"/>
-          <p:cNvSpPr/>
-          <p:nvPr/>
-        </p:nvSpPr>
-        <p:spPr>
-          <a:xfrm>
-            <a:off x="685800" y="4233672"/>
-            <a:ext cx="4160520" cy="786384"/>
-          </a:xfrm>
-          <a:prstGeom prst="roundRect">
-            <a:avLst>
-              <a:gd name="adj" fmla="val 6977"/>
-            </a:avLst>
-          </a:prstGeom>
-          <a:solidFill>
-            <a:srgbClr val="2E7DAF"/>
-          </a:solidFill>
-          <a:ln/>
-          <a:effectLst>
-            <a:outerShdw sx="100000" sy="100000" kx="0" ky="0" algn="bl" rotWithShape="0" blurRad="88900" dist="25400" dir="5400000">
-              <a:srgbClr val="9AAAB4">
-                <a:alpha val="35000"/>
-              </a:srgbClr>
-            </a:outerShdw>
-          </a:effectLst>
-        </p:spPr>
-      </p:sp>
-      <p:sp>
-        <p:nvSpPr>
-          <p:cNvPr id="6" name="Text 4"/>
-          <p:cNvSpPr/>
-          <p:nvPr/>
-        </p:nvSpPr>
-        <p:spPr>
-          <a:xfrm>
-            <a:off x="886968" y="4233672"/>
-            <a:ext cx="3758184" cy="786384"/>
-          </a:xfrm>
-          <a:prstGeom prst="rect">
-            <a:avLst/>
-          </a:prstGeom>
-          <a:noFill/>
-          <a:ln/>
-        </p:spPr>
-        <p:txBody>
-          <a:bodyPr wrap="square" lIns="0" tIns="0" rIns="0" bIns="0" rtlCol="0" anchor="ctr"/>
-          <a:lstStyle/>
-          <a:p>
-            <a:pPr indent="0" marL="0">
-              <a:lnSpc>
-                <a:spcPct val="100000"/>
-              </a:lnSpc>
-              <a:buNone/>
-            </a:pPr>
-            <a:r>
-              <a:rPr lang="en-US" sz="1250" b="1" dirty="0">
-                <a:solidFill>
-                  <a:srgbClr val="FFFFFF"/>
-                </a:solidFill>
-                <a:latin typeface="Arial" pitchFamily="34" charset="0"/>
-                <a:ea typeface="Arial" pitchFamily="34" charset="-122"/>
-                <a:cs typeface="Arial" pitchFamily="34" charset="-120"/>
-              </a:rPr>
-              <a:t>Peak Shaving (demanda contratada)</a:t>
-            </a:r>
-            <a:endParaRPr lang="en-US" sz="1250" dirty="0"/>
-          </a:p>
-        </p:txBody>
-      </p:sp>
-      <p:sp>
-        <p:nvSpPr>
-          <p:cNvPr id="7" name="Shape 5"/>
-          <p:cNvSpPr/>
-          <p:nvPr/>
-        </p:nvSpPr>
-        <p:spPr>
-          <a:xfrm>
-            <a:off x="685800" y="3328416"/>
-            <a:ext cx="4160520" cy="786384"/>
-          </a:xfrm>
-          <a:prstGeom prst="roundRect">
-            <a:avLst>
-              <a:gd name="adj" fmla="val 6977"/>
-            </a:avLst>
-          </a:prstGeom>
-          <a:solidFill>
-            <a:srgbClr val="7FB0CE"/>
-          </a:solidFill>
-          <a:ln/>
-          <a:effectLst>
-            <a:outerShdw sx="100000" sy="100000" kx="0" ky="0" algn="bl" rotWithShape="0" blurRad="88900" dist="25400" dir="5400000">
-              <a:srgbClr val="9AAAB4">
-                <a:alpha val="35000"/>
-              </a:srgbClr>
-            </a:outerShdw>
-          </a:effectLst>
-        </p:spPr>
-      </p:sp>
-      <p:sp>
-        <p:nvSpPr>
-          <p:cNvPr id="8" name="Text 6"/>
-          <p:cNvSpPr/>
-          <p:nvPr/>
-        </p:nvSpPr>
-        <p:spPr>
-          <a:xfrm>
-            <a:off x="886968" y="3328416"/>
-            <a:ext cx="3758184" cy="786384"/>
-          </a:xfrm>
-          <a:prstGeom prst="rect">
-            <a:avLst/>
-          </a:prstGeom>
-          <a:noFill/>
-          <a:ln/>
-        </p:spPr>
-        <p:txBody>
-          <a:bodyPr wrap="square" lIns="0" tIns="0" rIns="0" bIns="0" rtlCol="0" anchor="ctr"/>
-          <a:lstStyle/>
-          <a:p>
-            <a:pPr indent="0" marL="0">
-              <a:lnSpc>
-                <a:spcPct val="100000"/>
-              </a:lnSpc>
-              <a:buNone/>
-            </a:pPr>
-            <a:r>
-              <a:rPr lang="en-US" sz="1250" b="1" dirty="0">
-                <a:solidFill>
-                  <a:srgbClr val="102A3C"/>
-                </a:solidFill>
-                <a:latin typeface="Arial" pitchFamily="34" charset="0"/>
-                <a:ea typeface="Arial" pitchFamily="34" charset="-122"/>
-                <a:cs typeface="Arial" pitchFamily="34" charset="-120"/>
-              </a:rPr>
-              <a:t>Anti-curtailment (excedente FV)</a:t>
-            </a:r>
-            <a:endParaRPr lang="en-US" sz="1250" dirty="0"/>
-          </a:p>
-        </p:txBody>
-      </p:sp>
-      <p:sp>
-        <p:nvSpPr>
-          <p:cNvPr id="9" name="Shape 7"/>
-          <p:cNvSpPr/>
-          <p:nvPr/>
-        </p:nvSpPr>
-        <p:spPr>
-          <a:xfrm>
-            <a:off x="685800" y="2423160"/>
-            <a:ext cx="4160520" cy="786384"/>
-          </a:xfrm>
-          <a:prstGeom prst="roundRect">
-            <a:avLst>
-              <a:gd name="adj" fmla="val 6977"/>
-            </a:avLst>
-          </a:prstGeom>
-          <a:solidFill>
-            <a:srgbClr val="F2B705"/>
-          </a:solidFill>
-          <a:ln/>
-          <a:effectLst>
-            <a:outerShdw sx="100000" sy="100000" kx="0" ky="0" algn="bl" rotWithShape="0" blurRad="88900" dist="25400" dir="5400000">
-              <a:srgbClr val="9AAAB4">
-                <a:alpha val="35000"/>
-              </a:srgbClr>
-            </a:outerShdw>
-          </a:effectLst>
-        </p:spPr>
-      </p:sp>
-      <p:sp>
-        <p:nvSpPr>
-          <p:cNvPr id="10" name="Text 8"/>
-          <p:cNvSpPr/>
-          <p:nvPr/>
-        </p:nvSpPr>
-        <p:spPr>
-          <a:xfrm>
-            <a:off x="886968" y="2423160"/>
-            <a:ext cx="3758184" cy="786384"/>
-          </a:xfrm>
-          <a:prstGeom prst="rect">
-            <a:avLst/>
-          </a:prstGeom>
-          <a:noFill/>
-          <a:ln/>
-        </p:spPr>
-        <p:txBody>
-          <a:bodyPr wrap="square" lIns="0" tIns="0" rIns="0" bIns="0" rtlCol="0" anchor="ctr"/>
-          <a:lstStyle/>
-          <a:p>
-            <a:pPr indent="0" marL="0">
-              <a:lnSpc>
-                <a:spcPct val="100000"/>
-              </a:lnSpc>
-              <a:buNone/>
-            </a:pPr>
-            <a:r>
-              <a:rPr lang="en-US" sz="1250" b="1" dirty="0">
-                <a:solidFill>
-                  <a:srgbClr val="102A3C"/>
-                </a:solidFill>
-                <a:latin typeface="Arial" pitchFamily="34" charset="0"/>
-                <a:ea typeface="Arial" pitchFamily="34" charset="-122"/>
-                <a:cs typeface="Arial" pitchFamily="34" charset="-120"/>
-              </a:rPr>
-              <a:t>Créditos de GD / Geração Compartilhada</a:t>
-            </a:r>
-            <a:endParaRPr lang="en-US" sz="1250" dirty="0"/>
-          </a:p>
-        </p:txBody>
-      </p:sp>
-      <p:sp>
-        <p:nvSpPr>
-          <p:cNvPr id="11" name="Shape 9"/>
-          <p:cNvSpPr/>
-          <p:nvPr/>
-        </p:nvSpPr>
-        <p:spPr>
-          <a:xfrm>
-            <a:off x="5010912" y="2423160"/>
-            <a:ext cx="384048" cy="3502152"/>
-          </a:xfrm>
-          <a:prstGeom prst="upArrow">
-            <a:avLst/>
-          </a:prstGeom>
-          <a:solidFill>
-            <a:srgbClr val="EAF1F6"/>
-          </a:solidFill>
-          <a:ln w="9525">
-            <a:solidFill>
-              <a:srgbClr val="D9E2E8"/>
-            </a:solidFill>
-            <a:prstDash val="solid"/>
-          </a:ln>
-        </p:spPr>
-      </p:sp>
-      <p:sp>
-        <p:nvSpPr>
-          <p:cNvPr id="12" name="Text 10"/>
-          <p:cNvSpPr/>
-          <p:nvPr/>
-        </p:nvSpPr>
-        <p:spPr>
-          <a:xfrm>
-            <a:off x="685800" y="1536192"/>
-            <a:ext cx="4160520" cy="292608"/>
-          </a:xfrm>
-          <a:prstGeom prst="rect">
-            <a:avLst/>
-          </a:prstGeom>
-          <a:noFill/>
-          <a:ln/>
-        </p:spPr>
-        <p:txBody>
-          <a:bodyPr wrap="square" lIns="0" tIns="0" rIns="0" bIns="0" rtlCol="0" anchor="ctr"/>
-          <a:lstStyle/>
-          <a:p>
-            <a:pPr indent="0" marL="0">
-              <a:buNone/>
-            </a:pPr>
-            <a:r>
-              <a:rPr lang="en-US" sz="1050" b="1" spc="200" kern="0" dirty="0">
-                <a:solidFill>
-                  <a:srgbClr val="B78A00"/>
-                </a:solidFill>
-                <a:latin typeface="Arial" pitchFamily="34" charset="0"/>
-                <a:ea typeface="Arial" pitchFamily="34" charset="-122"/>
-                <a:cs typeface="Arial" pitchFamily="34" charset="-120"/>
-              </a:rPr>
-              <a:t>RECEITA ANUAL EMPILHADA</a:t>
-            </a:r>
-            <a:endParaRPr lang="en-US" sz="1050" dirty="0"/>
-          </a:p>
-        </p:txBody>
-      </p:sp>
-      <p:sp>
-        <p:nvSpPr>
-          <p:cNvPr id="13" name="Text 11"/>
+      <p:pic>
+        <p:nvPicPr>
+          <p:cNvPr id="3" name="Image 0" descr="stack.png">    </p:cNvPr>
+          <p:cNvPicPr>
+            <a:picLocks noChangeAspect="1"/>
+          </p:cNvPicPr>
+          <p:nvPr/>
+        </p:nvPicPr>
+        <p:blipFill>
+          <a:blip r:embed="rId1"/>
+          <a:stretch>
+            <a:fillRect/>
+          </a:stretch>
+        </p:blipFill>
+        <p:spPr>
+          <a:xfrm>
+            <a:off x="594360" y="1463040"/>
+            <a:ext cx="4663440" cy="4114800"/>
+          </a:xfrm>
+          <a:prstGeom prst="rect">
+            <a:avLst/>
+          </a:prstGeom>
+        </p:spPr>
+      </p:pic>
+      <p:sp>
+        <p:nvSpPr>
+          <p:cNvPr id="4" name="Text 1"/>
           <p:cNvSpPr/>
           <p:nvPr/>
         </p:nvSpPr>
@@ -9890,7 +9566,7 @@
       </p:sp>
       <p:sp>
         <p:nvSpPr>
-          <p:cNvPr id="14" name="Shape 12"/>
+          <p:cNvPr id="5" name="Shape 2"/>
           <p:cNvSpPr/>
           <p:nvPr/>
         </p:nvSpPr>
@@ -9912,7 +9588,7 @@
       </p:sp>
       <p:sp>
         <p:nvSpPr>
-          <p:cNvPr id="15" name="Text 13"/>
+          <p:cNvPr id="6" name="Text 3"/>
           <p:cNvSpPr/>
           <p:nvPr/>
         </p:nvSpPr>
@@ -9974,7 +9650,7 @@
       </p:sp>
       <p:sp>
         <p:nvSpPr>
-          <p:cNvPr id="16" name="Shape 14"/>
+          <p:cNvPr id="7" name="Shape 4"/>
           <p:cNvSpPr/>
           <p:nvPr/>
         </p:nvSpPr>
@@ -9996,7 +9672,7 @@
       </p:sp>
       <p:sp>
         <p:nvSpPr>
-          <p:cNvPr id="17" name="Text 15"/>
+          <p:cNvPr id="8" name="Text 5"/>
           <p:cNvSpPr/>
           <p:nvPr/>
         </p:nvSpPr>
@@ -10058,7 +9734,7 @@
       </p:sp>
       <p:sp>
         <p:nvSpPr>
-          <p:cNvPr id="18" name="Shape 16"/>
+          <p:cNvPr id="9" name="Shape 6"/>
           <p:cNvSpPr/>
           <p:nvPr/>
         </p:nvSpPr>
@@ -10080,7 +9756,7 @@
       </p:sp>
       <p:sp>
         <p:nvSpPr>
-          <p:cNvPr id="19" name="Text 17"/>
+          <p:cNvPr id="10" name="Text 7"/>
           <p:cNvSpPr/>
           <p:nvPr/>
         </p:nvSpPr>
@@ -10142,7 +9818,7 @@
       </p:sp>
       <p:sp>
         <p:nvSpPr>
-          <p:cNvPr id="20" name="Shape 18"/>
+          <p:cNvPr id="11" name="Shape 8"/>
           <p:cNvSpPr/>
           <p:nvPr/>
         </p:nvSpPr>
@@ -10164,7 +9840,7 @@
       </p:sp>
       <p:sp>
         <p:nvSpPr>
-          <p:cNvPr id="21" name="Text 19"/>
+          <p:cNvPr id="12" name="Text 9"/>
           <p:cNvSpPr/>
           <p:nvPr/>
         </p:nvSpPr>
@@ -10226,7 +9902,7 @@
       </p:sp>
       <p:sp>
         <p:nvSpPr>
-          <p:cNvPr id="22" name="Shape 20"/>
+          <p:cNvPr id="13" name="Shape 10"/>
           <p:cNvSpPr/>
           <p:nvPr/>
         </p:nvSpPr>
@@ -10248,7 +9924,7 @@
       </p:sp>
       <p:sp>
         <p:nvSpPr>
-          <p:cNvPr id="23" name="Text 21"/>
+          <p:cNvPr id="14" name="Text 11"/>
           <p:cNvSpPr/>
           <p:nvPr/>
         </p:nvSpPr>
@@ -10301,7 +9977,7 @@
       </p:sp>
       <p:sp>
         <p:nvSpPr>
-          <p:cNvPr id="25" name="Text 22"/>
+          <p:cNvPr id="16" name="Text 12"/>
           <p:cNvSpPr/>
           <p:nvPr/>
         </p:nvSpPr>
@@ -10340,7 +10016,7 @@
       </p:sp>
       <p:sp>
         <p:nvSpPr>
-          <p:cNvPr id="26" name="Text 23"/>
+          <p:cNvPr id="17" name="Text 13"/>
           <p:cNvSpPr/>
           <p:nvPr/>
         </p:nvSpPr>
